--- a/yocto_training_all_session_decks/session_decks/D3S3_DT_Debugging.pptx
+++ b/yocto_training_all_session_decks/session_decks/D3S3_DT_Debugging.pptx
@@ -5,28 +5,28 @@
     <p:sldMasterId id="2147483648" r:id="rId1"/>
   </p:sldMasterIdLst>
   <p:notesMasterIdLst>
-    <p:notesMasterId r:id="rId8"/>
+    <p:notesMasterId r:id="rId13"/>
   </p:notesMasterIdLst>
   <p:handoutMasterIdLst>
-    <p:handoutMasterId r:id="rId9"/>
+    <p:handoutMasterId r:id="rId14"/>
   </p:handoutMasterIdLst>
   <p:sldIdLst>
-    <p:sldId id="1007" r:id="rId18"/>
-    <p:sldId id="1008" r:id="rId19"/>
-    <p:sldId id="1009" r:id="rId20"/>
-    <p:sldId id="1010" r:id="rId21"/>
-    <p:sldId id="1011" r:id="rId22"/>
-    <p:sldId id="1012" r:id="rId23"/>
-    <p:sldId id="1013" r:id="rId24"/>
-    <p:sldId id="1014" r:id="rId25"/>
-    <p:sldId id="1015" r:id="rId26"/>
-    <p:sldId id="1016" r:id="rId27"/>
-    <p:sldId id="1017" r:id="rId28"/>
+    <p:sldId id="1007" r:id="rId2"/>
+    <p:sldId id="1008" r:id="rId3"/>
+    <p:sldId id="1009" r:id="rId4"/>
+    <p:sldId id="1010" r:id="rId5"/>
+    <p:sldId id="1011" r:id="rId6"/>
+    <p:sldId id="1012" r:id="rId7"/>
+    <p:sldId id="1013" r:id="rId8"/>
+    <p:sldId id="1014" r:id="rId9"/>
+    <p:sldId id="1015" r:id="rId10"/>
+    <p:sldId id="1016" r:id="rId11"/>
+    <p:sldId id="1017" r:id="rId12"/>
   </p:sldIdLst>
   <p:sldSz cx="12192000" cy="6858000"/>
   <p:notesSz cx="6858000" cy="9144000"/>
   <p:custDataLst>
-    <p:tags r:id="rId10"/>
+    <p:tags r:id="rId15"/>
   </p:custDataLst>
   <p:defaultTextStyle>
     <a:defPPr>
@@ -2932,7 +2932,7 @@
           <a:p>
             <a:fld id="{0CEC647C-F50C-4F78-AA33-D7AA6CDA18EE}" type="datetimeFigureOut">
               <a:rPr lang="en-US" smtClean="0"/>
-              <a:t>7/13/2025</a:t>
+              <a:t>6/11/2026</a:t>
             </a:fld>
             <a:endParaRPr lang="en-US"/>
           </a:p>
@@ -3097,7 +3097,7 @@
           <a:p>
             <a:fld id="{3A83341F-E62C-483B-84B4-966F8BE46097}" type="datetimeFigureOut">
               <a:rPr lang="en-US" smtClean="0"/>
-              <a:t>7/13/2025</a:t>
+              <a:t>6/11/2026</a:t>
             </a:fld>
             <a:endParaRPr lang="en-US"/>
           </a:p>
@@ -5181,8 +5181,8 @@
 </p:sldMaster>
 </file>
 
-<file path=ppt/slides/slide10.xml><?xml version="1.0" encoding="utf-8"?>
-<p:sld xmlns:a="http://schemas.openxmlformats.org/drawingml/2006/main" xmlns:p="http://schemas.openxmlformats.org/presentationml/2006/main" xmlns:r="http://schemas.openxmlformats.org/officeDocument/2006/relationships">
+<file path=ppt/slides/slide1.xml><?xml version="1.0" encoding="utf-8"?>
+<p:sld xmlns:a="http://schemas.openxmlformats.org/drawingml/2006/main" xmlns:r="http://schemas.openxmlformats.org/officeDocument/2006/relationships" xmlns:p="http://schemas.openxmlformats.org/presentationml/2006/main">
   <p:cSld>
     <p:spTree>
       <p:nvGrpSpPr>
@@ -5190,7 +5190,93 @@
         <p:cNvGrpSpPr/>
         <p:nvPr/>
       </p:nvGrpSpPr>
-      <p:grpSpPr/>
+      <p:grpSpPr>
+        <a:xfrm>
+          <a:off x="0" y="0"/>
+          <a:ext cx="0" cy="0"/>
+          <a:chOff x="0" y="0"/>
+          <a:chExt cx="0" cy="0"/>
+        </a:xfrm>
+      </p:grpSpPr>
+      <p:sp>
+        <p:nvSpPr>
+          <p:cNvPr id="2" name="Title 1"/>
+          <p:cNvSpPr>
+            <a:spLocks noGrp="1"/>
+          </p:cNvSpPr>
+          <p:nvPr>
+            <p:ph type="ctrTitle"/>
+          </p:nvPr>
+        </p:nvSpPr>
+        <p:spPr/>
+        <p:txBody>
+          <a:bodyPr/>
+          <a:lstStyle/>
+          <a:p>
+            <a:r>
+              <a:rPr sz="4400" b="1">
+                <a:solidFill>
+                  <a:srgbClr val="FFFFFF"/>
+                </a:solidFill>
+                <a:latin typeface="Calibri"/>
+              </a:rPr>
+              <a:t>Device Tree Debugging</a:t>
+            </a:r>
+          </a:p>
+        </p:txBody>
+      </p:sp>
+      <p:sp>
+        <p:nvSpPr>
+          <p:cNvPr id="3" name="Subtitle 2"/>
+          <p:cNvSpPr>
+            <a:spLocks noGrp="1"/>
+          </p:cNvSpPr>
+          <p:nvPr>
+            <p:ph type="subTitle" idx="1"/>
+          </p:nvPr>
+        </p:nvSpPr>
+        <p:spPr/>
+        <p:txBody>
+          <a:bodyPr/>
+          <a:lstStyle/>
+          <a:p>
+            <a:r>
+              <a:rPr sz="1800" dirty="0">
+                <a:solidFill>
+                  <a:srgbClr val="FFFFFF"/>
+                </a:solidFill>
+                <a:latin typeface="Calibri"/>
+              </a:rPr>
+              <a:t>Diagnose bring-up issues fast</a:t>
+            </a:r>
+          </a:p>
+        </p:txBody>
+      </p:sp>
+    </p:spTree>
+  </p:cSld>
+  <p:clrMapOvr>
+    <a:masterClrMapping/>
+  </p:clrMapOvr>
+</p:sld>
+</file>
+
+<file path=ppt/slides/slide10.xml><?xml version="1.0" encoding="utf-8"?>
+<p:sld xmlns:a="http://schemas.openxmlformats.org/drawingml/2006/main" xmlns:r="http://schemas.openxmlformats.org/officeDocument/2006/relationships" xmlns:p="http://schemas.openxmlformats.org/presentationml/2006/main">
+  <p:cSld>
+    <p:spTree>
+      <p:nvGrpSpPr>
+        <p:cNvPr id="1" name=""/>
+        <p:cNvGrpSpPr/>
+        <p:nvPr/>
+      </p:nvGrpSpPr>
+      <p:grpSpPr>
+        <a:xfrm>
+          <a:off x="0" y="0"/>
+          <a:ext cx="0" cy="0"/>
+          <a:chOff x="0" y="0"/>
+          <a:chExt cx="0" cy="0"/>
+        </a:xfrm>
+      </p:grpSpPr>
       <p:sp>
         <p:nvSpPr>
           <p:cNvPr id="2" name="Title 1"/>
@@ -5207,13 +5293,10 @@
           <a:lstStyle/>
           <a:p>
             <a:r>
-              <a:rPr sz="3200" b="1">
-                <a:solidFill>
-                  <a:srgbClr val="CC0066"/>
-                </a:solidFill>
+              <a:rPr sz="3200" b="1" dirty="0">
                 <a:latin typeface="Calibri"/>
               </a:rPr>
-              <a:t>Where to Look on a Running System</a:t>
+              <a:t>Debug Cheat Sheet</a:t>
             </a:r>
           </a:p>
         </p:txBody>
@@ -5235,7 +5318,7 @@
           <a:noFill/>
         </p:spPr>
         <p:txBody>
-          <a:bodyPr wrap="square" anchor="t" lIns="45720" rIns="45720">
+          <a:bodyPr wrap="square" lIns="45720" rIns="45720" anchor="t">
             <a:spAutoFit/>
           </a:bodyPr>
           <a:lstStyle/>
@@ -5248,7 +5331,7 @@
                 </a:solidFill>
                 <a:latin typeface="Calibri"/>
               </a:rPr>
-              <a:t>Four interfaces, listed in order of usefulness.</a:t>
+              <a:t>Print this. Keep it on your desk.</a:t>
             </a:r>
           </a:p>
         </p:txBody>
@@ -5296,6 +5379,7 @@
           <a:lstStyle/>
           <a:p>
             <a:pPr algn="ctr"/>
+            <a:endParaRPr/>
           </a:p>
         </p:txBody>
       </p:sp>
@@ -5340,6 +5424,7 @@
           <a:lstStyle/>
           <a:p>
             <a:pPr algn="ctr"/>
+            <a:endParaRPr/>
           </a:p>
         </p:txBody>
       </p:sp>
@@ -5352,7 +5437,7 @@
         <p:spPr>
           <a:xfrm>
             <a:off x="1005840" y="1874519"/>
-            <a:ext cx="10241280" cy="4389120"/>
+            <a:ext cx="10241280" cy="4154984"/>
           </a:xfrm>
           <a:prstGeom prst="rect">
             <a:avLst/>
@@ -5371,60 +5456,124 @@
               </a:spcAft>
             </a:pPr>
             <a:r>
-              <a:rPr sz="1100" i="1">
+              <a:rPr sz="1200" i="1">
                 <a:solidFill>
                   <a:srgbClr val="808080"/>
                 </a:solidFill>
                 <a:latin typeface="Consolas"/>
               </a:rPr>
-              <a:t># 1. The live DT as the kernel sees it</a:t>
-            </a:r>
-          </a:p>
-          <a:p>
-            <a:pPr>
-              <a:spcAft>
-                <a:spcPts val="0"/>
-              </a:spcAft>
-            </a:pPr>
-            <a:r>
-              <a:rPr sz="1100">
+              <a:t># WHAT BOUND, WHAT DIDN'T</a:t>
+            </a:r>
+          </a:p>
+          <a:p>
+            <a:pPr>
+              <a:spcAft>
+                <a:spcPts val="0"/>
+              </a:spcAft>
+            </a:pPr>
+            <a:r>
+              <a:rPr sz="1200">
                 <a:solidFill>
                   <a:srgbClr val="2D2D2D"/>
                 </a:solidFill>
                 <a:latin typeface="Consolas"/>
               </a:rPr>
-              <a:t>ls /sys/firmware/devicetree/base/</a:t>
-            </a:r>
-          </a:p>
-          <a:p>
-            <a:pPr>
-              <a:spcAft>
-                <a:spcPts val="0"/>
-              </a:spcAft>
-            </a:pPr>
-            <a:r>
-              <a:rPr sz="1100" i="1">
+              <a:t>ls /sys/bus/platform/devices/      # all platform devices</a:t>
+            </a:r>
+          </a:p>
+          <a:p>
+            <a:pPr>
+              <a:spcAft>
+                <a:spcPts val="0"/>
+              </a:spcAft>
+            </a:pPr>
+            <a:r>
+              <a:rPr sz="1200">
+                <a:solidFill>
+                  <a:srgbClr val="2D2D2D"/>
+                </a:solidFill>
+                <a:latin typeface="Consolas"/>
+              </a:rPr>
+              <a:t>ls /sys/class/                      # bound by class (leds, gpio, etc.)</a:t>
+            </a:r>
+          </a:p>
+          <a:p>
+            <a:pPr>
+              <a:spcAft>
+                <a:spcPts val="0"/>
+              </a:spcAft>
+            </a:pPr>
+            <a:r>
+              <a:rPr sz="1200">
+                <a:solidFill>
+                  <a:srgbClr val="2D2D2D"/>
+                </a:solidFill>
+                <a:latin typeface="Consolas"/>
+              </a:rPr>
+              <a:t>cat /sys/kernel/debug/devices_deferred</a:t>
+            </a:r>
+          </a:p>
+          <a:p>
+            <a:pPr>
+              <a:spcAft>
+                <a:spcPts val="0"/>
+              </a:spcAft>
+            </a:pPr>
+            <a:r>
+              <a:rPr sz="1200">
+                <a:solidFill>
+                  <a:srgbClr val="2D2D2D"/>
+                </a:solidFill>
+                <a:latin typeface="Consolas"/>
+              </a:rPr>
+              <a:t> </a:t>
+            </a:r>
+          </a:p>
+          <a:p>
+            <a:pPr>
+              <a:spcAft>
+                <a:spcPts val="0"/>
+              </a:spcAft>
+            </a:pPr>
+            <a:r>
+              <a:rPr sz="1200" i="1">
                 <a:solidFill>
                   <a:srgbClr val="808080"/>
                 </a:solidFill>
                 <a:latin typeface="Consolas"/>
               </a:rPr>
-              <a:t># Each subdirectory is a node; files inside are properties</a:t>
-            </a:r>
-          </a:p>
-          <a:p>
-            <a:pPr>
-              <a:spcAft>
-                <a:spcPts val="0"/>
-              </a:spcAft>
-            </a:pPr>
-            <a:r>
-              <a:rPr sz="1100">
+              <a:t># WHAT THE KERNEL SAID DURING BOOT</a:t>
+            </a:r>
+          </a:p>
+          <a:p>
+            <a:pPr>
+              <a:spcAft>
+                <a:spcPts val="0"/>
+              </a:spcAft>
+            </a:pPr>
+            <a:r>
+              <a:rPr sz="1200">
                 <a:solidFill>
                   <a:srgbClr val="2D2D2D"/>
                 </a:solidFill>
                 <a:latin typeface="Consolas"/>
               </a:rPr>
+              <a:t>dmesg | grep -i -E 'probe|defer|device tree|of_'</a:t>
+            </a:r>
+          </a:p>
+          <a:p>
+            <a:pPr>
+              <a:spcAft>
+                <a:spcPts val="0"/>
+              </a:spcAft>
+            </a:pPr>
+            <a:r>
+              <a:rPr sz="1200">
+                <a:solidFill>
+                  <a:srgbClr val="2D2D2D"/>
+                </a:solidFill>
+                <a:latin typeface="Consolas"/>
+              </a:rPr>
               <a:t> </a:t>
             </a:r>
           </a:p>
@@ -5435,60 +5584,124 @@
               </a:spcAft>
             </a:pPr>
             <a:r>
-              <a:rPr sz="1100" i="1">
+              <a:rPr sz="1200" i="1">
                 <a:solidFill>
                   <a:srgbClr val="808080"/>
                 </a:solidFill>
                 <a:latin typeface="Consolas"/>
               </a:rPr>
-              <a:t># Decompile the live tree back to DTS for reading</a:t>
-            </a:r>
-          </a:p>
-          <a:p>
-            <a:pPr>
-              <a:spcAft>
-                <a:spcPts val="0"/>
-              </a:spcAft>
-            </a:pPr>
-            <a:r>
-              <a:rPr sz="1100">
+              <a:t># THE LIVE TREE</a:t>
+            </a:r>
+          </a:p>
+          <a:p>
+            <a:pPr>
+              <a:spcAft>
+                <a:spcPts val="0"/>
+              </a:spcAft>
+            </a:pPr>
+            <a:r>
+              <a:rPr sz="1200">
                 <a:solidFill>
                   <a:srgbClr val="2D2D2D"/>
                 </a:solidFill>
                 <a:latin typeface="Consolas"/>
               </a:rPr>
-              <a:t>dtc -I fs -O dts /sys/firmware/devicetree/base &gt; live.dts</a:t>
-            </a:r>
-          </a:p>
-          <a:p>
-            <a:pPr>
-              <a:spcAft>
-                <a:spcPts val="0"/>
-              </a:spcAft>
-            </a:pPr>
-            <a:r>
-              <a:rPr sz="1100">
+              <a:t>dtc -I fs -O dts /sys/firmware/devicetree/base | less</a:t>
+            </a:r>
+          </a:p>
+          <a:p>
+            <a:pPr>
+              <a:spcAft>
+                <a:spcPts val="0"/>
+              </a:spcAft>
+            </a:pPr>
+            <a:r>
+              <a:rPr sz="1200">
                 <a:solidFill>
                   <a:srgbClr val="2D2D2D"/>
                 </a:solidFill>
                 <a:latin typeface="Consolas"/>
               </a:rPr>
-              <a:t>less live.dts</a:t>
-            </a:r>
-          </a:p>
-          <a:p>
-            <a:pPr>
-              <a:spcAft>
-                <a:spcPts val="0"/>
-              </a:spcAft>
-            </a:pPr>
-            <a:r>
-              <a:rPr sz="1100">
+              <a:t> </a:t>
+            </a:r>
+          </a:p>
+          <a:p>
+            <a:pPr>
+              <a:spcAft>
+                <a:spcPts val="0"/>
+              </a:spcAft>
+            </a:pPr>
+            <a:r>
+              <a:rPr sz="1200" i="1">
+                <a:solidFill>
+                  <a:srgbClr val="808080"/>
+                </a:solidFill>
+                <a:latin typeface="Consolas"/>
+              </a:rPr>
+              <a:t># A SPECIFIC NODE</a:t>
+            </a:r>
+          </a:p>
+          <a:p>
+            <a:pPr>
+              <a:spcAft>
+                <a:spcPts val="0"/>
+              </a:spcAft>
+            </a:pPr>
+            <a:r>
+              <a:rPr sz="1200">
                 <a:solidFill>
                   <a:srgbClr val="2D2D2D"/>
                 </a:solidFill>
                 <a:latin typeface="Consolas"/>
               </a:rPr>
+              <a:t>find /sys/firmware/devicetree/base/ -name 'serial*' -type d</a:t>
+            </a:r>
+          </a:p>
+          <a:p>
+            <a:pPr>
+              <a:spcAft>
+                <a:spcPts val="0"/>
+              </a:spcAft>
+            </a:pPr>
+            <a:r>
+              <a:rPr sz="1200">
+                <a:solidFill>
+                  <a:srgbClr val="2D2D2D"/>
+                </a:solidFill>
+                <a:latin typeface="Consolas"/>
+              </a:rPr>
+              <a:t>ls /sys/firmware/devicetree/base/soc/serial@11000000/</a:t>
+            </a:r>
+          </a:p>
+          <a:p>
+            <a:pPr>
+              <a:spcAft>
+                <a:spcPts val="0"/>
+              </a:spcAft>
+            </a:pPr>
+            <a:r>
+              <a:rPr sz="1200">
+                <a:solidFill>
+                  <a:srgbClr val="2D2D2D"/>
+                </a:solidFill>
+                <a:latin typeface="Consolas"/>
+              </a:rPr>
+              <a:t>cat /sys/firmware/devicetree/base/soc/serial@11000000/compatible</a:t>
+            </a:r>
+          </a:p>
+          <a:p>
+            <a:pPr>
+              <a:spcAft>
+                <a:spcPts val="0"/>
+              </a:spcAft>
+            </a:pPr>
+            <a:r>
+              <a:rPr sz="1200">
+                <a:solidFill>
+                  <a:srgbClr val="2D2D2D"/>
+                </a:solidFill>
+                <a:latin typeface="Consolas"/>
+              </a:rPr>
               <a:t> </a:t>
             </a:r>
           </a:p>
@@ -5499,189 +5712,93 @@
               </a:spcAft>
             </a:pPr>
             <a:r>
-              <a:rPr sz="1100" i="1">
+              <a:rPr sz="1200" i="1">
                 <a:solidFill>
                   <a:srgbClr val="808080"/>
                 </a:solidFill>
                 <a:latin typeface="Consolas"/>
               </a:rPr>
-              <a:t># 2. Boot messages — what bound, what didn't</a:t>
-            </a:r>
-          </a:p>
-          <a:p>
-            <a:pPr>
-              <a:spcAft>
-                <a:spcPts val="0"/>
-              </a:spcAft>
-            </a:pPr>
-            <a:r>
-              <a:rPr sz="1100">
+              <a:t># GPIO USAGE</a:t>
+            </a:r>
+          </a:p>
+          <a:p>
+            <a:pPr>
+              <a:spcAft>
+                <a:spcPts val="0"/>
+              </a:spcAft>
+            </a:pPr>
+            <a:r>
+              <a:rPr sz="1200">
                 <a:solidFill>
                   <a:srgbClr val="2D2D2D"/>
                 </a:solidFill>
                 <a:latin typeface="Consolas"/>
               </a:rPr>
-              <a:t>dmesg | grep -i 'device tree'</a:t>
-            </a:r>
-          </a:p>
-          <a:p>
-            <a:pPr>
-              <a:spcAft>
-                <a:spcPts val="0"/>
-              </a:spcAft>
-            </a:pPr>
-            <a:r>
-              <a:rPr sz="1100">
+              <a:t>cat /sys/kernel/debug/gpio</a:t>
+            </a:r>
+          </a:p>
+          <a:p>
+            <a:pPr>
+              <a:spcAft>
+                <a:spcPts val="0"/>
+              </a:spcAft>
+            </a:pPr>
+            <a:r>
+              <a:rPr sz="1200">
                 <a:solidFill>
                   <a:srgbClr val="2D2D2D"/>
                 </a:solidFill>
                 <a:latin typeface="Consolas"/>
               </a:rPr>
-              <a:t>dmesg | grep -E 'probe|defer'</a:t>
-            </a:r>
-          </a:p>
-          <a:p>
-            <a:pPr>
-              <a:spcAft>
-                <a:spcPts val="0"/>
-              </a:spcAft>
-            </a:pPr>
-            <a:r>
-              <a:rPr sz="1100">
+              <a:t> </a:t>
+            </a:r>
+          </a:p>
+          <a:p>
+            <a:pPr>
+              <a:spcAft>
+                <a:spcPts val="0"/>
+              </a:spcAft>
+            </a:pPr>
+            <a:r>
+              <a:rPr sz="1200" i="1">
+                <a:solidFill>
+                  <a:srgbClr val="808080"/>
+                </a:solidFill>
+                <a:latin typeface="Consolas"/>
+              </a:rPr>
+              <a:t># I2C USAGE</a:t>
+            </a:r>
+          </a:p>
+          <a:p>
+            <a:pPr>
+              <a:spcAft>
+                <a:spcPts val="0"/>
+              </a:spcAft>
+            </a:pPr>
+            <a:r>
+              <a:rPr sz="1200">
                 <a:solidFill>
                   <a:srgbClr val="2D2D2D"/>
                 </a:solidFill>
                 <a:latin typeface="Consolas"/>
               </a:rPr>
-              <a:t> </a:t>
-            </a:r>
-          </a:p>
-          <a:p>
-            <a:pPr>
-              <a:spcAft>
-                <a:spcPts val="0"/>
-              </a:spcAft>
-            </a:pPr>
-            <a:r>
-              <a:rPr sz="1100" i="1">
-                <a:solidFill>
-                  <a:srgbClr val="808080"/>
+              <a:t>ls /sys/bus/i2c/devices/</a:t>
+            </a:r>
+          </a:p>
+          <a:p>
+            <a:pPr>
+              <a:spcAft>
+                <a:spcPts val="0"/>
+              </a:spcAft>
+            </a:pPr>
+            <a:r>
+              <a:rPr sz="1200">
+                <a:solidFill>
+                  <a:srgbClr val="2D2D2D"/>
                 </a:solidFill>
                 <a:latin typeface="Consolas"/>
               </a:rPr>
-              <a:t># 3. What's bound to a driver</a:t>
-            </a:r>
-          </a:p>
-          <a:p>
-            <a:pPr>
-              <a:spcAft>
-                <a:spcPts val="0"/>
-              </a:spcAft>
-            </a:pPr>
-            <a:r>
-              <a:rPr sz="1100">
-                <a:solidFill>
-                  <a:srgbClr val="2D2D2D"/>
-                </a:solidFill>
-                <a:latin typeface="Consolas"/>
-              </a:rPr>
-              <a:t>ls /sys/bus/platform/devices/</a:t>
-            </a:r>
-          </a:p>
-          <a:p>
-            <a:pPr>
-              <a:spcAft>
-                <a:spcPts val="0"/>
-              </a:spcAft>
-            </a:pPr>
-            <a:r>
-              <a:rPr sz="1100">
-                <a:solidFill>
-                  <a:srgbClr val="2D2D2D"/>
-                </a:solidFill>
-                <a:latin typeface="Consolas"/>
-              </a:rPr>
-              <a:t>ls /sys/bus/i2c/devices/</a:t>
-            </a:r>
-          </a:p>
-          <a:p>
-            <a:pPr>
-              <a:spcAft>
-                <a:spcPts val="0"/>
-              </a:spcAft>
-            </a:pPr>
-            <a:r>
-              <a:rPr sz="1100">
-                <a:solidFill>
-                  <a:srgbClr val="2D2D2D"/>
-                </a:solidFill>
-                <a:latin typeface="Consolas"/>
-              </a:rPr>
-              <a:t>ls /sys/class/leds/</a:t>
-            </a:r>
-          </a:p>
-          <a:p>
-            <a:pPr>
-              <a:spcAft>
-                <a:spcPts val="0"/>
-              </a:spcAft>
-            </a:pPr>
-            <a:r>
-              <a:rPr sz="1100">
-                <a:solidFill>
-                  <a:srgbClr val="2D2D2D"/>
-                </a:solidFill>
-                <a:latin typeface="Consolas"/>
-              </a:rPr>
-              <a:t> </a:t>
-            </a:r>
-          </a:p>
-          <a:p>
-            <a:pPr>
-              <a:spcAft>
-                <a:spcPts val="0"/>
-              </a:spcAft>
-            </a:pPr>
-            <a:r>
-              <a:rPr sz="1100" i="1">
-                <a:solidFill>
-                  <a:srgbClr val="808080"/>
-                </a:solidFill>
-                <a:latin typeface="Consolas"/>
-              </a:rPr>
-              <a:t># 4. Drivers waiting for dependencies</a:t>
-            </a:r>
-          </a:p>
-          <a:p>
-            <a:pPr>
-              <a:spcAft>
-                <a:spcPts val="0"/>
-              </a:spcAft>
-            </a:pPr>
-            <a:r>
-              <a:rPr sz="1100">
-                <a:solidFill>
-                  <a:srgbClr val="2D2D2D"/>
-                </a:solidFill>
-                <a:latin typeface="Consolas"/>
-              </a:rPr>
-              <a:t>cat /sys/kernel/debug/devices_deferred</a:t>
-            </a:r>
-          </a:p>
-          <a:p>
-            <a:pPr>
-              <a:spcAft>
-                <a:spcPts val="0"/>
-              </a:spcAft>
-            </a:pPr>
-            <a:r>
-              <a:rPr sz="1100" i="1">
-                <a:solidFill>
-                  <a:srgbClr val="808080"/>
-                </a:solidFill>
-                <a:latin typeface="Consolas"/>
-              </a:rPr>
-              <a:t># Lists drivers stuck in EPROBE_DEFER</a:t>
+              <a:t>i2cdetect -y 1                      # scan i2c-1 for addresses</a:t>
             </a:r>
           </a:p>
         </p:txBody>
@@ -5695,7 +5812,7 @@
 </file>
 
 <file path=ppt/slides/slide11.xml><?xml version="1.0" encoding="utf-8"?>
-<p:sld xmlns:a="http://schemas.openxmlformats.org/drawingml/2006/main" xmlns:p="http://schemas.openxmlformats.org/presentationml/2006/main" xmlns:r="http://schemas.openxmlformats.org/officeDocument/2006/relationships">
+<p:sld xmlns:a="http://schemas.openxmlformats.org/drawingml/2006/main" xmlns:r="http://schemas.openxmlformats.org/officeDocument/2006/relationships" xmlns:p="http://schemas.openxmlformats.org/presentationml/2006/main">
   <p:cSld>
     <p:spTree>
       <p:nvGrpSpPr>
@@ -5703,7 +5820,14 @@
         <p:cNvGrpSpPr/>
         <p:nvPr/>
       </p:nvGrpSpPr>
-      <p:grpSpPr/>
+      <p:grpSpPr>
+        <a:xfrm>
+          <a:off x="0" y="0"/>
+          <a:ext cx="0" cy="0"/>
+          <a:chOff x="0" y="0"/>
+          <a:chExt cx="0" cy="0"/>
+        </a:xfrm>
+      </p:grpSpPr>
       <p:sp>
         <p:nvSpPr>
           <p:cNvPr id="2" name="Title 1"/>
@@ -5720,13 +5844,10 @@
           <a:lstStyle/>
           <a:p>
             <a:r>
-              <a:rPr sz="3200" b="1">
-                <a:solidFill>
-                  <a:srgbClr val="CC0066"/>
-                </a:solidFill>
+              <a:rPr sz="3200" b="1" dirty="0">
                 <a:latin typeface="Calibri"/>
               </a:rPr>
-              <a:t>EPROBE_DEFER — Linux's Retry Loop</a:t>
+              <a:t>Session Summary</a:t>
             </a:r>
           </a:p>
         </p:txBody>
@@ -5748,7 +5869,7 @@
           <a:noFill/>
         </p:spPr>
         <p:txBody>
-          <a:bodyPr wrap="square" anchor="t" lIns="45720" rIns="45720">
+          <a:bodyPr wrap="square" lIns="45720" rIns="45720" anchor="t">
             <a:spAutoFit/>
           </a:bodyPr>
           <a:lstStyle/>
@@ -5761,286 +5882,7 @@
                 </a:solidFill>
                 <a:latin typeface="Calibri"/>
               </a:rPr>
-              <a:t>Why drivers seem to 'not bind' but actually retry.</a:t>
-            </a:r>
-          </a:p>
-        </p:txBody>
-      </p:sp>
-      <p:sp>
-        <p:nvSpPr>
-          <p:cNvPr id="4" name="TextBox 3"/>
-          <p:cNvSpPr txBox="1"/>
-          <p:nvPr/>
-        </p:nvSpPr>
-        <p:spPr>
-          <a:xfrm>
-            <a:off x="822960" y="1783080"/>
-            <a:ext cx="10515600" cy="4572000"/>
-          </a:xfrm>
-          <a:prstGeom prst="rect">
-            <a:avLst/>
-          </a:prstGeom>
-          <a:noFill/>
-        </p:spPr>
-        <p:txBody>
-          <a:bodyPr wrap="square" lIns="45720" rIns="45720">
-            <a:spAutoFit/>
-          </a:bodyPr>
-          <a:lstStyle/>
-          <a:p>
-            <a:pPr>
-              <a:spcAft>
-                <a:spcPts val="400"/>
-              </a:spcAft>
-            </a:pPr>
-            <a:r>
-              <a:rPr sz="1600" b="1" i="0">
-                <a:solidFill>
-                  <a:srgbClr val="CC0066"/>
-                </a:solidFill>
-                <a:latin typeface="Calibri"/>
-              </a:rPr>
-              <a:t>The pattern</a:t>
-            </a:r>
-          </a:p>
-          <a:p>
-            <a:pPr>
-              <a:spcAft>
-                <a:spcPts val="400"/>
-              </a:spcAft>
-            </a:pPr>
-            <a:r>
-              <a:rPr sz="1300" b="0" i="0">
-                <a:solidFill>
-                  <a:srgbClr val="333333"/>
-                </a:solidFill>
-                <a:latin typeface="Calibri"/>
-              </a:rPr>
-              <a:t>A driver's probe() may need a clock, regulator, or GPIO that isn't ready yet.</a:t>
-            </a:r>
-          </a:p>
-          <a:p>
-            <a:pPr>
-              <a:spcAft>
-                <a:spcPts val="400"/>
-              </a:spcAft>
-            </a:pPr>
-            <a:r>
-              <a:rPr sz="1300" b="0" i="0">
-                <a:solidFill>
-                  <a:srgbClr val="333333"/>
-                </a:solidFill>
-                <a:latin typeface="Calibri"/>
-              </a:rPr>
-              <a:t>Instead of failing, it returns -EPROBE_DEFER.</a:t>
-            </a:r>
-          </a:p>
-          <a:p>
-            <a:pPr>
-              <a:spcAft>
-                <a:spcPts val="1000"/>
-              </a:spcAft>
-            </a:pPr>
-            <a:r>
-              <a:rPr sz="1300" b="0" i="0">
-                <a:solidFill>
-                  <a:srgbClr val="333333"/>
-                </a:solidFill>
-                <a:latin typeface="Calibri"/>
-              </a:rPr>
-              <a:t>Kernel retries periodically as other drivers initialize.</a:t>
-            </a:r>
-          </a:p>
-          <a:p>
-            <a:pPr>
-              <a:spcAft>
-                <a:spcPts val="400"/>
-              </a:spcAft>
-            </a:pPr>
-            <a:r>
-              <a:rPr sz="1600" b="1" i="0">
-                <a:solidFill>
-                  <a:srgbClr val="CC0066"/>
-                </a:solidFill>
-                <a:latin typeface="Calibri"/>
-              </a:rPr>
-              <a:t>What you see</a:t>
-            </a:r>
-          </a:p>
-          <a:p>
-            <a:pPr>
-              <a:spcAft>
-                <a:spcPts val="400"/>
-              </a:spcAft>
-            </a:pPr>
-            <a:r>
-              <a:rPr sz="1300" b="0" i="0">
-                <a:solidFill>
-                  <a:srgbClr val="333333"/>
-                </a:solidFill>
-                <a:latin typeface="Calibri"/>
-              </a:rPr>
-              <a:t>• Driver doesn't appear in dmesg as 'bound'</a:t>
-            </a:r>
-          </a:p>
-          <a:p>
-            <a:pPr>
-              <a:spcAft>
-                <a:spcPts val="400"/>
-              </a:spcAft>
-            </a:pPr>
-            <a:r>
-              <a:rPr sz="1300" b="0" i="0">
-                <a:solidFill>
-                  <a:srgbClr val="333333"/>
-                </a:solidFill>
-                <a:latin typeface="Calibri"/>
-              </a:rPr>
-              <a:t>• Device shows up under /sys/devices/platform/</a:t>
-            </a:r>
-          </a:p>
-          <a:p>
-            <a:pPr>
-              <a:spcAft>
-                <a:spcPts val="1000"/>
-              </a:spcAft>
-            </a:pPr>
-            <a:r>
-              <a:rPr sz="1300" b="0" i="0">
-                <a:solidFill>
-                  <a:srgbClr val="333333"/>
-                </a:solidFill>
-                <a:latin typeface="Calibri"/>
-              </a:rPr>
-              <a:t>• But /sys/class/&lt;type&gt;/ stays empty</a:t>
-            </a:r>
-          </a:p>
-          <a:p>
-            <a:pPr>
-              <a:spcAft>
-                <a:spcPts val="400"/>
-              </a:spcAft>
-            </a:pPr>
-            <a:r>
-              <a:rPr sz="1600" b="1" i="0">
-                <a:solidFill>
-                  <a:srgbClr val="663399"/>
-                </a:solidFill>
-                <a:latin typeface="Calibri"/>
-              </a:rPr>
-              <a:t>What to check</a:t>
-            </a:r>
-          </a:p>
-          <a:p>
-            <a:pPr>
-              <a:spcAft>
-                <a:spcPts val="400"/>
-              </a:spcAft>
-            </a:pPr>
-            <a:r>
-              <a:rPr sz="1300" b="0" i="0">
-                <a:solidFill>
-                  <a:srgbClr val="333333"/>
-                </a:solidFill>
-                <a:latin typeface="Consolas"/>
-              </a:rPr>
-              <a:t>cat /sys/kernel/debug/devices_deferred</a:t>
-            </a:r>
-          </a:p>
-          <a:p>
-            <a:pPr>
-              <a:spcAft>
-                <a:spcPts val="400"/>
-              </a:spcAft>
-            </a:pPr>
-            <a:r>
-              <a:rPr sz="1300" b="0" i="0">
-                <a:solidFill>
-                  <a:srgbClr val="333333"/>
-                </a:solidFill>
-                <a:latin typeface="Calibri"/>
-              </a:rPr>
-              <a:t>That tells you the device is waiting on something. Look upstream in the DT to find what it depends on (clocks, resets, regulators).</a:t>
-            </a:r>
-          </a:p>
-        </p:txBody>
-      </p:sp>
-    </p:spTree>
-  </p:cSld>
-  <p:clrMapOvr>
-    <a:masterClrMapping/>
-  </p:clrMapOvr>
-</p:sld>
-</file>
-
-<file path=ppt/slides/slide12.xml><?xml version="1.0" encoding="utf-8"?>
-<p:sld xmlns:a="http://schemas.openxmlformats.org/drawingml/2006/main" xmlns:p="http://schemas.openxmlformats.org/presentationml/2006/main" xmlns:r="http://schemas.openxmlformats.org/officeDocument/2006/relationships">
-  <p:cSld>
-    <p:spTree>
-      <p:nvGrpSpPr>
-        <p:cNvPr id="1" name=""/>
-        <p:cNvGrpSpPr/>
-        <p:nvPr/>
-      </p:nvGrpSpPr>
-      <p:grpSpPr/>
-      <p:sp>
-        <p:nvSpPr>
-          <p:cNvPr id="2" name="Title 1"/>
-          <p:cNvSpPr>
-            <a:spLocks noGrp="1"/>
-          </p:cNvSpPr>
-          <p:nvPr>
-            <p:ph type="title"/>
-          </p:nvPr>
-        </p:nvSpPr>
-        <p:spPr/>
-        <p:txBody>
-          <a:bodyPr/>
-          <a:lstStyle/>
-          <a:p>
-            <a:r>
-              <a:rPr sz="3200" b="1">
-                <a:solidFill>
-                  <a:srgbClr val="CC0066"/>
-                </a:solidFill>
-                <a:latin typeface="Calibri"/>
-              </a:rPr>
-              <a:t>Five Common Failure Modes</a:t>
-            </a:r>
-          </a:p>
-        </p:txBody>
-      </p:sp>
-      <p:sp>
-        <p:nvSpPr>
-          <p:cNvPr id="3" name="TextBox 2"/>
-          <p:cNvSpPr txBox="1"/>
-          <p:nvPr/>
-        </p:nvSpPr>
-        <p:spPr>
-          <a:xfrm>
-            <a:off x="822960" y="1417320"/>
-            <a:ext cx="10515600" cy="365760"/>
-          </a:xfrm>
-          <a:prstGeom prst="rect">
-            <a:avLst/>
-          </a:prstGeom>
-          <a:noFill/>
-        </p:spPr>
-        <p:txBody>
-          <a:bodyPr wrap="square" anchor="t" lIns="45720" rIns="45720">
-            <a:spAutoFit/>
-          </a:bodyPr>
-          <a:lstStyle/>
-          <a:p>
-            <a:pPr algn="l"/>
-            <a:r>
-              <a:rPr sz="1500" b="0" i="1">
-                <a:solidFill>
-                  <a:srgbClr val="666666"/>
-                </a:solidFill>
-                <a:latin typeface="Calibri"/>
-              </a:rPr>
-              <a:t>The bugs that hit 80% of bring-up sessions.</a:t>
+              <a:t>5 things to remember from this session.</a:t>
             </a:r>
           </a:p>
         </p:txBody>
@@ -6053,7 +5895,7 @@
         </p:nvSpPr>
         <p:spPr>
           <a:xfrm>
-            <a:off x="822960" y="1828800"/>
+            <a:off x="822960" y="1874519"/>
             <a:ext cx="457200" cy="548640"/>
           </a:xfrm>
           <a:prstGeom prst="roundRect">
@@ -6082,7 +5924,7 @@
           </a:fontRef>
         </p:style>
         <p:txBody>
-          <a:bodyPr rtlCol="0" anchor="ctr" lIns="0" rIns="0"/>
+          <a:bodyPr lIns="0" rIns="0" rtlCol="0" anchor="ctr"/>
           <a:lstStyle/>
           <a:p>
             <a:pPr algn="ctr"/>
@@ -6106,7 +5948,7 @@
         </p:nvSpPr>
         <p:spPr>
           <a:xfrm>
-            <a:off x="1417320" y="1828800"/>
+            <a:off x="1417320" y="1874519"/>
             <a:ext cx="10058400" cy="320040"/>
           </a:xfrm>
           <a:prstGeom prst="rect">
@@ -6115,7 +5957,7 @@
           <a:noFill/>
         </p:spPr>
         <p:txBody>
-          <a:bodyPr wrap="square" anchor="t" lIns="45720" rIns="45720">
+          <a:bodyPr wrap="square" lIns="45720" rIns="45720" anchor="t">
             <a:spAutoFit/>
           </a:bodyPr>
           <a:lstStyle/>
@@ -6128,7 +5970,7 @@
                 </a:solidFill>
                 <a:latin typeface="Calibri"/>
               </a:rPr>
-              <a:t>Wrong compatible string</a:t>
+              <a:t>Read the live tree first</a:t>
             </a:r>
           </a:p>
         </p:txBody>
@@ -6141,7 +5983,7 @@
         </p:nvSpPr>
         <p:spPr>
           <a:xfrm>
-            <a:off x="1417320" y="2139696"/>
+            <a:off x="1417320" y="2185415"/>
             <a:ext cx="10058400" cy="320040"/>
           </a:xfrm>
           <a:prstGeom prst="rect">
@@ -6150,7 +5992,7 @@
           <a:noFill/>
         </p:spPr>
         <p:txBody>
-          <a:bodyPr wrap="square" anchor="t" lIns="45720" rIns="45720">
+          <a:bodyPr wrap="square" lIns="45720" rIns="45720" anchor="t">
             <a:spAutoFit/>
           </a:bodyPr>
           <a:lstStyle/>
@@ -6163,7 +6005,7 @@
                 </a:solidFill>
                 <a:latin typeface="Calibri"/>
               </a:rPr>
-              <a:t>Driver loads but doesn't bind. Check Documentation/devicetree/bindings/.</a:t>
+              <a:t>/sys/firmware/devicetree/base is the truth; dtc decompiles it back to DTS</a:t>
             </a:r>
           </a:p>
         </p:txBody>
@@ -6176,7 +6018,7 @@
         </p:nvSpPr>
         <p:spPr>
           <a:xfrm>
-            <a:off x="822960" y="2542032"/>
+            <a:off x="822960" y="2587752"/>
             <a:ext cx="457200" cy="548640"/>
           </a:xfrm>
           <a:prstGeom prst="roundRect">
@@ -6205,7 +6047,7 @@
           </a:fontRef>
         </p:style>
         <p:txBody>
-          <a:bodyPr rtlCol="0" anchor="ctr" lIns="0" rIns="0"/>
+          <a:bodyPr lIns="0" rIns="0" rtlCol="0" anchor="ctr"/>
           <a:lstStyle/>
           <a:p>
             <a:pPr algn="ctr"/>
@@ -6229,7 +6071,7 @@
         </p:nvSpPr>
         <p:spPr>
           <a:xfrm>
-            <a:off x="1417320" y="2542032"/>
+            <a:off x="1417320" y="2587752"/>
             <a:ext cx="10058400" cy="320040"/>
           </a:xfrm>
           <a:prstGeom prst="rect">
@@ -6238,7 +6080,7 @@
           <a:noFill/>
         </p:spPr>
         <p:txBody>
-          <a:bodyPr wrap="square" anchor="t" lIns="45720" rIns="45720">
+          <a:bodyPr wrap="square" lIns="45720" rIns="45720" anchor="t">
             <a:spAutoFit/>
           </a:bodyPr>
           <a:lstStyle/>
@@ -6251,7 +6093,7 @@
                 </a:solidFill>
                 <a:latin typeface="Calibri"/>
               </a:rPr>
-              <a:t>Missing or wrong reg</a:t>
+              <a:t>EPROBE_DEFER is not an error</a:t>
             </a:r>
           </a:p>
         </p:txBody>
@@ -6264,7 +6106,7 @@
         </p:nvSpPr>
         <p:spPr>
           <a:xfrm>
-            <a:off x="1417320" y="2852928"/>
+            <a:off x="1417320" y="2898648"/>
             <a:ext cx="10058400" cy="320040"/>
           </a:xfrm>
           <a:prstGeom prst="rect">
@@ -6273,7 +6115,7 @@
           <a:noFill/>
         </p:spPr>
         <p:txBody>
-          <a:bodyPr wrap="square" anchor="t" lIns="45720" rIns="45720">
+          <a:bodyPr wrap="square" lIns="45720" rIns="45720" anchor="t">
             <a:spAutoFit/>
           </a:bodyPr>
           <a:lstStyle/>
@@ -6286,7 +6128,7 @@
                 </a:solidFill>
                 <a:latin typeface="Calibri"/>
               </a:rPr>
-              <a:t>Driver probes but reads garbage / triggers fault. Check SoC reference manual.</a:t>
+              <a:t>It's the kernel saying 'not ready yet'; look at devices_deferred</a:t>
             </a:r>
           </a:p>
         </p:txBody>
@@ -6299,7 +6141,7 @@
         </p:nvSpPr>
         <p:spPr>
           <a:xfrm>
-            <a:off x="822960" y="3255264"/>
+            <a:off x="822960" y="3300984"/>
             <a:ext cx="457200" cy="548640"/>
           </a:xfrm>
           <a:prstGeom prst="roundRect">
@@ -6328,7 +6170,7 @@
           </a:fontRef>
         </p:style>
         <p:txBody>
-          <a:bodyPr rtlCol="0" anchor="ctr" lIns="0" rIns="0"/>
+          <a:bodyPr lIns="0" rIns="0" rtlCol="0" anchor="ctr"/>
           <a:lstStyle/>
           <a:p>
             <a:pPr algn="ctr"/>
@@ -6352,7 +6194,7 @@
         </p:nvSpPr>
         <p:spPr>
           <a:xfrm>
-            <a:off x="1417320" y="3255264"/>
+            <a:off x="1417320" y="3300984"/>
             <a:ext cx="10058400" cy="320040"/>
           </a:xfrm>
           <a:prstGeom prst="rect">
@@ -6361,7 +6203,7 @@
           <a:noFill/>
         </p:spPr>
         <p:txBody>
-          <a:bodyPr wrap="square" anchor="t" lIns="45720" rIns="45720">
+          <a:bodyPr wrap="square" lIns="45720" rIns="45720" anchor="t">
             <a:spAutoFit/>
           </a:bodyPr>
           <a:lstStyle/>
@@ -6374,7 +6216,7 @@
                 </a:solidFill>
                 <a:latin typeface="Calibri"/>
               </a:rPr>
-              <a:t>Missing clocks or resets</a:t>
+              <a:t>Five common failures cover most cases</a:t>
             </a:r>
           </a:p>
         </p:txBody>
@@ -6387,7 +6229,7 @@
         </p:nvSpPr>
         <p:spPr>
           <a:xfrm>
-            <a:off x="1417320" y="3566160"/>
+            <a:off x="1417320" y="3611879"/>
             <a:ext cx="10058400" cy="320040"/>
           </a:xfrm>
           <a:prstGeom prst="rect">
@@ -6396,7 +6238,7 @@
           <a:noFill/>
         </p:spPr>
         <p:txBody>
-          <a:bodyPr wrap="square" anchor="t" lIns="45720" rIns="45720">
+          <a:bodyPr wrap="square" lIns="45720" rIns="45720" anchor="t">
             <a:spAutoFit/>
           </a:bodyPr>
           <a:lstStyle/>
@@ -6409,7 +6251,7 @@
                 </a:solidFill>
                 <a:latin typeface="Calibri"/>
               </a:rPr>
-              <a:t>Driver returns EPROBE_DEFER forever. /sys/kernel/debug/devices_deferred shows it.</a:t>
+              <a:t>compatible, reg, clocks/resets, GPIO conflicts, status=disabled</a:t>
             </a:r>
           </a:p>
         </p:txBody>
@@ -6422,7 +6264,7 @@
         </p:nvSpPr>
         <p:spPr>
           <a:xfrm>
-            <a:off x="822960" y="3968496"/>
+            <a:off x="822960" y="4014215"/>
             <a:ext cx="457200" cy="548640"/>
           </a:xfrm>
           <a:prstGeom prst="roundRect">
@@ -6451,7 +6293,7 @@
           </a:fontRef>
         </p:style>
         <p:txBody>
-          <a:bodyPr rtlCol="0" anchor="ctr" lIns="0" rIns="0"/>
+          <a:bodyPr lIns="0" rIns="0" rtlCol="0" anchor="ctr"/>
           <a:lstStyle/>
           <a:p>
             <a:pPr algn="ctr"/>
@@ -6475,7 +6317,7 @@
         </p:nvSpPr>
         <p:spPr>
           <a:xfrm>
-            <a:off x="1417320" y="3968496"/>
+            <a:off x="1417320" y="4014215"/>
             <a:ext cx="10058400" cy="320040"/>
           </a:xfrm>
           <a:prstGeom prst="rect">
@@ -6484,7 +6326,7 @@
           <a:noFill/>
         </p:spPr>
         <p:txBody>
-          <a:bodyPr wrap="square" anchor="t" lIns="45720" rIns="45720">
+          <a:bodyPr wrap="square" lIns="45720" rIns="45720" anchor="t">
             <a:spAutoFit/>
           </a:bodyPr>
           <a:lstStyle/>
@@ -6497,7 +6339,7 @@
                 </a:solidFill>
                 <a:latin typeface="Calibri"/>
               </a:rPr>
-              <a:t>GPIO conflict between nodes</a:t>
+              <a:t>dmesg + /sys + /sys/kernel/debug = your toolkit</a:t>
             </a:r>
           </a:p>
         </p:txBody>
@@ -6510,7 +6352,7 @@
         </p:nvSpPr>
         <p:spPr>
           <a:xfrm>
-            <a:off x="1417320" y="4279392"/>
+            <a:off x="1417320" y="4325112"/>
             <a:ext cx="10058400" cy="320040"/>
           </a:xfrm>
           <a:prstGeom prst="rect">
@@ -6519,7 +6361,7 @@
           <a:noFill/>
         </p:spPr>
         <p:txBody>
-          <a:bodyPr wrap="square" anchor="t" lIns="45720" rIns="45720">
+          <a:bodyPr wrap="square" lIns="45720" rIns="45720" anchor="t">
             <a:spAutoFit/>
           </a:bodyPr>
           <a:lstStyle/>
@@ -6532,7 +6374,7 @@
                 </a:solidFill>
                 <a:latin typeface="Calibri"/>
               </a:rPr>
-              <a:t>Two nodes claim the same GPIO; second to probe fails. Check pinctrl assignments.</a:t>
+              <a:t>Three places give 95% of the information you need</a:t>
             </a:r>
           </a:p>
         </p:txBody>
@@ -6545,7 +6387,7 @@
         </p:nvSpPr>
         <p:spPr>
           <a:xfrm>
-            <a:off x="822960" y="4681728"/>
+            <a:off x="822960" y="4727448"/>
             <a:ext cx="457200" cy="548640"/>
           </a:xfrm>
           <a:prstGeom prst="roundRect">
@@ -6574,7 +6416,7 @@
           </a:fontRef>
         </p:style>
         <p:txBody>
-          <a:bodyPr rtlCol="0" anchor="ctr" lIns="0" rIns="0"/>
+          <a:bodyPr lIns="0" rIns="0" rtlCol="0" anchor="ctr"/>
           <a:lstStyle/>
           <a:p>
             <a:pPr algn="ctr"/>
@@ -6598,7 +6440,7 @@
         </p:nvSpPr>
         <p:spPr>
           <a:xfrm>
-            <a:off x="1417320" y="4681728"/>
+            <a:off x="1417320" y="4727448"/>
             <a:ext cx="10058400" cy="320040"/>
           </a:xfrm>
           <a:prstGeom prst="rect">
@@ -6607,7 +6449,7 @@
           <a:noFill/>
         </p:spPr>
         <p:txBody>
-          <a:bodyPr wrap="square" anchor="t" lIns="45720" rIns="45720">
+          <a:bodyPr wrap="square" lIns="45720" rIns="45720" anchor="t">
             <a:spAutoFit/>
           </a:bodyPr>
           <a:lstStyle/>
@@ -6620,7 +6462,7 @@
                 </a:solidFill>
                 <a:latin typeface="Calibri"/>
               </a:rPr>
-              <a:t>status = "disabled"</a:t>
+              <a:t>DT bugs are hardware-specific</a:t>
             </a:r>
           </a:p>
         </p:txBody>
@@ -6633,7 +6475,7 @@
         </p:nvSpPr>
         <p:spPr>
           <a:xfrm>
-            <a:off x="1417320" y="4992624"/>
+            <a:off x="1417320" y="5038344"/>
             <a:ext cx="10058400" cy="320040"/>
           </a:xfrm>
           <a:prstGeom prst="rect">
@@ -6642,7 +6484,7 @@
           <a:noFill/>
         </p:spPr>
         <p:txBody>
-          <a:bodyPr wrap="square" anchor="t" lIns="45720" rIns="45720">
+          <a:bodyPr wrap="square" lIns="45720" rIns="45720" anchor="t">
             <a:spAutoFit/>
           </a:bodyPr>
           <a:lstStyle/>
@@ -6655,7 +6497,69 @@
                 </a:solidFill>
                 <a:latin typeface="Calibri"/>
               </a:rPr>
-              <a:t>Node is in the DT but kernel ignores it. Change to status = "okay" or add overlay.</a:t>
+              <a:t>Don't fix in software what's wrong in the DT — fix the DT</a:t>
+            </a:r>
+          </a:p>
+        </p:txBody>
+      </p:sp>
+      <p:sp>
+        <p:nvSpPr>
+          <p:cNvPr id="19" name="Rounded Rectangle 18"/>
+          <p:cNvSpPr/>
+          <p:nvPr/>
+        </p:nvSpPr>
+        <p:spPr>
+          <a:xfrm>
+            <a:off x="822960" y="5669280"/>
+            <a:ext cx="10561320" cy="640080"/>
+          </a:xfrm>
+          <a:prstGeom prst="roundRect">
+            <a:avLst/>
+          </a:prstGeom>
+          <a:solidFill>
+            <a:srgbClr val="FBE6F0"/>
+          </a:solidFill>
+          <a:ln>
+            <a:noFill/>
+          </a:ln>
+          <a:effectLst/>
+        </p:spPr>
+        <p:style>
+          <a:lnRef idx="1">
+            <a:schemeClr val="accent1"/>
+          </a:lnRef>
+          <a:fillRef idx="3">
+            <a:schemeClr val="accent1"/>
+          </a:fillRef>
+          <a:effectRef idx="2">
+            <a:schemeClr val="accent1"/>
+          </a:effectRef>
+          <a:fontRef idx="minor">
+            <a:schemeClr val="lt1"/>
+          </a:fontRef>
+        </p:style>
+        <p:txBody>
+          <a:bodyPr lIns="228600" rtlCol="0" anchor="ctr"/>
+          <a:lstStyle/>
+          <a:p>
+            <a:pPr algn="ctr"/>
+            <a:r>
+              <a:rPr sz="1400" b="1">
+                <a:solidFill>
+                  <a:srgbClr val="663399"/>
+                </a:solidFill>
+                <a:latin typeface="Calibri"/>
+              </a:rPr>
+              <a:t>Next session  →  </a:t>
+            </a:r>
+            <a:r>
+              <a:rPr sz="1400">
+                <a:solidFill>
+                  <a:srgbClr val="333333"/>
+                </a:solidFill>
+                <a:latin typeface="Calibri"/>
+              </a:rPr>
+              <a:t>Bootloader Overview (30 min)</a:t>
             </a:r>
           </a:p>
         </p:txBody>
@@ -6668,8 +6572,8 @@
 </p:sld>
 </file>
 
-<file path=ppt/slides/slide13.xml><?xml version="1.0" encoding="utf-8"?>
-<p:sld xmlns:a="http://schemas.openxmlformats.org/drawingml/2006/main" xmlns:p="http://schemas.openxmlformats.org/presentationml/2006/main" xmlns:r="http://schemas.openxmlformats.org/officeDocument/2006/relationships">
+<file path=ppt/slides/slide2.xml><?xml version="1.0" encoding="utf-8"?>
+<p:sld xmlns:a="http://schemas.openxmlformats.org/drawingml/2006/main" xmlns:r="http://schemas.openxmlformats.org/officeDocument/2006/relationships" xmlns:p="http://schemas.openxmlformats.org/presentationml/2006/main">
   <p:cSld>
     <p:spTree>
       <p:nvGrpSpPr>
@@ -6677,7 +6581,14 @@
         <p:cNvGrpSpPr/>
         <p:nvPr/>
       </p:nvGrpSpPr>
-      <p:grpSpPr/>
+      <p:grpSpPr>
+        <a:xfrm>
+          <a:off x="0" y="0"/>
+          <a:ext cx="0" cy="0"/>
+          <a:chOff x="0" y="0"/>
+          <a:chExt cx="0" cy="0"/>
+        </a:xfrm>
+      </p:grpSpPr>
       <p:sp>
         <p:nvSpPr>
           <p:cNvPr id="2" name="Title 1"/>
@@ -6694,13 +6605,178 @@
           <a:lstStyle/>
           <a:p>
             <a:r>
-              <a:rPr sz="3200" b="1">
-                <a:solidFill>
-                  <a:srgbClr val="CC0066"/>
-                </a:solidFill>
+              <a:rPr sz="3200" b="1" dirty="0">
                 <a:latin typeface="Calibri"/>
               </a:rPr>
-              <a:t>Failure Scenario 1 — Walkthrough</a:t>
+              <a:t>Session Agenda</a:t>
+            </a:r>
+          </a:p>
+        </p:txBody>
+      </p:sp>
+      <p:sp>
+        <p:nvSpPr>
+          <p:cNvPr id="3" name="TextBox 2"/>
+          <p:cNvSpPr txBox="1"/>
+          <p:nvPr/>
+        </p:nvSpPr>
+        <p:spPr>
+          <a:xfrm>
+            <a:off x="822960" y="1463040"/>
+            <a:ext cx="10515600" cy="5029200"/>
+          </a:xfrm>
+          <a:prstGeom prst="rect">
+            <a:avLst/>
+          </a:prstGeom>
+          <a:noFill/>
+        </p:spPr>
+        <p:txBody>
+          <a:bodyPr wrap="square" lIns="45720" rIns="45720">
+            <a:spAutoFit/>
+          </a:bodyPr>
+          <a:lstStyle/>
+          <a:p>
+            <a:pPr>
+              <a:spcAft>
+                <a:spcPts val="600"/>
+              </a:spcAft>
+            </a:pPr>
+            <a:r>
+              <a:rPr sz="2000" b="0" i="0">
+                <a:solidFill>
+                  <a:srgbClr val="333333"/>
+                </a:solidFill>
+                <a:latin typeface="Calibri"/>
+              </a:rPr>
+              <a:t>1.  DT recap — what it is, what it does</a:t>
+            </a:r>
+          </a:p>
+          <a:p>
+            <a:pPr>
+              <a:spcAft>
+                <a:spcPts val="600"/>
+              </a:spcAft>
+            </a:pPr>
+            <a:r>
+              <a:rPr sz="2000" b="0" i="0">
+                <a:solidFill>
+                  <a:srgbClr val="333333"/>
+                </a:solidFill>
+                <a:latin typeface="Calibri"/>
+              </a:rPr>
+              <a:t>2.  Where to look on a running system</a:t>
+            </a:r>
+          </a:p>
+          <a:p>
+            <a:pPr>
+              <a:spcAft>
+                <a:spcPts val="600"/>
+              </a:spcAft>
+            </a:pPr>
+            <a:r>
+              <a:rPr sz="2000" b="0" i="0">
+                <a:solidFill>
+                  <a:srgbClr val="333333"/>
+                </a:solidFill>
+                <a:latin typeface="Calibri"/>
+              </a:rPr>
+              <a:t>3.  EPROBE_DEFER — Linux's retry mechanism</a:t>
+            </a:r>
+          </a:p>
+          <a:p>
+            <a:pPr>
+              <a:spcAft>
+                <a:spcPts val="600"/>
+              </a:spcAft>
+            </a:pPr>
+            <a:r>
+              <a:rPr sz="2000" b="0" i="0">
+                <a:solidFill>
+                  <a:srgbClr val="333333"/>
+                </a:solidFill>
+                <a:latin typeface="Calibri"/>
+              </a:rPr>
+              <a:t>4.  Five common failure modes</a:t>
+            </a:r>
+          </a:p>
+          <a:p>
+            <a:pPr>
+              <a:spcAft>
+                <a:spcPts val="600"/>
+              </a:spcAft>
+            </a:pPr>
+            <a:r>
+              <a:rPr sz="2000" b="0" i="0">
+                <a:solidFill>
+                  <a:srgbClr val="333333"/>
+                </a:solidFill>
+                <a:latin typeface="Calibri"/>
+              </a:rPr>
+              <a:t>5.  Pre-recorded failure scenarios — walkthrough</a:t>
+            </a:r>
+          </a:p>
+          <a:p>
+            <a:pPr>
+              <a:spcAft>
+                <a:spcPts val="600"/>
+              </a:spcAft>
+            </a:pPr>
+            <a:r>
+              <a:rPr sz="2000" b="0" i="0">
+                <a:solidFill>
+                  <a:srgbClr val="333333"/>
+                </a:solidFill>
+                <a:latin typeface="Calibri"/>
+              </a:rPr>
+              <a:t>6.  Debug cheat sheet</a:t>
+            </a:r>
+          </a:p>
+        </p:txBody>
+      </p:sp>
+    </p:spTree>
+  </p:cSld>
+  <p:clrMapOvr>
+    <a:masterClrMapping/>
+  </p:clrMapOvr>
+</p:sld>
+</file>
+
+<file path=ppt/slides/slide3.xml><?xml version="1.0" encoding="utf-8"?>
+<p:sld xmlns:a="http://schemas.openxmlformats.org/drawingml/2006/main" xmlns:r="http://schemas.openxmlformats.org/officeDocument/2006/relationships" xmlns:p="http://schemas.openxmlformats.org/presentationml/2006/main">
+  <p:cSld>
+    <p:spTree>
+      <p:nvGrpSpPr>
+        <p:cNvPr id="1" name=""/>
+        <p:cNvGrpSpPr/>
+        <p:nvPr/>
+      </p:nvGrpSpPr>
+      <p:grpSpPr>
+        <a:xfrm>
+          <a:off x="0" y="0"/>
+          <a:ext cx="0" cy="0"/>
+          <a:chOff x="0" y="0"/>
+          <a:chExt cx="0" cy="0"/>
+        </a:xfrm>
+      </p:grpSpPr>
+      <p:sp>
+        <p:nvSpPr>
+          <p:cNvPr id="2" name="Title 1"/>
+          <p:cNvSpPr>
+            <a:spLocks noGrp="1"/>
+          </p:cNvSpPr>
+          <p:nvPr>
+            <p:ph type="title"/>
+          </p:nvPr>
+        </p:nvSpPr>
+        <p:spPr/>
+        <p:txBody>
+          <a:bodyPr/>
+          <a:lstStyle/>
+          <a:p>
+            <a:r>
+              <a:rPr sz="3200" b="1" dirty="0">
+                <a:latin typeface="Calibri"/>
+              </a:rPr>
+              <a:t>DT Recap</a:t>
             </a:r>
           </a:p>
         </p:txBody>
@@ -6722,7 +6798,7 @@
           <a:noFill/>
         </p:spPr>
         <p:txBody>
-          <a:bodyPr wrap="square" anchor="t" lIns="45720" rIns="45720">
+          <a:bodyPr wrap="square" lIns="45720" rIns="45720" anchor="t">
             <a:spAutoFit/>
           </a:bodyPr>
           <a:lstStyle/>
@@ -6735,7 +6811,344 @@
                 </a:solidFill>
                 <a:latin typeface="Calibri"/>
               </a:rPr>
-              <a:t>GPIO LED node added; driver loads but no LED appears.</a:t>
+              <a:t>Quick refresher before we go debugging.</a:t>
+            </a:r>
+          </a:p>
+        </p:txBody>
+      </p:sp>
+      <p:sp>
+        <p:nvSpPr>
+          <p:cNvPr id="4" name="TextBox 3"/>
+          <p:cNvSpPr txBox="1"/>
+          <p:nvPr/>
+        </p:nvSpPr>
+        <p:spPr>
+          <a:xfrm>
+            <a:off x="822960" y="1783080"/>
+            <a:ext cx="10515600" cy="3559949"/>
+          </a:xfrm>
+          <a:prstGeom prst="rect">
+            <a:avLst/>
+          </a:prstGeom>
+          <a:noFill/>
+        </p:spPr>
+        <p:txBody>
+          <a:bodyPr wrap="square" lIns="45720" rIns="45720">
+            <a:spAutoFit/>
+          </a:bodyPr>
+          <a:lstStyle/>
+          <a:p>
+            <a:pPr>
+              <a:spcAft>
+                <a:spcPts val="400"/>
+              </a:spcAft>
+            </a:pPr>
+            <a:r>
+              <a:rPr b="1" i="0" dirty="0">
+                <a:solidFill>
+                  <a:srgbClr val="CC0066"/>
+                </a:solidFill>
+                <a:latin typeface="Calibri"/>
+              </a:rPr>
+              <a:t>Device tree describes hardware to the kernel</a:t>
+            </a:r>
+          </a:p>
+          <a:p>
+            <a:pPr>
+              <a:spcAft>
+                <a:spcPts val="1000"/>
+              </a:spcAft>
+            </a:pPr>
+            <a:r>
+              <a:rPr sz="1600" b="0" i="0" dirty="0">
+                <a:solidFill>
+                  <a:srgbClr val="333333"/>
+                </a:solidFill>
+                <a:latin typeface="Calibri"/>
+              </a:rPr>
+              <a:t>Without it, the kernel would need code for every board. With it, the same kernel boots many boards.</a:t>
+            </a:r>
+          </a:p>
+          <a:p>
+            <a:pPr>
+              <a:spcAft>
+                <a:spcPts val="400"/>
+              </a:spcAft>
+            </a:pPr>
+            <a:r>
+              <a:rPr b="1" i="0" dirty="0">
+                <a:solidFill>
+                  <a:srgbClr val="CC0066"/>
+                </a:solidFill>
+                <a:latin typeface="Calibri"/>
+              </a:rPr>
+              <a:t>Anatomy</a:t>
+            </a:r>
+          </a:p>
+          <a:p>
+            <a:pPr>
+              <a:spcAft>
+                <a:spcPts val="400"/>
+              </a:spcAft>
+            </a:pPr>
+            <a:r>
+              <a:rPr sz="1600" b="0" i="0" dirty="0">
+                <a:solidFill>
+                  <a:srgbClr val="333333"/>
+                </a:solidFill>
+                <a:latin typeface="Calibri"/>
+              </a:rPr>
+              <a:t>• Nodes — components (</a:t>
+            </a:r>
+            <a:r>
+              <a:rPr sz="1600" b="0" i="0" dirty="0" err="1">
+                <a:solidFill>
+                  <a:srgbClr val="333333"/>
+                </a:solidFill>
+                <a:latin typeface="Calibri"/>
+              </a:rPr>
+              <a:t>cpu</a:t>
+            </a:r>
+            <a:r>
+              <a:rPr sz="1600" b="0" i="0" dirty="0">
+                <a:solidFill>
+                  <a:srgbClr val="333333"/>
+                </a:solidFill>
+                <a:latin typeface="Calibri"/>
+              </a:rPr>
+              <a:t>, i2c, </a:t>
+            </a:r>
+            <a:r>
+              <a:rPr sz="1600" b="0" i="0" dirty="0" err="1">
+                <a:solidFill>
+                  <a:srgbClr val="333333"/>
+                </a:solidFill>
+                <a:latin typeface="Calibri"/>
+              </a:rPr>
+              <a:t>gpio</a:t>
+            </a:r>
+            <a:r>
+              <a:rPr sz="1600" b="0" i="0" dirty="0">
+                <a:solidFill>
+                  <a:srgbClr val="333333"/>
+                </a:solidFill>
+                <a:latin typeface="Calibri"/>
+              </a:rPr>
+              <a:t>, ...)</a:t>
+            </a:r>
+          </a:p>
+          <a:p>
+            <a:pPr>
+              <a:spcAft>
+                <a:spcPts val="400"/>
+              </a:spcAft>
+            </a:pPr>
+            <a:r>
+              <a:rPr sz="1600" b="0" i="0" dirty="0">
+                <a:solidFill>
+                  <a:srgbClr val="333333"/>
+                </a:solidFill>
+                <a:latin typeface="Calibri"/>
+              </a:rPr>
+              <a:t>• Properties — key/value attributes of a node</a:t>
+            </a:r>
+          </a:p>
+          <a:p>
+            <a:pPr>
+              <a:spcAft>
+                <a:spcPts val="400"/>
+              </a:spcAft>
+            </a:pPr>
+            <a:r>
+              <a:rPr sz="1600" b="0" i="0" dirty="0">
+                <a:solidFill>
+                  <a:srgbClr val="333333"/>
+                </a:solidFill>
+                <a:latin typeface="Calibri"/>
+              </a:rPr>
+              <a:t>• compatible — string matching a driver</a:t>
+            </a:r>
+          </a:p>
+          <a:p>
+            <a:pPr>
+              <a:spcAft>
+                <a:spcPts val="400"/>
+              </a:spcAft>
+            </a:pPr>
+            <a:r>
+              <a:rPr sz="1600" b="0" i="0" dirty="0">
+                <a:solidFill>
+                  <a:srgbClr val="333333"/>
+                </a:solidFill>
+                <a:latin typeface="Calibri"/>
+              </a:rPr>
+              <a:t>• reg — memory-mapped address</a:t>
+            </a:r>
+          </a:p>
+          <a:p>
+            <a:pPr>
+              <a:spcAft>
+                <a:spcPts val="400"/>
+              </a:spcAft>
+            </a:pPr>
+            <a:r>
+              <a:rPr sz="1600" b="0" i="0" dirty="0">
+                <a:solidFill>
+                  <a:srgbClr val="333333"/>
+                </a:solidFill>
+                <a:latin typeface="Calibri"/>
+              </a:rPr>
+              <a:t>• status — disabled vs okay</a:t>
+            </a:r>
+          </a:p>
+          <a:p>
+            <a:pPr>
+              <a:spcAft>
+                <a:spcPts val="1000"/>
+              </a:spcAft>
+            </a:pPr>
+            <a:r>
+              <a:rPr sz="1600" b="0" i="0" dirty="0">
+                <a:solidFill>
+                  <a:srgbClr val="333333"/>
+                </a:solidFill>
+                <a:latin typeface="Calibri"/>
+              </a:rPr>
+              <a:t>• </a:t>
+            </a:r>
+            <a:r>
+              <a:rPr sz="1600" b="0" i="0" dirty="0" err="1">
+                <a:solidFill>
+                  <a:srgbClr val="333333"/>
+                </a:solidFill>
+                <a:latin typeface="Calibri"/>
+              </a:rPr>
+              <a:t>phandle</a:t>
+            </a:r>
+            <a:r>
+              <a:rPr sz="1600" b="0" i="0" dirty="0">
+                <a:solidFill>
+                  <a:srgbClr val="333333"/>
+                </a:solidFill>
+                <a:latin typeface="Calibri"/>
+              </a:rPr>
+              <a:t>/references — link nodes (e.g., to a clock)</a:t>
+            </a:r>
+          </a:p>
+          <a:p>
+            <a:pPr>
+              <a:spcAft>
+                <a:spcPts val="400"/>
+              </a:spcAft>
+            </a:pPr>
+            <a:r>
+              <a:rPr b="1" i="0" dirty="0">
+                <a:solidFill>
+                  <a:srgbClr val="663399"/>
+                </a:solidFill>
+                <a:latin typeface="Calibri"/>
+              </a:rPr>
+              <a:t>The driver binding model</a:t>
+            </a:r>
+          </a:p>
+          <a:p>
+            <a:pPr>
+              <a:spcAft>
+                <a:spcPts val="400"/>
+              </a:spcAft>
+            </a:pPr>
+            <a:r>
+              <a:rPr sz="1600" b="0" i="0" dirty="0">
+                <a:solidFill>
+                  <a:srgbClr val="333333"/>
+                </a:solidFill>
+                <a:latin typeface="Calibri"/>
+              </a:rPr>
+              <a:t>Driver advertises a compatible string. Kernel finds a node with matching compatible. Driver's probe() is called.</a:t>
+            </a:r>
+          </a:p>
+        </p:txBody>
+      </p:sp>
+    </p:spTree>
+  </p:cSld>
+  <p:clrMapOvr>
+    <a:masterClrMapping/>
+  </p:clrMapOvr>
+</p:sld>
+</file>
+
+<file path=ppt/slides/slide4.xml><?xml version="1.0" encoding="utf-8"?>
+<p:sld xmlns:a="http://schemas.openxmlformats.org/drawingml/2006/main" xmlns:r="http://schemas.openxmlformats.org/officeDocument/2006/relationships" xmlns:p="http://schemas.openxmlformats.org/presentationml/2006/main">
+  <p:cSld>
+    <p:spTree>
+      <p:nvGrpSpPr>
+        <p:cNvPr id="1" name=""/>
+        <p:cNvGrpSpPr/>
+        <p:nvPr/>
+      </p:nvGrpSpPr>
+      <p:grpSpPr>
+        <a:xfrm>
+          <a:off x="0" y="0"/>
+          <a:ext cx="0" cy="0"/>
+          <a:chOff x="0" y="0"/>
+          <a:chExt cx="0" cy="0"/>
+        </a:xfrm>
+      </p:grpSpPr>
+      <p:sp>
+        <p:nvSpPr>
+          <p:cNvPr id="2" name="Title 1"/>
+          <p:cNvSpPr>
+            <a:spLocks noGrp="1"/>
+          </p:cNvSpPr>
+          <p:nvPr>
+            <p:ph type="title"/>
+          </p:nvPr>
+        </p:nvSpPr>
+        <p:spPr/>
+        <p:txBody>
+          <a:bodyPr/>
+          <a:lstStyle/>
+          <a:p>
+            <a:r>
+              <a:rPr sz="3200" b="1" dirty="0">
+                <a:latin typeface="Calibri"/>
+              </a:rPr>
+              <a:t>Where to Look on a Running System</a:t>
+            </a:r>
+          </a:p>
+        </p:txBody>
+      </p:sp>
+      <p:sp>
+        <p:nvSpPr>
+          <p:cNvPr id="3" name="TextBox 2"/>
+          <p:cNvSpPr txBox="1"/>
+          <p:nvPr/>
+        </p:nvSpPr>
+        <p:spPr>
+          <a:xfrm>
+            <a:off x="822960" y="1417320"/>
+            <a:ext cx="10515600" cy="365760"/>
+          </a:xfrm>
+          <a:prstGeom prst="rect">
+            <a:avLst/>
+          </a:prstGeom>
+          <a:noFill/>
+        </p:spPr>
+        <p:txBody>
+          <a:bodyPr wrap="square" lIns="45720" rIns="45720" anchor="t">
+            <a:spAutoFit/>
+          </a:bodyPr>
+          <a:lstStyle/>
+          <a:p>
+            <a:pPr algn="l"/>
+            <a:r>
+              <a:rPr sz="1500" b="0" i="1">
+                <a:solidFill>
+                  <a:srgbClr val="666666"/>
+                </a:solidFill>
+                <a:latin typeface="Calibri"/>
+              </a:rPr>
+              <a:t>Four interfaces, listed in order of usefulness.</a:t>
             </a:r>
           </a:p>
         </p:txBody>
@@ -6783,6 +7196,7 @@
           <a:lstStyle/>
           <a:p>
             <a:pPr algn="ctr"/>
+            <a:endParaRPr/>
           </a:p>
         </p:txBody>
       </p:sp>
@@ -6827,6 +7241,7 @@
           <a:lstStyle/>
           <a:p>
             <a:pPr algn="ctr"/>
+            <a:endParaRPr/>
           </a:p>
         </p:txBody>
       </p:sp>
@@ -6839,7 +7254,7 @@
         <p:spPr>
           <a:xfrm>
             <a:off x="1005840" y="1874519"/>
-            <a:ext cx="10241280" cy="4389120"/>
+            <a:ext cx="10241280" cy="4401205"/>
           </a:xfrm>
           <a:prstGeom prst="rect">
             <a:avLst/>
@@ -6858,135 +7273,183 @@
               </a:spcAft>
             </a:pPr>
             <a:r>
-              <a:rPr sz="1000" i="1">
+              <a:rPr sz="1400" i="1">
                 <a:solidFill>
                   <a:srgbClr val="808080"/>
                 </a:solidFill>
                 <a:latin typeface="Consolas"/>
               </a:rPr>
-              <a:t># Your DT overlay snippet</a:t>
-            </a:r>
-          </a:p>
-          <a:p>
-            <a:pPr>
-              <a:spcAft>
-                <a:spcPts val="0"/>
-              </a:spcAft>
-            </a:pPr>
-            <a:r>
-              <a:rPr sz="1000">
+              <a:t># 1. The live DT as the kernel sees it</a:t>
+            </a:r>
+          </a:p>
+          <a:p>
+            <a:pPr>
+              <a:spcAft>
+                <a:spcPts val="0"/>
+              </a:spcAft>
+            </a:pPr>
+            <a:r>
+              <a:rPr sz="1400">
                 <a:solidFill>
                   <a:srgbClr val="2D2D2D"/>
                 </a:solidFill>
                 <a:latin typeface="Consolas"/>
               </a:rPr>
-              <a:t>status_led: status-led {</a:t>
-            </a:r>
-          </a:p>
-          <a:p>
-            <a:pPr>
-              <a:spcAft>
-                <a:spcPts val="0"/>
-              </a:spcAft>
-            </a:pPr>
-            <a:r>
-              <a:rPr sz="1000">
+              <a:t>ls /sys/firmware/devicetree/base/</a:t>
+            </a:r>
+          </a:p>
+          <a:p>
+            <a:pPr>
+              <a:spcAft>
+                <a:spcPts val="0"/>
+              </a:spcAft>
+            </a:pPr>
+            <a:r>
+              <a:rPr sz="1400" i="1">
+                <a:solidFill>
+                  <a:srgbClr val="808080"/>
+                </a:solidFill>
+                <a:latin typeface="Consolas"/>
+              </a:rPr>
+              <a:t># Each subdirectory is a node; files inside are properties</a:t>
+            </a:r>
+          </a:p>
+          <a:p>
+            <a:pPr>
+              <a:spcAft>
+                <a:spcPts val="0"/>
+              </a:spcAft>
+            </a:pPr>
+            <a:r>
+              <a:rPr sz="1400">
                 <a:solidFill>
                   <a:srgbClr val="2D2D2D"/>
                 </a:solidFill>
                 <a:latin typeface="Consolas"/>
               </a:rPr>
-              <a:t>    compatible = "gpio-leds";</a:t>
-            </a:r>
-          </a:p>
-          <a:p>
-            <a:pPr>
-              <a:spcAft>
-                <a:spcPts val="0"/>
-              </a:spcAft>
-            </a:pPr>
-            <a:r>
-              <a:rPr sz="1000">
+              <a:t> </a:t>
+            </a:r>
+          </a:p>
+          <a:p>
+            <a:pPr>
+              <a:spcAft>
+                <a:spcPts val="0"/>
+              </a:spcAft>
+            </a:pPr>
+            <a:r>
+              <a:rPr sz="1400" i="1">
+                <a:solidFill>
+                  <a:srgbClr val="808080"/>
+                </a:solidFill>
+                <a:latin typeface="Consolas"/>
+              </a:rPr>
+              <a:t># Decompile the live tree back to DTS for reading</a:t>
+            </a:r>
+          </a:p>
+          <a:p>
+            <a:pPr>
+              <a:spcAft>
+                <a:spcPts val="0"/>
+              </a:spcAft>
+            </a:pPr>
+            <a:r>
+              <a:rPr sz="1400">
                 <a:solidFill>
                   <a:srgbClr val="2D2D2D"/>
                 </a:solidFill>
                 <a:latin typeface="Consolas"/>
               </a:rPr>
-              <a:t>    led-0 {</a:t>
-            </a:r>
-          </a:p>
-          <a:p>
-            <a:pPr>
-              <a:spcAft>
-                <a:spcPts val="0"/>
-              </a:spcAft>
-            </a:pPr>
-            <a:r>
-              <a:rPr sz="1000">
+              <a:t>dtc -I fs -O dts /sys/firmware/devicetree/base &gt; live.dts</a:t>
+            </a:r>
+          </a:p>
+          <a:p>
+            <a:pPr>
+              <a:spcAft>
+                <a:spcPts val="0"/>
+              </a:spcAft>
+            </a:pPr>
+            <a:r>
+              <a:rPr sz="1400">
                 <a:solidFill>
                   <a:srgbClr val="2D2D2D"/>
                 </a:solidFill>
                 <a:latin typeface="Consolas"/>
               </a:rPr>
-              <a:t>        gpios = &lt;&amp;gpio 17 0&gt;;</a:t>
-            </a:r>
-          </a:p>
-          <a:p>
-            <a:pPr>
-              <a:spcAft>
-                <a:spcPts val="0"/>
-              </a:spcAft>
-            </a:pPr>
-            <a:r>
-              <a:rPr sz="1000">
+              <a:t>less live.dts</a:t>
+            </a:r>
+          </a:p>
+          <a:p>
+            <a:pPr>
+              <a:spcAft>
+                <a:spcPts val="0"/>
+              </a:spcAft>
+            </a:pPr>
+            <a:r>
+              <a:rPr sz="1400">
                 <a:solidFill>
                   <a:srgbClr val="2D2D2D"/>
                 </a:solidFill>
                 <a:latin typeface="Consolas"/>
               </a:rPr>
-              <a:t>        default-state = "off";</a:t>
-            </a:r>
-          </a:p>
-          <a:p>
-            <a:pPr>
-              <a:spcAft>
-                <a:spcPts val="0"/>
-              </a:spcAft>
-            </a:pPr>
-            <a:r>
-              <a:rPr sz="1000">
+              <a:t> </a:t>
+            </a:r>
+          </a:p>
+          <a:p>
+            <a:pPr>
+              <a:spcAft>
+                <a:spcPts val="0"/>
+              </a:spcAft>
+            </a:pPr>
+            <a:r>
+              <a:rPr sz="1400" i="1">
+                <a:solidFill>
+                  <a:srgbClr val="808080"/>
+                </a:solidFill>
+                <a:latin typeface="Consolas"/>
+              </a:rPr>
+              <a:t># 2. Boot messages — what bound, what didn't</a:t>
+            </a:r>
+          </a:p>
+          <a:p>
+            <a:pPr>
+              <a:spcAft>
+                <a:spcPts val="0"/>
+              </a:spcAft>
+            </a:pPr>
+            <a:r>
+              <a:rPr sz="1400">
                 <a:solidFill>
                   <a:srgbClr val="2D2D2D"/>
                 </a:solidFill>
                 <a:latin typeface="Consolas"/>
               </a:rPr>
-              <a:t>    };</a:t>
-            </a:r>
-          </a:p>
-          <a:p>
-            <a:pPr>
-              <a:spcAft>
-                <a:spcPts val="0"/>
-              </a:spcAft>
-            </a:pPr>
-            <a:r>
-              <a:rPr sz="1000">
+              <a:t>dmesg | grep -i 'device tree'</a:t>
+            </a:r>
+          </a:p>
+          <a:p>
+            <a:pPr>
+              <a:spcAft>
+                <a:spcPts val="0"/>
+              </a:spcAft>
+            </a:pPr>
+            <a:r>
+              <a:rPr sz="1400">
                 <a:solidFill>
                   <a:srgbClr val="2D2D2D"/>
                 </a:solidFill>
                 <a:latin typeface="Consolas"/>
               </a:rPr>
-              <a:t>};</a:t>
-            </a:r>
-          </a:p>
-          <a:p>
-            <a:pPr>
-              <a:spcAft>
-                <a:spcPts val="0"/>
-              </a:spcAft>
-            </a:pPr>
-            <a:r>
-              <a:rPr sz="1000">
+              <a:t>dmesg | grep -E 'probe|defer'</a:t>
+            </a:r>
+          </a:p>
+          <a:p>
+            <a:pPr>
+              <a:spcAft>
+                <a:spcPts val="0"/>
+              </a:spcAft>
+            </a:pPr>
+            <a:r>
+              <a:rPr sz="1400">
                 <a:solidFill>
                   <a:srgbClr val="2D2D2D"/>
                 </a:solidFill>
@@ -7002,28 +7465,60 @@
               </a:spcAft>
             </a:pPr>
             <a:r>
-              <a:rPr sz="1000" i="1">
+              <a:rPr sz="1400" i="1">
                 <a:solidFill>
                   <a:srgbClr val="808080"/>
                 </a:solidFill>
                 <a:latin typeface="Consolas"/>
               </a:rPr>
-              <a:t># After boot — no LED in /sys/class/leds/</a:t>
-            </a:r>
-          </a:p>
-          <a:p>
-            <a:pPr>
-              <a:spcAft>
-                <a:spcPts val="0"/>
-              </a:spcAft>
-            </a:pPr>
-            <a:r>
-              <a:rPr sz="1000">
+              <a:t># 3. What's bound to a driver</a:t>
+            </a:r>
+          </a:p>
+          <a:p>
+            <a:pPr>
+              <a:spcAft>
+                <a:spcPts val="0"/>
+              </a:spcAft>
+            </a:pPr>
+            <a:r>
+              <a:rPr sz="1400">
                 <a:solidFill>
                   <a:srgbClr val="2D2D2D"/>
                 </a:solidFill>
                 <a:latin typeface="Consolas"/>
               </a:rPr>
+              <a:t>ls /sys/bus/platform/devices/</a:t>
+            </a:r>
+          </a:p>
+          <a:p>
+            <a:pPr>
+              <a:spcAft>
+                <a:spcPts val="0"/>
+              </a:spcAft>
+            </a:pPr>
+            <a:r>
+              <a:rPr sz="1400">
+                <a:solidFill>
+                  <a:srgbClr val="2D2D2D"/>
+                </a:solidFill>
+                <a:latin typeface="Consolas"/>
+              </a:rPr>
+              <a:t>ls /sys/bus/i2c/devices/</a:t>
+            </a:r>
+          </a:p>
+          <a:p>
+            <a:pPr>
+              <a:spcAft>
+                <a:spcPts val="0"/>
+              </a:spcAft>
+            </a:pPr>
+            <a:r>
+              <a:rPr sz="1400">
+                <a:solidFill>
+                  <a:srgbClr val="2D2D2D"/>
+                </a:solidFill>
+                <a:latin typeface="Consolas"/>
+              </a:rPr>
               <a:t>ls /sys/class/leds/</a:t>
             </a:r>
           </a:p>
@@ -7034,173 +7529,61 @@
               </a:spcAft>
             </a:pPr>
             <a:r>
-              <a:rPr sz="1000" i="1">
+              <a:rPr sz="1400">
+                <a:solidFill>
+                  <a:srgbClr val="2D2D2D"/>
+                </a:solidFill>
+                <a:latin typeface="Consolas"/>
+              </a:rPr>
+              <a:t> </a:t>
+            </a:r>
+          </a:p>
+          <a:p>
+            <a:pPr>
+              <a:spcAft>
+                <a:spcPts val="0"/>
+              </a:spcAft>
+            </a:pPr>
+            <a:r>
+              <a:rPr sz="1400" i="1">
                 <a:solidFill>
                   <a:srgbClr val="808080"/>
                 </a:solidFill>
                 <a:latin typeface="Consolas"/>
               </a:rPr>
-              <a:t># (empty or missing your led)</a:t>
-            </a:r>
-          </a:p>
-          <a:p>
-            <a:pPr>
-              <a:spcAft>
-                <a:spcPts val="0"/>
-              </a:spcAft>
-            </a:pPr>
-            <a:r>
-              <a:rPr sz="1000">
+              <a:t># 4. Drivers waiting for dependencies</a:t>
+            </a:r>
+          </a:p>
+          <a:p>
+            <a:pPr>
+              <a:spcAft>
+                <a:spcPts val="0"/>
+              </a:spcAft>
+            </a:pPr>
+            <a:r>
+              <a:rPr sz="1400">
                 <a:solidFill>
                   <a:srgbClr val="2D2D2D"/>
                 </a:solidFill>
                 <a:latin typeface="Consolas"/>
               </a:rPr>
-              <a:t> </a:t>
-            </a:r>
-          </a:p>
-          <a:p>
-            <a:pPr>
-              <a:spcAft>
-                <a:spcPts val="0"/>
-              </a:spcAft>
-            </a:pPr>
-            <a:r>
-              <a:rPr sz="1000" i="1">
+              <a:t>cat /sys/kernel/debug/devices_deferred</a:t>
+            </a:r>
+          </a:p>
+          <a:p>
+            <a:pPr>
+              <a:spcAft>
+                <a:spcPts val="0"/>
+              </a:spcAft>
+            </a:pPr>
+            <a:r>
+              <a:rPr sz="1400" i="1">
                 <a:solidFill>
                   <a:srgbClr val="808080"/>
                 </a:solidFill>
                 <a:latin typeface="Consolas"/>
               </a:rPr>
-              <a:t># Check dmesg</a:t>
-            </a:r>
-          </a:p>
-          <a:p>
-            <a:pPr>
-              <a:spcAft>
-                <a:spcPts val="0"/>
-              </a:spcAft>
-            </a:pPr>
-            <a:r>
-              <a:rPr sz="1000">
-                <a:solidFill>
-                  <a:srgbClr val="2D2D2D"/>
-                </a:solidFill>
-                <a:latin typeface="Consolas"/>
-              </a:rPr>
-              <a:t>dmesg | grep -i -E 'gpio-leds|led'</a:t>
-            </a:r>
-          </a:p>
-          <a:p>
-            <a:pPr>
-              <a:spcAft>
-                <a:spcPts val="0"/>
-              </a:spcAft>
-            </a:pPr>
-            <a:r>
-              <a:rPr sz="1000" i="1">
-                <a:solidFill>
-                  <a:srgbClr val="808080"/>
-                </a:solidFill>
-                <a:latin typeface="Consolas"/>
-              </a:rPr>
-              <a:t># → 'gpio-leds: probe failed with -EBUSY'</a:t>
-            </a:r>
-          </a:p>
-          <a:p>
-            <a:pPr>
-              <a:spcAft>
-                <a:spcPts val="0"/>
-              </a:spcAft>
-            </a:pPr>
-            <a:r>
-              <a:rPr sz="1000">
-                <a:solidFill>
-                  <a:srgbClr val="2D2D2D"/>
-                </a:solidFill>
-                <a:latin typeface="Consolas"/>
-              </a:rPr>
-              <a:t> </a:t>
-            </a:r>
-          </a:p>
-          <a:p>
-            <a:pPr>
-              <a:spcAft>
-                <a:spcPts val="0"/>
-              </a:spcAft>
-            </a:pPr>
-            <a:r>
-              <a:rPr sz="1000" i="1">
-                <a:solidFill>
-                  <a:srgbClr val="808080"/>
-                </a:solidFill>
-                <a:latin typeface="Consolas"/>
-              </a:rPr>
-              <a:t># Diagnosis: GPIO 17 is already claimed by another driver</a:t>
-            </a:r>
-          </a:p>
-          <a:p>
-            <a:pPr>
-              <a:spcAft>
-                <a:spcPts val="0"/>
-              </a:spcAft>
-            </a:pPr>
-            <a:r>
-              <a:rPr sz="1000">
-                <a:solidFill>
-                  <a:srgbClr val="2D2D2D"/>
-                </a:solidFill>
-                <a:latin typeface="Consolas"/>
-              </a:rPr>
-              <a:t>cat /sys/kernel/debug/gpio</a:t>
-            </a:r>
-          </a:p>
-          <a:p>
-            <a:pPr>
-              <a:spcAft>
-                <a:spcPts val="0"/>
-              </a:spcAft>
-            </a:pPr>
-            <a:r>
-              <a:rPr sz="1000" i="1">
-                <a:solidFill>
-                  <a:srgbClr val="808080"/>
-                </a:solidFill>
-                <a:latin typeface="Consolas"/>
-              </a:rPr>
-              <a:t># Look for 'gpio-17' — whatever holds it is the conflict</a:t>
-            </a:r>
-          </a:p>
-          <a:p>
-            <a:pPr>
-              <a:spcAft>
-                <a:spcPts val="0"/>
-              </a:spcAft>
-            </a:pPr>
-            <a:r>
-              <a:rPr sz="1000">
-                <a:solidFill>
-                  <a:srgbClr val="2D2D2D"/>
-                </a:solidFill>
-                <a:latin typeface="Consolas"/>
-              </a:rPr>
-              <a:t> </a:t>
-            </a:r>
-          </a:p>
-          <a:p>
-            <a:pPr>
-              <a:spcAft>
-                <a:spcPts val="0"/>
-              </a:spcAft>
-            </a:pPr>
-            <a:r>
-              <a:rPr sz="1000" i="1">
-                <a:solidFill>
-                  <a:srgbClr val="808080"/>
-                </a:solidFill>
-                <a:latin typeface="Consolas"/>
-              </a:rPr>
-              <a:t># Fix: pick a free GPIO, or disable the conflicting node</a:t>
+              <a:t># Lists drivers stuck in EPROBE_DEFER</a:t>
             </a:r>
           </a:p>
         </p:txBody>
@@ -7213,8 +7596,8 @@
 </p:sld>
 </file>
 
-<file path=ppt/slides/slide14.xml><?xml version="1.0" encoding="utf-8"?>
-<p:sld xmlns:a="http://schemas.openxmlformats.org/drawingml/2006/main" xmlns:p="http://schemas.openxmlformats.org/presentationml/2006/main" xmlns:r="http://schemas.openxmlformats.org/officeDocument/2006/relationships">
+<file path=ppt/slides/slide5.xml><?xml version="1.0" encoding="utf-8"?>
+<p:sld xmlns:a="http://schemas.openxmlformats.org/drawingml/2006/main" xmlns:r="http://schemas.openxmlformats.org/officeDocument/2006/relationships" xmlns:p="http://schemas.openxmlformats.org/presentationml/2006/main">
   <p:cSld>
     <p:spTree>
       <p:nvGrpSpPr>
@@ -7222,7 +7605,14 @@
         <p:cNvGrpSpPr/>
         <p:nvPr/>
       </p:nvGrpSpPr>
-      <p:grpSpPr/>
+      <p:grpSpPr>
+        <a:xfrm>
+          <a:off x="0" y="0"/>
+          <a:ext cx="0" cy="0"/>
+          <a:chOff x="0" y="0"/>
+          <a:chExt cx="0" cy="0"/>
+        </a:xfrm>
+      </p:grpSpPr>
       <p:sp>
         <p:nvSpPr>
           <p:cNvPr id="2" name="Title 1"/>
@@ -7239,13 +7629,10 @@
           <a:lstStyle/>
           <a:p>
             <a:r>
-              <a:rPr sz="3200" b="1">
-                <a:solidFill>
-                  <a:srgbClr val="CC0066"/>
-                </a:solidFill>
+              <a:rPr sz="3200" b="1" dirty="0">
                 <a:latin typeface="Calibri"/>
               </a:rPr>
-              <a:t>Failure Scenario 2 — Walkthrough</a:t>
+              <a:t>EPROBE_DEFER — Linux's Retry Loop</a:t>
             </a:r>
           </a:p>
         </p:txBody>
@@ -7267,7 +7654,7 @@
           <a:noFill/>
         </p:spPr>
         <p:txBody>
-          <a:bodyPr wrap="square" anchor="t" lIns="45720" rIns="45720">
+          <a:bodyPr wrap="square" lIns="45720" rIns="45720" anchor="t">
             <a:spAutoFit/>
           </a:bodyPr>
           <a:lstStyle/>
@@ -7280,7 +7667,1034 @@
                 </a:solidFill>
                 <a:latin typeface="Calibri"/>
               </a:rPr>
-              <a:t>I2C sensor in DT, kernel shows nothing under i2c bus.</a:t>
+              <a:t>Why drivers seem to 'not bind' but actually retry.</a:t>
+            </a:r>
+          </a:p>
+        </p:txBody>
+      </p:sp>
+      <p:sp>
+        <p:nvSpPr>
+          <p:cNvPr id="4" name="TextBox 3"/>
+          <p:cNvSpPr txBox="1"/>
+          <p:nvPr/>
+        </p:nvSpPr>
+        <p:spPr>
+          <a:xfrm>
+            <a:off x="822960" y="1783080"/>
+            <a:ext cx="10515600" cy="3898503"/>
+          </a:xfrm>
+          <a:prstGeom prst="rect">
+            <a:avLst/>
+          </a:prstGeom>
+          <a:noFill/>
+        </p:spPr>
+        <p:txBody>
+          <a:bodyPr wrap="square" lIns="45720" rIns="45720">
+            <a:spAutoFit/>
+          </a:bodyPr>
+          <a:lstStyle/>
+          <a:p>
+            <a:pPr>
+              <a:spcAft>
+                <a:spcPts val="400"/>
+              </a:spcAft>
+            </a:pPr>
+            <a:r>
+              <a:rPr sz="2000" b="1" i="0" dirty="0">
+                <a:solidFill>
+                  <a:srgbClr val="CC0066"/>
+                </a:solidFill>
+                <a:latin typeface="Calibri"/>
+              </a:rPr>
+              <a:t>The pattern</a:t>
+            </a:r>
+          </a:p>
+          <a:p>
+            <a:pPr>
+              <a:spcAft>
+                <a:spcPts val="400"/>
+              </a:spcAft>
+            </a:pPr>
+            <a:r>
+              <a:rPr sz="1600" b="0" i="0" dirty="0">
+                <a:solidFill>
+                  <a:srgbClr val="333333"/>
+                </a:solidFill>
+                <a:latin typeface="Calibri"/>
+              </a:rPr>
+              <a:t>A driver's probe() may need a clock, regulator, or GPIO that isn't ready yet.</a:t>
+            </a:r>
+          </a:p>
+          <a:p>
+            <a:pPr>
+              <a:spcAft>
+                <a:spcPts val="400"/>
+              </a:spcAft>
+            </a:pPr>
+            <a:r>
+              <a:rPr sz="1600" b="0" i="0" dirty="0">
+                <a:solidFill>
+                  <a:srgbClr val="333333"/>
+                </a:solidFill>
+                <a:latin typeface="Calibri"/>
+              </a:rPr>
+              <a:t>Instead of failing, it returns -EPROBE_DEFER.</a:t>
+            </a:r>
+          </a:p>
+          <a:p>
+            <a:pPr>
+              <a:spcAft>
+                <a:spcPts val="1000"/>
+              </a:spcAft>
+            </a:pPr>
+            <a:r>
+              <a:rPr sz="1600" b="0" i="0" dirty="0">
+                <a:solidFill>
+                  <a:srgbClr val="333333"/>
+                </a:solidFill>
+                <a:latin typeface="Calibri"/>
+              </a:rPr>
+              <a:t>Kernel retries periodically as other drivers initialize.</a:t>
+            </a:r>
+          </a:p>
+          <a:p>
+            <a:pPr>
+              <a:spcAft>
+                <a:spcPts val="400"/>
+              </a:spcAft>
+            </a:pPr>
+            <a:r>
+              <a:rPr sz="2000" b="1" i="0" dirty="0">
+                <a:solidFill>
+                  <a:srgbClr val="CC0066"/>
+                </a:solidFill>
+                <a:latin typeface="Calibri"/>
+              </a:rPr>
+              <a:t>What you see</a:t>
+            </a:r>
+          </a:p>
+          <a:p>
+            <a:pPr>
+              <a:spcAft>
+                <a:spcPts val="400"/>
+              </a:spcAft>
+            </a:pPr>
+            <a:r>
+              <a:rPr sz="1600" b="0" i="0" dirty="0">
+                <a:solidFill>
+                  <a:srgbClr val="333333"/>
+                </a:solidFill>
+                <a:latin typeface="Calibri"/>
+              </a:rPr>
+              <a:t>• Driver doesn't appear in </a:t>
+            </a:r>
+            <a:r>
+              <a:rPr sz="1600" b="0" i="0" dirty="0" err="1">
+                <a:solidFill>
+                  <a:srgbClr val="333333"/>
+                </a:solidFill>
+                <a:latin typeface="Calibri"/>
+              </a:rPr>
+              <a:t>dmesg</a:t>
+            </a:r>
+            <a:r>
+              <a:rPr sz="1600" b="0" i="0" dirty="0">
+                <a:solidFill>
+                  <a:srgbClr val="333333"/>
+                </a:solidFill>
+                <a:latin typeface="Calibri"/>
+              </a:rPr>
+              <a:t> as 'bound'</a:t>
+            </a:r>
+          </a:p>
+          <a:p>
+            <a:pPr>
+              <a:spcAft>
+                <a:spcPts val="400"/>
+              </a:spcAft>
+            </a:pPr>
+            <a:r>
+              <a:rPr sz="1600" b="0" i="0" dirty="0">
+                <a:solidFill>
+                  <a:srgbClr val="333333"/>
+                </a:solidFill>
+                <a:latin typeface="Calibri"/>
+              </a:rPr>
+              <a:t>• Device shows up under /sys/devices/platform/</a:t>
+            </a:r>
+          </a:p>
+          <a:p>
+            <a:pPr>
+              <a:spcAft>
+                <a:spcPts val="1000"/>
+              </a:spcAft>
+            </a:pPr>
+            <a:r>
+              <a:rPr sz="1600" b="0" i="0" dirty="0">
+                <a:solidFill>
+                  <a:srgbClr val="333333"/>
+                </a:solidFill>
+                <a:latin typeface="Calibri"/>
+              </a:rPr>
+              <a:t>• But /sys/class/&lt;type&gt;/ stays empty</a:t>
+            </a:r>
+          </a:p>
+          <a:p>
+            <a:pPr>
+              <a:spcAft>
+                <a:spcPts val="400"/>
+              </a:spcAft>
+            </a:pPr>
+            <a:r>
+              <a:rPr sz="2000" b="1" i="0" dirty="0">
+                <a:solidFill>
+                  <a:srgbClr val="663399"/>
+                </a:solidFill>
+                <a:latin typeface="Calibri"/>
+              </a:rPr>
+              <a:t>What to check</a:t>
+            </a:r>
+          </a:p>
+          <a:p>
+            <a:pPr>
+              <a:spcAft>
+                <a:spcPts val="400"/>
+              </a:spcAft>
+            </a:pPr>
+            <a:r>
+              <a:rPr sz="1600" b="0" i="0" dirty="0">
+                <a:solidFill>
+                  <a:srgbClr val="333333"/>
+                </a:solidFill>
+                <a:latin typeface="Consolas"/>
+              </a:rPr>
+              <a:t>cat /sys/kernel/debug/</a:t>
+            </a:r>
+            <a:r>
+              <a:rPr sz="1600" b="0" i="0" dirty="0" err="1">
+                <a:solidFill>
+                  <a:srgbClr val="333333"/>
+                </a:solidFill>
+                <a:latin typeface="Consolas"/>
+              </a:rPr>
+              <a:t>devices_deferred</a:t>
+            </a:r>
+            <a:endParaRPr sz="1600" b="0" i="0" dirty="0">
+              <a:solidFill>
+                <a:srgbClr val="333333"/>
+              </a:solidFill>
+              <a:latin typeface="Consolas"/>
+            </a:endParaRPr>
+          </a:p>
+          <a:p>
+            <a:pPr>
+              <a:spcAft>
+                <a:spcPts val="400"/>
+              </a:spcAft>
+            </a:pPr>
+            <a:r>
+              <a:rPr sz="1600" b="0" i="0" dirty="0">
+                <a:solidFill>
+                  <a:srgbClr val="333333"/>
+                </a:solidFill>
+                <a:latin typeface="Calibri"/>
+              </a:rPr>
+              <a:t>That tells you the device is waiting on something. Look upstream in the DT to find what it depends on (clocks, resets, regulators).</a:t>
+            </a:r>
+          </a:p>
+        </p:txBody>
+      </p:sp>
+    </p:spTree>
+  </p:cSld>
+  <p:clrMapOvr>
+    <a:masterClrMapping/>
+  </p:clrMapOvr>
+</p:sld>
+</file>
+
+<file path=ppt/slides/slide6.xml><?xml version="1.0" encoding="utf-8"?>
+<p:sld xmlns:a="http://schemas.openxmlformats.org/drawingml/2006/main" xmlns:r="http://schemas.openxmlformats.org/officeDocument/2006/relationships" xmlns:p="http://schemas.openxmlformats.org/presentationml/2006/main">
+  <p:cSld>
+    <p:spTree>
+      <p:nvGrpSpPr>
+        <p:cNvPr id="1" name=""/>
+        <p:cNvGrpSpPr/>
+        <p:nvPr/>
+      </p:nvGrpSpPr>
+      <p:grpSpPr>
+        <a:xfrm>
+          <a:off x="0" y="0"/>
+          <a:ext cx="0" cy="0"/>
+          <a:chOff x="0" y="0"/>
+          <a:chExt cx="0" cy="0"/>
+        </a:xfrm>
+      </p:grpSpPr>
+      <p:sp>
+        <p:nvSpPr>
+          <p:cNvPr id="2" name="Title 1"/>
+          <p:cNvSpPr>
+            <a:spLocks noGrp="1"/>
+          </p:cNvSpPr>
+          <p:nvPr>
+            <p:ph type="title"/>
+          </p:nvPr>
+        </p:nvSpPr>
+        <p:spPr/>
+        <p:txBody>
+          <a:bodyPr/>
+          <a:lstStyle/>
+          <a:p>
+            <a:r>
+              <a:rPr sz="3200" b="1" dirty="0">
+                <a:latin typeface="Calibri"/>
+              </a:rPr>
+              <a:t>Five Common Failure Modes</a:t>
+            </a:r>
+          </a:p>
+        </p:txBody>
+      </p:sp>
+      <p:sp>
+        <p:nvSpPr>
+          <p:cNvPr id="3" name="TextBox 2"/>
+          <p:cNvSpPr txBox="1"/>
+          <p:nvPr/>
+        </p:nvSpPr>
+        <p:spPr>
+          <a:xfrm>
+            <a:off x="822960" y="1417320"/>
+            <a:ext cx="10515600" cy="365760"/>
+          </a:xfrm>
+          <a:prstGeom prst="rect">
+            <a:avLst/>
+          </a:prstGeom>
+          <a:noFill/>
+        </p:spPr>
+        <p:txBody>
+          <a:bodyPr wrap="square" lIns="45720" rIns="45720" anchor="t">
+            <a:spAutoFit/>
+          </a:bodyPr>
+          <a:lstStyle/>
+          <a:p>
+            <a:pPr algn="l"/>
+            <a:r>
+              <a:rPr sz="1500" b="0" i="1">
+                <a:solidFill>
+                  <a:srgbClr val="666666"/>
+                </a:solidFill>
+                <a:latin typeface="Calibri"/>
+              </a:rPr>
+              <a:t>The bugs that hit 80% of bring-up sessions.</a:t>
+            </a:r>
+          </a:p>
+        </p:txBody>
+      </p:sp>
+      <p:sp>
+        <p:nvSpPr>
+          <p:cNvPr id="4" name="Rounded Rectangle 3"/>
+          <p:cNvSpPr/>
+          <p:nvPr/>
+        </p:nvSpPr>
+        <p:spPr>
+          <a:xfrm>
+            <a:off x="822960" y="1828800"/>
+            <a:ext cx="457200" cy="548640"/>
+          </a:xfrm>
+          <a:prstGeom prst="roundRect">
+            <a:avLst/>
+          </a:prstGeom>
+          <a:solidFill>
+            <a:srgbClr val="CC0066"/>
+          </a:solidFill>
+          <a:ln>
+            <a:noFill/>
+          </a:ln>
+          <a:effectLst/>
+        </p:spPr>
+        <p:style>
+          <a:lnRef idx="1">
+            <a:schemeClr val="accent1"/>
+          </a:lnRef>
+          <a:fillRef idx="3">
+            <a:schemeClr val="accent1"/>
+          </a:fillRef>
+          <a:effectRef idx="2">
+            <a:schemeClr val="accent1"/>
+          </a:effectRef>
+          <a:fontRef idx="minor">
+            <a:schemeClr val="lt1"/>
+          </a:fontRef>
+        </p:style>
+        <p:txBody>
+          <a:bodyPr lIns="0" rIns="0" rtlCol="0" anchor="ctr"/>
+          <a:lstStyle/>
+          <a:p>
+            <a:pPr algn="ctr"/>
+            <a:r>
+              <a:rPr sz="2200" b="1">
+                <a:solidFill>
+                  <a:srgbClr val="FFFFFF"/>
+                </a:solidFill>
+                <a:latin typeface="Calibri"/>
+              </a:rPr>
+              <a:t>1</a:t>
+            </a:r>
+          </a:p>
+        </p:txBody>
+      </p:sp>
+      <p:sp>
+        <p:nvSpPr>
+          <p:cNvPr id="5" name="TextBox 4"/>
+          <p:cNvSpPr txBox="1"/>
+          <p:nvPr/>
+        </p:nvSpPr>
+        <p:spPr>
+          <a:xfrm>
+            <a:off x="1417320" y="1828800"/>
+            <a:ext cx="10058400" cy="320040"/>
+          </a:xfrm>
+          <a:prstGeom prst="rect">
+            <a:avLst/>
+          </a:prstGeom>
+          <a:noFill/>
+        </p:spPr>
+        <p:txBody>
+          <a:bodyPr wrap="square" lIns="45720" rIns="45720" anchor="t">
+            <a:spAutoFit/>
+          </a:bodyPr>
+          <a:lstStyle/>
+          <a:p>
+            <a:pPr algn="l"/>
+            <a:r>
+              <a:rPr sz="1600" b="1" i="0">
+                <a:solidFill>
+                  <a:srgbClr val="663399"/>
+                </a:solidFill>
+                <a:latin typeface="Calibri"/>
+              </a:rPr>
+              <a:t>Wrong compatible string</a:t>
+            </a:r>
+          </a:p>
+        </p:txBody>
+      </p:sp>
+      <p:sp>
+        <p:nvSpPr>
+          <p:cNvPr id="6" name="TextBox 5"/>
+          <p:cNvSpPr txBox="1"/>
+          <p:nvPr/>
+        </p:nvSpPr>
+        <p:spPr>
+          <a:xfrm>
+            <a:off x="1417320" y="2139696"/>
+            <a:ext cx="10058400" cy="320040"/>
+          </a:xfrm>
+          <a:prstGeom prst="rect">
+            <a:avLst/>
+          </a:prstGeom>
+          <a:noFill/>
+        </p:spPr>
+        <p:txBody>
+          <a:bodyPr wrap="square" lIns="45720" rIns="45720" anchor="t">
+            <a:spAutoFit/>
+          </a:bodyPr>
+          <a:lstStyle/>
+          <a:p>
+            <a:pPr algn="l"/>
+            <a:r>
+              <a:rPr sz="1300" b="0" i="0">
+                <a:solidFill>
+                  <a:srgbClr val="333333"/>
+                </a:solidFill>
+                <a:latin typeface="Calibri"/>
+              </a:rPr>
+              <a:t>Driver loads but doesn't bind. Check Documentation/devicetree/bindings/.</a:t>
+            </a:r>
+          </a:p>
+        </p:txBody>
+      </p:sp>
+      <p:sp>
+        <p:nvSpPr>
+          <p:cNvPr id="7" name="Rounded Rectangle 6"/>
+          <p:cNvSpPr/>
+          <p:nvPr/>
+        </p:nvSpPr>
+        <p:spPr>
+          <a:xfrm>
+            <a:off x="822960" y="2542032"/>
+            <a:ext cx="457200" cy="548640"/>
+          </a:xfrm>
+          <a:prstGeom prst="roundRect">
+            <a:avLst/>
+          </a:prstGeom>
+          <a:solidFill>
+            <a:srgbClr val="CC0066"/>
+          </a:solidFill>
+          <a:ln>
+            <a:noFill/>
+          </a:ln>
+          <a:effectLst/>
+        </p:spPr>
+        <p:style>
+          <a:lnRef idx="1">
+            <a:schemeClr val="accent1"/>
+          </a:lnRef>
+          <a:fillRef idx="3">
+            <a:schemeClr val="accent1"/>
+          </a:fillRef>
+          <a:effectRef idx="2">
+            <a:schemeClr val="accent1"/>
+          </a:effectRef>
+          <a:fontRef idx="minor">
+            <a:schemeClr val="lt1"/>
+          </a:fontRef>
+        </p:style>
+        <p:txBody>
+          <a:bodyPr lIns="0" rIns="0" rtlCol="0" anchor="ctr"/>
+          <a:lstStyle/>
+          <a:p>
+            <a:pPr algn="ctr"/>
+            <a:r>
+              <a:rPr sz="2200" b="1">
+                <a:solidFill>
+                  <a:srgbClr val="FFFFFF"/>
+                </a:solidFill>
+                <a:latin typeface="Calibri"/>
+              </a:rPr>
+              <a:t>2</a:t>
+            </a:r>
+          </a:p>
+        </p:txBody>
+      </p:sp>
+      <p:sp>
+        <p:nvSpPr>
+          <p:cNvPr id="8" name="TextBox 7"/>
+          <p:cNvSpPr txBox="1"/>
+          <p:nvPr/>
+        </p:nvSpPr>
+        <p:spPr>
+          <a:xfrm>
+            <a:off x="1417320" y="2542032"/>
+            <a:ext cx="10058400" cy="320040"/>
+          </a:xfrm>
+          <a:prstGeom prst="rect">
+            <a:avLst/>
+          </a:prstGeom>
+          <a:noFill/>
+        </p:spPr>
+        <p:txBody>
+          <a:bodyPr wrap="square" lIns="45720" rIns="45720" anchor="t">
+            <a:spAutoFit/>
+          </a:bodyPr>
+          <a:lstStyle/>
+          <a:p>
+            <a:pPr algn="l"/>
+            <a:r>
+              <a:rPr sz="1600" b="1" i="0">
+                <a:solidFill>
+                  <a:srgbClr val="663399"/>
+                </a:solidFill>
+                <a:latin typeface="Calibri"/>
+              </a:rPr>
+              <a:t>Missing or wrong reg</a:t>
+            </a:r>
+          </a:p>
+        </p:txBody>
+      </p:sp>
+      <p:sp>
+        <p:nvSpPr>
+          <p:cNvPr id="9" name="TextBox 8"/>
+          <p:cNvSpPr txBox="1"/>
+          <p:nvPr/>
+        </p:nvSpPr>
+        <p:spPr>
+          <a:xfrm>
+            <a:off x="1417320" y="2852928"/>
+            <a:ext cx="10058400" cy="320040"/>
+          </a:xfrm>
+          <a:prstGeom prst="rect">
+            <a:avLst/>
+          </a:prstGeom>
+          <a:noFill/>
+        </p:spPr>
+        <p:txBody>
+          <a:bodyPr wrap="square" lIns="45720" rIns="45720" anchor="t">
+            <a:spAutoFit/>
+          </a:bodyPr>
+          <a:lstStyle/>
+          <a:p>
+            <a:pPr algn="l"/>
+            <a:r>
+              <a:rPr sz="1300" b="0" i="0">
+                <a:solidFill>
+                  <a:srgbClr val="333333"/>
+                </a:solidFill>
+                <a:latin typeface="Calibri"/>
+              </a:rPr>
+              <a:t>Driver probes but reads garbage / triggers fault. Check SoC reference manual.</a:t>
+            </a:r>
+          </a:p>
+        </p:txBody>
+      </p:sp>
+      <p:sp>
+        <p:nvSpPr>
+          <p:cNvPr id="10" name="Rounded Rectangle 9"/>
+          <p:cNvSpPr/>
+          <p:nvPr/>
+        </p:nvSpPr>
+        <p:spPr>
+          <a:xfrm>
+            <a:off x="822960" y="3255264"/>
+            <a:ext cx="457200" cy="548640"/>
+          </a:xfrm>
+          <a:prstGeom prst="roundRect">
+            <a:avLst/>
+          </a:prstGeom>
+          <a:solidFill>
+            <a:srgbClr val="CC0066"/>
+          </a:solidFill>
+          <a:ln>
+            <a:noFill/>
+          </a:ln>
+          <a:effectLst/>
+        </p:spPr>
+        <p:style>
+          <a:lnRef idx="1">
+            <a:schemeClr val="accent1"/>
+          </a:lnRef>
+          <a:fillRef idx="3">
+            <a:schemeClr val="accent1"/>
+          </a:fillRef>
+          <a:effectRef idx="2">
+            <a:schemeClr val="accent1"/>
+          </a:effectRef>
+          <a:fontRef idx="minor">
+            <a:schemeClr val="lt1"/>
+          </a:fontRef>
+        </p:style>
+        <p:txBody>
+          <a:bodyPr lIns="0" rIns="0" rtlCol="0" anchor="ctr"/>
+          <a:lstStyle/>
+          <a:p>
+            <a:pPr algn="ctr"/>
+            <a:r>
+              <a:rPr sz="2200" b="1">
+                <a:solidFill>
+                  <a:srgbClr val="FFFFFF"/>
+                </a:solidFill>
+                <a:latin typeface="Calibri"/>
+              </a:rPr>
+              <a:t>3</a:t>
+            </a:r>
+          </a:p>
+        </p:txBody>
+      </p:sp>
+      <p:sp>
+        <p:nvSpPr>
+          <p:cNvPr id="11" name="TextBox 10"/>
+          <p:cNvSpPr txBox="1"/>
+          <p:nvPr/>
+        </p:nvSpPr>
+        <p:spPr>
+          <a:xfrm>
+            <a:off x="1417320" y="3255264"/>
+            <a:ext cx="10058400" cy="320040"/>
+          </a:xfrm>
+          <a:prstGeom prst="rect">
+            <a:avLst/>
+          </a:prstGeom>
+          <a:noFill/>
+        </p:spPr>
+        <p:txBody>
+          <a:bodyPr wrap="square" lIns="45720" rIns="45720" anchor="t">
+            <a:spAutoFit/>
+          </a:bodyPr>
+          <a:lstStyle/>
+          <a:p>
+            <a:pPr algn="l"/>
+            <a:r>
+              <a:rPr sz="1600" b="1" i="0">
+                <a:solidFill>
+                  <a:srgbClr val="663399"/>
+                </a:solidFill>
+                <a:latin typeface="Calibri"/>
+              </a:rPr>
+              <a:t>Missing clocks or resets</a:t>
+            </a:r>
+          </a:p>
+        </p:txBody>
+      </p:sp>
+      <p:sp>
+        <p:nvSpPr>
+          <p:cNvPr id="12" name="TextBox 11"/>
+          <p:cNvSpPr txBox="1"/>
+          <p:nvPr/>
+        </p:nvSpPr>
+        <p:spPr>
+          <a:xfrm>
+            <a:off x="1417320" y="3566160"/>
+            <a:ext cx="10058400" cy="320040"/>
+          </a:xfrm>
+          <a:prstGeom prst="rect">
+            <a:avLst/>
+          </a:prstGeom>
+          <a:noFill/>
+        </p:spPr>
+        <p:txBody>
+          <a:bodyPr wrap="square" lIns="45720" rIns="45720" anchor="t">
+            <a:spAutoFit/>
+          </a:bodyPr>
+          <a:lstStyle/>
+          <a:p>
+            <a:pPr algn="l"/>
+            <a:r>
+              <a:rPr sz="1300" b="0" i="0">
+                <a:solidFill>
+                  <a:srgbClr val="333333"/>
+                </a:solidFill>
+                <a:latin typeface="Calibri"/>
+              </a:rPr>
+              <a:t>Driver returns EPROBE_DEFER forever. /sys/kernel/debug/devices_deferred shows it.</a:t>
+            </a:r>
+          </a:p>
+        </p:txBody>
+      </p:sp>
+      <p:sp>
+        <p:nvSpPr>
+          <p:cNvPr id="13" name="Rounded Rectangle 12"/>
+          <p:cNvSpPr/>
+          <p:nvPr/>
+        </p:nvSpPr>
+        <p:spPr>
+          <a:xfrm>
+            <a:off x="822960" y="3968496"/>
+            <a:ext cx="457200" cy="548640"/>
+          </a:xfrm>
+          <a:prstGeom prst="roundRect">
+            <a:avLst/>
+          </a:prstGeom>
+          <a:solidFill>
+            <a:srgbClr val="CC0066"/>
+          </a:solidFill>
+          <a:ln>
+            <a:noFill/>
+          </a:ln>
+          <a:effectLst/>
+        </p:spPr>
+        <p:style>
+          <a:lnRef idx="1">
+            <a:schemeClr val="accent1"/>
+          </a:lnRef>
+          <a:fillRef idx="3">
+            <a:schemeClr val="accent1"/>
+          </a:fillRef>
+          <a:effectRef idx="2">
+            <a:schemeClr val="accent1"/>
+          </a:effectRef>
+          <a:fontRef idx="minor">
+            <a:schemeClr val="lt1"/>
+          </a:fontRef>
+        </p:style>
+        <p:txBody>
+          <a:bodyPr lIns="0" rIns="0" rtlCol="0" anchor="ctr"/>
+          <a:lstStyle/>
+          <a:p>
+            <a:pPr algn="ctr"/>
+            <a:r>
+              <a:rPr sz="2200" b="1">
+                <a:solidFill>
+                  <a:srgbClr val="FFFFFF"/>
+                </a:solidFill>
+                <a:latin typeface="Calibri"/>
+              </a:rPr>
+              <a:t>4</a:t>
+            </a:r>
+          </a:p>
+        </p:txBody>
+      </p:sp>
+      <p:sp>
+        <p:nvSpPr>
+          <p:cNvPr id="14" name="TextBox 13"/>
+          <p:cNvSpPr txBox="1"/>
+          <p:nvPr/>
+        </p:nvSpPr>
+        <p:spPr>
+          <a:xfrm>
+            <a:off x="1417320" y="3968496"/>
+            <a:ext cx="10058400" cy="320040"/>
+          </a:xfrm>
+          <a:prstGeom prst="rect">
+            <a:avLst/>
+          </a:prstGeom>
+          <a:noFill/>
+        </p:spPr>
+        <p:txBody>
+          <a:bodyPr wrap="square" lIns="45720" rIns="45720" anchor="t">
+            <a:spAutoFit/>
+          </a:bodyPr>
+          <a:lstStyle/>
+          <a:p>
+            <a:pPr algn="l"/>
+            <a:r>
+              <a:rPr sz="1600" b="1" i="0">
+                <a:solidFill>
+                  <a:srgbClr val="663399"/>
+                </a:solidFill>
+                <a:latin typeface="Calibri"/>
+              </a:rPr>
+              <a:t>GPIO conflict between nodes</a:t>
+            </a:r>
+          </a:p>
+        </p:txBody>
+      </p:sp>
+      <p:sp>
+        <p:nvSpPr>
+          <p:cNvPr id="15" name="TextBox 14"/>
+          <p:cNvSpPr txBox="1"/>
+          <p:nvPr/>
+        </p:nvSpPr>
+        <p:spPr>
+          <a:xfrm>
+            <a:off x="1417320" y="4279392"/>
+            <a:ext cx="10058400" cy="320040"/>
+          </a:xfrm>
+          <a:prstGeom prst="rect">
+            <a:avLst/>
+          </a:prstGeom>
+          <a:noFill/>
+        </p:spPr>
+        <p:txBody>
+          <a:bodyPr wrap="square" lIns="45720" rIns="45720" anchor="t">
+            <a:spAutoFit/>
+          </a:bodyPr>
+          <a:lstStyle/>
+          <a:p>
+            <a:pPr algn="l"/>
+            <a:r>
+              <a:rPr sz="1300" b="0" i="0">
+                <a:solidFill>
+                  <a:srgbClr val="333333"/>
+                </a:solidFill>
+                <a:latin typeface="Calibri"/>
+              </a:rPr>
+              <a:t>Two nodes claim the same GPIO; second to probe fails. Check pinctrl assignments.</a:t>
+            </a:r>
+          </a:p>
+        </p:txBody>
+      </p:sp>
+      <p:sp>
+        <p:nvSpPr>
+          <p:cNvPr id="16" name="Rounded Rectangle 15"/>
+          <p:cNvSpPr/>
+          <p:nvPr/>
+        </p:nvSpPr>
+        <p:spPr>
+          <a:xfrm>
+            <a:off x="822960" y="4681728"/>
+            <a:ext cx="457200" cy="548640"/>
+          </a:xfrm>
+          <a:prstGeom prst="roundRect">
+            <a:avLst/>
+          </a:prstGeom>
+          <a:solidFill>
+            <a:srgbClr val="CC0066"/>
+          </a:solidFill>
+          <a:ln>
+            <a:noFill/>
+          </a:ln>
+          <a:effectLst/>
+        </p:spPr>
+        <p:style>
+          <a:lnRef idx="1">
+            <a:schemeClr val="accent1"/>
+          </a:lnRef>
+          <a:fillRef idx="3">
+            <a:schemeClr val="accent1"/>
+          </a:fillRef>
+          <a:effectRef idx="2">
+            <a:schemeClr val="accent1"/>
+          </a:effectRef>
+          <a:fontRef idx="minor">
+            <a:schemeClr val="lt1"/>
+          </a:fontRef>
+        </p:style>
+        <p:txBody>
+          <a:bodyPr lIns="0" rIns="0" rtlCol="0" anchor="ctr"/>
+          <a:lstStyle/>
+          <a:p>
+            <a:pPr algn="ctr"/>
+            <a:r>
+              <a:rPr sz="2200" b="1">
+                <a:solidFill>
+                  <a:srgbClr val="FFFFFF"/>
+                </a:solidFill>
+                <a:latin typeface="Calibri"/>
+              </a:rPr>
+              <a:t>5</a:t>
+            </a:r>
+          </a:p>
+        </p:txBody>
+      </p:sp>
+      <p:sp>
+        <p:nvSpPr>
+          <p:cNvPr id="17" name="TextBox 16"/>
+          <p:cNvSpPr txBox="1"/>
+          <p:nvPr/>
+        </p:nvSpPr>
+        <p:spPr>
+          <a:xfrm>
+            <a:off x="1417320" y="4681728"/>
+            <a:ext cx="10058400" cy="320040"/>
+          </a:xfrm>
+          <a:prstGeom prst="rect">
+            <a:avLst/>
+          </a:prstGeom>
+          <a:noFill/>
+        </p:spPr>
+        <p:txBody>
+          <a:bodyPr wrap="square" lIns="45720" rIns="45720" anchor="t">
+            <a:spAutoFit/>
+          </a:bodyPr>
+          <a:lstStyle/>
+          <a:p>
+            <a:pPr algn="l"/>
+            <a:r>
+              <a:rPr sz="1600" b="1" i="0">
+                <a:solidFill>
+                  <a:srgbClr val="663399"/>
+                </a:solidFill>
+                <a:latin typeface="Calibri"/>
+              </a:rPr>
+              <a:t>status = "disabled"</a:t>
+            </a:r>
+          </a:p>
+        </p:txBody>
+      </p:sp>
+      <p:sp>
+        <p:nvSpPr>
+          <p:cNvPr id="18" name="TextBox 17"/>
+          <p:cNvSpPr txBox="1"/>
+          <p:nvPr/>
+        </p:nvSpPr>
+        <p:spPr>
+          <a:xfrm>
+            <a:off x="1417320" y="4992624"/>
+            <a:ext cx="10058400" cy="320040"/>
+          </a:xfrm>
+          <a:prstGeom prst="rect">
+            <a:avLst/>
+          </a:prstGeom>
+          <a:noFill/>
+        </p:spPr>
+        <p:txBody>
+          <a:bodyPr wrap="square" lIns="45720" rIns="45720" anchor="t">
+            <a:spAutoFit/>
+          </a:bodyPr>
+          <a:lstStyle/>
+          <a:p>
+            <a:pPr algn="l"/>
+            <a:r>
+              <a:rPr sz="1300" b="0" i="0">
+                <a:solidFill>
+                  <a:srgbClr val="333333"/>
+                </a:solidFill>
+                <a:latin typeface="Calibri"/>
+              </a:rPr>
+              <a:t>Node is in the DT but kernel ignores it. Change to status = "okay" or add overlay.</a:t>
+            </a:r>
+          </a:p>
+        </p:txBody>
+      </p:sp>
+    </p:spTree>
+  </p:cSld>
+  <p:clrMapOvr>
+    <a:masterClrMapping/>
+  </p:clrMapOvr>
+</p:sld>
+</file>
+
+<file path=ppt/slides/slide7.xml><?xml version="1.0" encoding="utf-8"?>
+<p:sld xmlns:a="http://schemas.openxmlformats.org/drawingml/2006/main" xmlns:r="http://schemas.openxmlformats.org/officeDocument/2006/relationships" xmlns:p="http://schemas.openxmlformats.org/presentationml/2006/main">
+  <p:cSld>
+    <p:spTree>
+      <p:nvGrpSpPr>
+        <p:cNvPr id="1" name=""/>
+        <p:cNvGrpSpPr/>
+        <p:nvPr/>
+      </p:nvGrpSpPr>
+      <p:grpSpPr>
+        <a:xfrm>
+          <a:off x="0" y="0"/>
+          <a:ext cx="0" cy="0"/>
+          <a:chOff x="0" y="0"/>
+          <a:chExt cx="0" cy="0"/>
+        </a:xfrm>
+      </p:grpSpPr>
+      <p:sp>
+        <p:nvSpPr>
+          <p:cNvPr id="2" name="Title 1"/>
+          <p:cNvSpPr>
+            <a:spLocks noGrp="1"/>
+          </p:cNvSpPr>
+          <p:nvPr>
+            <p:ph type="title"/>
+          </p:nvPr>
+        </p:nvSpPr>
+        <p:spPr/>
+        <p:txBody>
+          <a:bodyPr/>
+          <a:lstStyle/>
+          <a:p>
+            <a:r>
+              <a:rPr sz="3200" b="1" dirty="0">
+                <a:latin typeface="Calibri"/>
+              </a:rPr>
+              <a:t>Failure Scenario 1</a:t>
+            </a:r>
+            <a:r>
+              <a:rPr lang="en-IN" sz="3200" b="1" dirty="0">
+                <a:latin typeface="Calibri"/>
+              </a:rPr>
+              <a:t>:</a:t>
+            </a:r>
+            <a:r>
+              <a:rPr sz="3200" b="1" dirty="0">
+                <a:latin typeface="Calibri"/>
+              </a:rPr>
+              <a:t> Walkthrough</a:t>
+            </a:r>
+          </a:p>
+        </p:txBody>
+      </p:sp>
+      <p:sp>
+        <p:nvSpPr>
+          <p:cNvPr id="3" name="TextBox 2"/>
+          <p:cNvSpPr txBox="1"/>
+          <p:nvPr/>
+        </p:nvSpPr>
+        <p:spPr>
+          <a:xfrm>
+            <a:off x="822960" y="1417320"/>
+            <a:ext cx="10515600" cy="365760"/>
+          </a:xfrm>
+          <a:prstGeom prst="rect">
+            <a:avLst/>
+          </a:prstGeom>
+          <a:noFill/>
+        </p:spPr>
+        <p:txBody>
+          <a:bodyPr wrap="square" lIns="45720" rIns="45720" anchor="t">
+            <a:spAutoFit/>
+          </a:bodyPr>
+          <a:lstStyle/>
+          <a:p>
+            <a:pPr algn="l"/>
+            <a:r>
+              <a:rPr sz="1500" b="0" i="1">
+                <a:solidFill>
+                  <a:srgbClr val="666666"/>
+                </a:solidFill>
+                <a:latin typeface="Calibri"/>
+              </a:rPr>
+              <a:t>GPIO LED node added; driver loads but no LED appears.</a:t>
             </a:r>
           </a:p>
         </p:txBody>
@@ -7328,6 +8742,7 @@
           <a:lstStyle/>
           <a:p>
             <a:pPr algn="ctr"/>
+            <a:endParaRPr/>
           </a:p>
         </p:txBody>
       </p:sp>
@@ -7372,6 +8787,7 @@
           <a:lstStyle/>
           <a:p>
             <a:pPr algn="ctr"/>
+            <a:endParaRPr/>
           </a:p>
         </p:txBody>
       </p:sp>
@@ -7409,7 +8825,7 @@
                 </a:solidFill>
                 <a:latin typeface="Consolas"/>
               </a:rPr>
-              <a:t># Your DT node</a:t>
+              <a:t># Your DT overlay snippet</a:t>
             </a:r>
           </a:p>
           <a:p>
@@ -7425,7 +8841,7 @@
                 </a:solidFill>
                 <a:latin typeface="Consolas"/>
               </a:rPr>
-              <a:t>&amp;i2c1 {</a:t>
+              <a:t>status_led: status-led {</a:t>
             </a:r>
           </a:p>
           <a:p>
@@ -7441,7 +8857,7 @@
                 </a:solidFill>
                 <a:latin typeface="Consolas"/>
               </a:rPr>
-              <a:t>    sensor: bme280@76 {</a:t>
+              <a:t>    compatible = "gpio-leds";</a:t>
             </a:r>
           </a:p>
           <a:p>
@@ -7457,7 +8873,7 @@
                 </a:solidFill>
                 <a:latin typeface="Consolas"/>
               </a:rPr>
-              <a:t>        compatible = "bosch,bme280";</a:t>
+              <a:t>    led-0 {</a:t>
             </a:r>
           </a:p>
           <a:p>
@@ -7473,7 +8889,7 @@
                 </a:solidFill>
                 <a:latin typeface="Consolas"/>
               </a:rPr>
-              <a:t>        reg = &lt;0x76&gt;;</a:t>
+              <a:t>        gpios = &lt;&amp;gpio 17 0&gt;;</a:t>
             </a:r>
           </a:p>
           <a:p>
@@ -7489,6 +8905,22 @@
                 </a:solidFill>
                 <a:latin typeface="Consolas"/>
               </a:rPr>
+              <a:t>        default-state = "off";</a:t>
+            </a:r>
+          </a:p>
+          <a:p>
+            <a:pPr>
+              <a:spcAft>
+                <a:spcPts val="0"/>
+              </a:spcAft>
+            </a:pPr>
+            <a:r>
+              <a:rPr sz="1000">
+                <a:solidFill>
+                  <a:srgbClr val="2D2D2D"/>
+                </a:solidFill>
+                <a:latin typeface="Consolas"/>
+              </a:rPr>
               <a:t>    };</a:t>
             </a:r>
           </a:p>
@@ -7537,7 +8969,7 @@
                 </a:solidFill>
                 <a:latin typeface="Consolas"/>
               </a:rPr>
-              <a:t># After boot — sensor doesn't appear</a:t>
+              <a:t># After boot — no LED in /sys/class/leds/</a:t>
             </a:r>
           </a:p>
           <a:p>
@@ -7553,7 +8985,7 @@
                 </a:solidFill>
                 <a:latin typeface="Consolas"/>
               </a:rPr>
-              <a:t>ls /sys/bus/i2c/devices/</a:t>
+              <a:t>ls /sys/class/leds/</a:t>
             </a:r>
           </a:p>
           <a:p>
@@ -7569,7 +9001,7 @@
                 </a:solidFill>
                 <a:latin typeface="Consolas"/>
               </a:rPr>
-              <a:t># (no entry)</a:t>
+              <a:t># (empty or missing your led)</a:t>
             </a:r>
           </a:p>
           <a:p>
@@ -7601,7 +9033,7 @@
                 </a:solidFill>
                 <a:latin typeface="Consolas"/>
               </a:rPr>
-              <a:t># Check that i2c1 is enabled</a:t>
+              <a:t># Check dmesg</a:t>
             </a:r>
           </a:p>
           <a:p>
@@ -7617,7 +9049,7 @@
                 </a:solidFill>
                 <a:latin typeface="Consolas"/>
               </a:rPr>
-              <a:t>cat /sys/firmware/devicetree/base/soc/i2c@*/status</a:t>
+              <a:t>dmesg | grep -i -E 'gpio-leds|led'</a:t>
             </a:r>
           </a:p>
           <a:p>
@@ -7633,7 +9065,7 @@
                 </a:solidFill>
                 <a:latin typeface="Consolas"/>
               </a:rPr>
-              <a:t># May show 'disabled'</a:t>
+              <a:t># → 'gpio-leds: probe failed with -EBUSY'</a:t>
             </a:r>
           </a:p>
           <a:p>
@@ -7665,7 +9097,23 @@
                 </a:solidFill>
                 <a:latin typeface="Consolas"/>
               </a:rPr>
-              <a:t># Diagnosis: i2c1 is disabled at the SoC level</a:t>
+              <a:t># Diagnosis: GPIO 17 is already claimed by another driver</a:t>
+            </a:r>
+          </a:p>
+          <a:p>
+            <a:pPr>
+              <a:spcAft>
+                <a:spcPts val="0"/>
+              </a:spcAft>
+            </a:pPr>
+            <a:r>
+              <a:rPr sz="1000">
+                <a:solidFill>
+                  <a:srgbClr val="2D2D2D"/>
+                </a:solidFill>
+                <a:latin typeface="Consolas"/>
+              </a:rPr>
+              <a:t>cat /sys/kernel/debug/gpio</a:t>
             </a:r>
           </a:p>
           <a:p>
@@ -7681,7 +9129,7 @@
                 </a:solidFill>
                 <a:latin typeface="Consolas"/>
               </a:rPr>
-              <a:t># Fix: enable i2c1 in your overlay</a:t>
+              <a:t># Look for 'gpio-17' — whatever holds it is the conflict</a:t>
             </a:r>
           </a:p>
           <a:p>
@@ -7707,61 +9155,13 @@
               </a:spcAft>
             </a:pPr>
             <a:r>
-              <a:rPr sz="1000">
-                <a:solidFill>
-                  <a:srgbClr val="2D2D2D"/>
+              <a:rPr sz="1000" i="1">
+                <a:solidFill>
+                  <a:srgbClr val="808080"/>
                 </a:solidFill>
                 <a:latin typeface="Consolas"/>
               </a:rPr>
-              <a:t>&amp;i2c1 {</a:t>
-            </a:r>
-          </a:p>
-          <a:p>
-            <a:pPr>
-              <a:spcAft>
-                <a:spcPts val="0"/>
-              </a:spcAft>
-            </a:pPr>
-            <a:r>
-              <a:rPr sz="1000">
-                <a:solidFill>
-                  <a:srgbClr val="2D2D2D"/>
-                </a:solidFill>
-                <a:latin typeface="Consolas"/>
-              </a:rPr>
-              <a:t>    status = "okay";</a:t>
-            </a:r>
-          </a:p>
-          <a:p>
-            <a:pPr>
-              <a:spcAft>
-                <a:spcPts val="0"/>
-              </a:spcAft>
-            </a:pPr>
-            <a:r>
-              <a:rPr sz="1000">
-                <a:solidFill>
-                  <a:srgbClr val="2D2D2D"/>
-                </a:solidFill>
-                <a:latin typeface="Consolas"/>
-              </a:rPr>
-              <a:t>    // ... sensor node here</a:t>
-            </a:r>
-          </a:p>
-          <a:p>
-            <a:pPr>
-              <a:spcAft>
-                <a:spcPts val="0"/>
-              </a:spcAft>
-            </a:pPr>
-            <a:r>
-              <a:rPr sz="1000">
-                <a:solidFill>
-                  <a:srgbClr val="2D2D2D"/>
-                </a:solidFill>
-                <a:latin typeface="Consolas"/>
-              </a:rPr>
-              <a:t>};</a:t>
+              <a:t># Fix: pick a free GPIO, or disable the conflicting node</a:t>
             </a:r>
           </a:p>
         </p:txBody>
@@ -7774,8 +9174,8 @@
 </p:sld>
 </file>
 
-<file path=ppt/slides/slide15.xml><?xml version="1.0" encoding="utf-8"?>
-<p:sld xmlns:a="http://schemas.openxmlformats.org/drawingml/2006/main" xmlns:p="http://schemas.openxmlformats.org/presentationml/2006/main" xmlns:r="http://schemas.openxmlformats.org/officeDocument/2006/relationships">
+<file path=ppt/slides/slide8.xml><?xml version="1.0" encoding="utf-8"?>
+<p:sld xmlns:a="http://schemas.openxmlformats.org/drawingml/2006/main" xmlns:r="http://schemas.openxmlformats.org/officeDocument/2006/relationships" xmlns:p="http://schemas.openxmlformats.org/presentationml/2006/main">
   <p:cSld>
     <p:spTree>
       <p:nvGrpSpPr>
@@ -7783,7 +9183,14 @@
         <p:cNvGrpSpPr/>
         <p:nvPr/>
       </p:nvGrpSpPr>
-      <p:grpSpPr/>
+      <p:grpSpPr>
+        <a:xfrm>
+          <a:off x="0" y="0"/>
+          <a:ext cx="0" cy="0"/>
+          <a:chOff x="0" y="0"/>
+          <a:chExt cx="0" cy="0"/>
+        </a:xfrm>
+      </p:grpSpPr>
       <p:sp>
         <p:nvSpPr>
           <p:cNvPr id="2" name="Title 1"/>
@@ -7800,13 +9207,22 @@
           <a:lstStyle/>
           <a:p>
             <a:r>
-              <a:rPr sz="3200" b="1">
-                <a:solidFill>
-                  <a:srgbClr val="CC0066"/>
-                </a:solidFill>
+              <a:rPr sz="3200" b="1" dirty="0">
                 <a:latin typeface="Calibri"/>
               </a:rPr>
-              <a:t>Failure Scenario 3 — Walkthrough</a:t>
+              <a:t>Failure Scenario 2</a:t>
+            </a:r>
+            <a:r>
+              <a:rPr lang="en-IN" sz="3200" b="1" dirty="0">
+                <a:latin typeface="Calibri"/>
+              </a:rPr>
+              <a:t>: </a:t>
+            </a:r>
+            <a:r>
+              <a:rPr sz="3200" b="1" dirty="0">
+                <a:latin typeface="Calibri"/>
+              </a:rPr>
+              <a:t>Walkthrough</a:t>
             </a:r>
           </a:p>
         </p:txBody>
@@ -7828,7 +9244,7 @@
           <a:noFill/>
         </p:spPr>
         <p:txBody>
-          <a:bodyPr wrap="square" anchor="t" lIns="45720" rIns="45720">
+          <a:bodyPr wrap="square" lIns="45720" rIns="45720" anchor="t">
             <a:spAutoFit/>
           </a:bodyPr>
           <a:lstStyle/>
@@ -7841,7 +9257,7 @@
                 </a:solidFill>
                 <a:latin typeface="Calibri"/>
               </a:rPr>
-              <a:t>Driver returns EPROBE_DEFER forever — missing clock.</a:t>
+              <a:t>I2C sensor in DT, kernel shows nothing under i2c bus.</a:t>
             </a:r>
           </a:p>
         </p:txBody>
@@ -7889,6 +9305,7 @@
           <a:lstStyle/>
           <a:p>
             <a:pPr algn="ctr"/>
+            <a:endParaRPr/>
           </a:p>
         </p:txBody>
       </p:sp>
@@ -7933,6 +9350,7 @@
           <a:lstStyle/>
           <a:p>
             <a:pPr algn="ctr"/>
+            <a:endParaRPr/>
           </a:p>
         </p:txBody>
       </p:sp>
@@ -7945,7 +9363,7 @@
         <p:spPr>
           <a:xfrm>
             <a:off x="1005840" y="1874519"/>
-            <a:ext cx="10241280" cy="4389120"/>
+            <a:ext cx="10241280" cy="4339650"/>
           </a:xfrm>
           <a:prstGeom prst="rect">
             <a:avLst/>
@@ -7964,71 +9382,183 @@
               </a:spcAft>
             </a:pPr>
             <a:r>
-              <a:rPr sz="1100" i="1">
+              <a:rPr sz="1200" i="1">
                 <a:solidFill>
                   <a:srgbClr val="808080"/>
                 </a:solidFill>
                 <a:latin typeface="Consolas"/>
               </a:rPr>
-              <a:t># Check what's deferred</a:t>
-            </a:r>
-          </a:p>
-          <a:p>
-            <a:pPr>
-              <a:spcAft>
-                <a:spcPts val="0"/>
-              </a:spcAft>
-            </a:pPr>
-            <a:r>
-              <a:rPr sz="1100">
+              <a:t># Your DT node</a:t>
+            </a:r>
+          </a:p>
+          <a:p>
+            <a:pPr>
+              <a:spcAft>
+                <a:spcPts val="0"/>
+              </a:spcAft>
+            </a:pPr>
+            <a:r>
+              <a:rPr sz="1200">
                 <a:solidFill>
                   <a:srgbClr val="2D2D2D"/>
                 </a:solidFill>
                 <a:latin typeface="Consolas"/>
               </a:rPr>
-              <a:t>cat /sys/kernel/debug/devices_deferred</a:t>
-            </a:r>
-          </a:p>
-          <a:p>
-            <a:pPr>
-              <a:spcAft>
-                <a:spcPts val="0"/>
-              </a:spcAft>
-            </a:pPr>
-            <a:r>
-              <a:rPr sz="1100" i="1">
+              <a:t>&amp;i2c1 {</a:t>
+            </a:r>
+          </a:p>
+          <a:p>
+            <a:pPr>
+              <a:spcAft>
+                <a:spcPts val="0"/>
+              </a:spcAft>
+            </a:pPr>
+            <a:r>
+              <a:rPr sz="1200">
+                <a:solidFill>
+                  <a:srgbClr val="2D2D2D"/>
+                </a:solidFill>
+                <a:latin typeface="Consolas"/>
+              </a:rPr>
+              <a:t>    sensor: bme280@76 {</a:t>
+            </a:r>
+          </a:p>
+          <a:p>
+            <a:pPr>
+              <a:spcAft>
+                <a:spcPts val="0"/>
+              </a:spcAft>
+            </a:pPr>
+            <a:r>
+              <a:rPr sz="1200">
+                <a:solidFill>
+                  <a:srgbClr val="2D2D2D"/>
+                </a:solidFill>
+                <a:latin typeface="Consolas"/>
+              </a:rPr>
+              <a:t>        compatible = "bosch,bme280";</a:t>
+            </a:r>
+          </a:p>
+          <a:p>
+            <a:pPr>
+              <a:spcAft>
+                <a:spcPts val="0"/>
+              </a:spcAft>
+            </a:pPr>
+            <a:r>
+              <a:rPr sz="1200">
+                <a:solidFill>
+                  <a:srgbClr val="2D2D2D"/>
+                </a:solidFill>
+                <a:latin typeface="Consolas"/>
+              </a:rPr>
+              <a:t>        reg = &lt;0x76&gt;;</a:t>
+            </a:r>
+          </a:p>
+          <a:p>
+            <a:pPr>
+              <a:spcAft>
+                <a:spcPts val="0"/>
+              </a:spcAft>
+            </a:pPr>
+            <a:r>
+              <a:rPr sz="1200">
+                <a:solidFill>
+                  <a:srgbClr val="2D2D2D"/>
+                </a:solidFill>
+                <a:latin typeface="Consolas"/>
+              </a:rPr>
+              <a:t>    };</a:t>
+            </a:r>
+          </a:p>
+          <a:p>
+            <a:pPr>
+              <a:spcAft>
+                <a:spcPts val="0"/>
+              </a:spcAft>
+            </a:pPr>
+            <a:r>
+              <a:rPr sz="1200">
+                <a:solidFill>
+                  <a:srgbClr val="2D2D2D"/>
+                </a:solidFill>
+                <a:latin typeface="Consolas"/>
+              </a:rPr>
+              <a:t>};</a:t>
+            </a:r>
+          </a:p>
+          <a:p>
+            <a:pPr>
+              <a:spcAft>
+                <a:spcPts val="0"/>
+              </a:spcAft>
+            </a:pPr>
+            <a:r>
+              <a:rPr sz="1200">
+                <a:solidFill>
+                  <a:srgbClr val="2D2D2D"/>
+                </a:solidFill>
+                <a:latin typeface="Consolas"/>
+              </a:rPr>
+              <a:t> </a:t>
+            </a:r>
+          </a:p>
+          <a:p>
+            <a:pPr>
+              <a:spcAft>
+                <a:spcPts val="0"/>
+              </a:spcAft>
+            </a:pPr>
+            <a:r>
+              <a:rPr sz="1200" i="1">
                 <a:solidFill>
                   <a:srgbClr val="808080"/>
                 </a:solidFill>
                 <a:latin typeface="Consolas"/>
               </a:rPr>
-              <a:t># Output:</a:t>
-            </a:r>
-          </a:p>
-          <a:p>
-            <a:pPr>
-              <a:spcAft>
-                <a:spcPts val="0"/>
-              </a:spcAft>
-            </a:pPr>
-            <a:r>
-              <a:rPr sz="1100" i="1">
+              <a:t># After boot — sensor doesn't appear</a:t>
+            </a:r>
+          </a:p>
+          <a:p>
+            <a:pPr>
+              <a:spcAft>
+                <a:spcPts val="0"/>
+              </a:spcAft>
+            </a:pPr>
+            <a:r>
+              <a:rPr sz="1200">
+                <a:solidFill>
+                  <a:srgbClr val="2D2D2D"/>
+                </a:solidFill>
+                <a:latin typeface="Consolas"/>
+              </a:rPr>
+              <a:t>ls /sys/bus/i2c/devices/</a:t>
+            </a:r>
+          </a:p>
+          <a:p>
+            <a:pPr>
+              <a:spcAft>
+                <a:spcPts val="0"/>
+              </a:spcAft>
+            </a:pPr>
+            <a:r>
+              <a:rPr sz="1200" i="1">
                 <a:solidFill>
                   <a:srgbClr val="808080"/>
                 </a:solidFill>
                 <a:latin typeface="Consolas"/>
               </a:rPr>
-              <a:t># 11000000.serial    serial8250-of</a:t>
-            </a:r>
-          </a:p>
-          <a:p>
-            <a:pPr>
-              <a:spcAft>
-                <a:spcPts val="0"/>
-              </a:spcAft>
-            </a:pPr>
-            <a:r>
-              <a:rPr sz="1100">
+              <a:t># (no entry)</a:t>
+            </a:r>
+          </a:p>
+          <a:p>
+            <a:pPr>
+              <a:spcAft>
+                <a:spcPts val="0"/>
+              </a:spcAft>
+            </a:pPr>
+            <a:r>
+              <a:rPr sz="1200">
                 <a:solidFill>
                   <a:srgbClr val="2D2D2D"/>
                 </a:solidFill>
@@ -8044,55 +9574,55 @@
               </a:spcAft>
             </a:pPr>
             <a:r>
-              <a:rPr sz="1100" i="1">
+              <a:rPr sz="1200" i="1">
                 <a:solidFill>
                   <a:srgbClr val="808080"/>
                 </a:solidFill>
                 <a:latin typeface="Consolas"/>
               </a:rPr>
-              <a:t># This serial port driver is stuck waiting for something</a:t>
-            </a:r>
-          </a:p>
-          <a:p>
-            <a:pPr>
-              <a:spcAft>
-                <a:spcPts val="0"/>
-              </a:spcAft>
-            </a:pPr>
-            <a:r>
-              <a:rPr sz="1100">
+              <a:t># Check that i2c1 is enabled</a:t>
+            </a:r>
+          </a:p>
+          <a:p>
+            <a:pPr>
+              <a:spcAft>
+                <a:spcPts val="0"/>
+              </a:spcAft>
+            </a:pPr>
+            <a:r>
+              <a:rPr sz="1200">
                 <a:solidFill>
                   <a:srgbClr val="2D2D2D"/>
                 </a:solidFill>
                 <a:latin typeface="Consolas"/>
               </a:rPr>
-              <a:t>dmesg | grep 11000000.serial</a:t>
-            </a:r>
-          </a:p>
-          <a:p>
-            <a:pPr>
-              <a:spcAft>
-                <a:spcPts val="0"/>
-              </a:spcAft>
-            </a:pPr>
-            <a:r>
-              <a:rPr sz="1100" i="1">
+              <a:t>cat /sys/firmware/devicetree/base/soc/i2c@*/status</a:t>
+            </a:r>
+          </a:p>
+          <a:p>
+            <a:pPr>
+              <a:spcAft>
+                <a:spcPts val="0"/>
+              </a:spcAft>
+            </a:pPr>
+            <a:r>
+              <a:rPr sz="1200" i="1">
                 <a:solidFill>
                   <a:srgbClr val="808080"/>
                 </a:solidFill>
                 <a:latin typeface="Consolas"/>
               </a:rPr>
-              <a:t># → 'failed to get clock'</a:t>
-            </a:r>
-          </a:p>
-          <a:p>
-            <a:pPr>
-              <a:spcAft>
-                <a:spcPts val="0"/>
-              </a:spcAft>
-            </a:pPr>
-            <a:r>
-              <a:rPr sz="1100">
+              <a:t># May show 'disabled'</a:t>
+            </a:r>
+          </a:p>
+          <a:p>
+            <a:pPr>
+              <a:spcAft>
+                <a:spcPts val="0"/>
+              </a:spcAft>
+            </a:pPr>
+            <a:r>
+              <a:rPr sz="1200">
                 <a:solidFill>
                   <a:srgbClr val="2D2D2D"/>
                 </a:solidFill>
@@ -8108,125 +9638,109 @@
               </a:spcAft>
             </a:pPr>
             <a:r>
-              <a:rPr sz="1100" i="1">
+              <a:rPr sz="1200" i="1">
                 <a:solidFill>
                   <a:srgbClr val="808080"/>
                 </a:solidFill>
                 <a:latin typeface="Consolas"/>
               </a:rPr>
-              <a:t># Look at the DT node for that device</a:t>
-            </a:r>
-          </a:p>
-          <a:p>
-            <a:pPr>
-              <a:spcAft>
-                <a:spcPts val="0"/>
-              </a:spcAft>
-            </a:pPr>
-            <a:r>
-              <a:rPr sz="1100">
+              <a:t># Diagnosis: i2c1 is disabled at the SoC level</a:t>
+            </a:r>
+          </a:p>
+          <a:p>
+            <a:pPr>
+              <a:spcAft>
+                <a:spcPts val="0"/>
+              </a:spcAft>
+            </a:pPr>
+            <a:r>
+              <a:rPr sz="1200" i="1">
+                <a:solidFill>
+                  <a:srgbClr val="808080"/>
+                </a:solidFill>
+                <a:latin typeface="Consolas"/>
+              </a:rPr>
+              <a:t># Fix: enable i2c1 in your overlay</a:t>
+            </a:r>
+          </a:p>
+          <a:p>
+            <a:pPr>
+              <a:spcAft>
+                <a:spcPts val="0"/>
+              </a:spcAft>
+            </a:pPr>
+            <a:r>
+              <a:rPr sz="1200">
                 <a:solidFill>
                   <a:srgbClr val="2D2D2D"/>
                 </a:solidFill>
                 <a:latin typeface="Consolas"/>
               </a:rPr>
-              <a:t>cat /sys/firmware/devicetree/base/soc/serial@11000000/clocks</a:t>
-            </a:r>
-          </a:p>
-          <a:p>
-            <a:pPr>
-              <a:spcAft>
-                <a:spcPts val="0"/>
-              </a:spcAft>
-            </a:pPr>
-            <a:r>
-              <a:rPr sz="1100" i="1">
-                <a:solidFill>
-                  <a:srgbClr val="808080"/>
+              <a:t> </a:t>
+            </a:r>
+          </a:p>
+          <a:p>
+            <a:pPr>
+              <a:spcAft>
+                <a:spcPts val="0"/>
+              </a:spcAft>
+            </a:pPr>
+            <a:r>
+              <a:rPr sz="1200">
+                <a:solidFill>
+                  <a:srgbClr val="2D2D2D"/>
                 </a:solidFill>
                 <a:latin typeface="Consolas"/>
               </a:rPr>
-              <a:t># Should reference a phandle to a clock provider</a:t>
-            </a:r>
-          </a:p>
-          <a:p>
-            <a:pPr>
-              <a:spcAft>
-                <a:spcPts val="0"/>
-              </a:spcAft>
-            </a:pPr>
-            <a:r>
-              <a:rPr sz="1100">
+              <a:t>&amp;i2c1 {</a:t>
+            </a:r>
+          </a:p>
+          <a:p>
+            <a:pPr>
+              <a:spcAft>
+                <a:spcPts val="0"/>
+              </a:spcAft>
+            </a:pPr>
+            <a:r>
+              <a:rPr sz="1200">
                 <a:solidFill>
                   <a:srgbClr val="2D2D2D"/>
                 </a:solidFill>
                 <a:latin typeface="Consolas"/>
               </a:rPr>
-              <a:t> </a:t>
-            </a:r>
-          </a:p>
-          <a:p>
-            <a:pPr>
-              <a:spcAft>
-                <a:spcPts val="0"/>
-              </a:spcAft>
-            </a:pPr>
-            <a:r>
-              <a:rPr sz="1100" i="1">
-                <a:solidFill>
-                  <a:srgbClr val="808080"/>
+              <a:t>    status = "okay";</a:t>
+            </a:r>
+          </a:p>
+          <a:p>
+            <a:pPr>
+              <a:spcAft>
+                <a:spcPts val="0"/>
+              </a:spcAft>
+            </a:pPr>
+            <a:r>
+              <a:rPr sz="1200">
+                <a:solidFill>
+                  <a:srgbClr val="2D2D2D"/>
                 </a:solidFill>
                 <a:latin typeface="Consolas"/>
               </a:rPr>
-              <a:t># Diagnosis: the clock provider node has status='disabled'</a:t>
-            </a:r>
-          </a:p>
-          <a:p>
-            <a:pPr>
-              <a:spcAft>
-                <a:spcPts val="0"/>
-              </a:spcAft>
-            </a:pPr>
-            <a:r>
-              <a:rPr sz="1100" i="1">
-                <a:solidFill>
-                  <a:srgbClr val="808080"/>
+              <a:t>    // ... sensor node here</a:t>
+            </a:r>
+          </a:p>
+          <a:p>
+            <a:pPr>
+              <a:spcAft>
+                <a:spcPts val="0"/>
+              </a:spcAft>
+            </a:pPr>
+            <a:r>
+              <a:rPr sz="1200">
+                <a:solidFill>
+                  <a:srgbClr val="2D2D2D"/>
                 </a:solidFill>
                 <a:latin typeface="Consolas"/>
               </a:rPr>
-              <a:t># or the phandle in 'clocks' points to a non-existent node</a:t>
-            </a:r>
-          </a:p>
-          <a:p>
-            <a:pPr>
-              <a:spcAft>
-                <a:spcPts val="0"/>
-              </a:spcAft>
-            </a:pPr>
-            <a:r>
-              <a:rPr sz="1100">
-                <a:solidFill>
-                  <a:srgbClr val="2D2D2D"/>
-                </a:solidFill>
-                <a:latin typeface="Consolas"/>
-              </a:rPr>
-              <a:t> </a:t>
-            </a:r>
-          </a:p>
-          <a:p>
-            <a:pPr>
-              <a:spcAft>
-                <a:spcPts val="0"/>
-              </a:spcAft>
-            </a:pPr>
-            <a:r>
-              <a:rPr sz="1100" i="1">
-                <a:solidFill>
-                  <a:srgbClr val="808080"/>
-                </a:solidFill>
-                <a:latin typeface="Consolas"/>
-              </a:rPr>
-              <a:t># Fix: enable the clock controller in DT, or fix the phandle reference</a:t>
+              <a:t>};</a:t>
             </a:r>
           </a:p>
         </p:txBody>
@@ -8239,8 +9753,8 @@
 </p:sld>
 </file>
 
-<file path=ppt/slides/slide16.xml><?xml version="1.0" encoding="utf-8"?>
-<p:sld xmlns:a="http://schemas.openxmlformats.org/drawingml/2006/main" xmlns:p="http://schemas.openxmlformats.org/presentationml/2006/main" xmlns:r="http://schemas.openxmlformats.org/officeDocument/2006/relationships">
+<file path=ppt/slides/slide9.xml><?xml version="1.0" encoding="utf-8"?>
+<p:sld xmlns:a="http://schemas.openxmlformats.org/drawingml/2006/main" xmlns:r="http://schemas.openxmlformats.org/officeDocument/2006/relationships" xmlns:p="http://schemas.openxmlformats.org/presentationml/2006/main">
   <p:cSld>
     <p:spTree>
       <p:nvGrpSpPr>
@@ -8248,7 +9762,14 @@
         <p:cNvGrpSpPr/>
         <p:nvPr/>
       </p:nvGrpSpPr>
-      <p:grpSpPr/>
+      <p:grpSpPr>
+        <a:xfrm>
+          <a:off x="0" y="0"/>
+          <a:ext cx="0" cy="0"/>
+          <a:chOff x="0" y="0"/>
+          <a:chExt cx="0" cy="0"/>
+        </a:xfrm>
+      </p:grpSpPr>
       <p:sp>
         <p:nvSpPr>
           <p:cNvPr id="2" name="Title 1"/>
@@ -8265,13 +9786,10 @@
           <a:lstStyle/>
           <a:p>
             <a:r>
-              <a:rPr sz="3200" b="1">
-                <a:solidFill>
-                  <a:srgbClr val="CC0066"/>
-                </a:solidFill>
+              <a:rPr sz="3200" b="1" dirty="0">
                 <a:latin typeface="Calibri"/>
               </a:rPr>
-              <a:t>Debug Cheat Sheet</a:t>
+              <a:t>Failure Scenario 3 — Walkthrough</a:t>
             </a:r>
           </a:p>
         </p:txBody>
@@ -8293,7 +9811,7 @@
           <a:noFill/>
         </p:spPr>
         <p:txBody>
-          <a:bodyPr wrap="square" anchor="t" lIns="45720" rIns="45720">
+          <a:bodyPr wrap="square" lIns="45720" rIns="45720" anchor="t">
             <a:spAutoFit/>
           </a:bodyPr>
           <a:lstStyle/>
@@ -8306,7 +9824,7 @@
                 </a:solidFill>
                 <a:latin typeface="Calibri"/>
               </a:rPr>
-              <a:t>Print this. Keep it on your desk.</a:t>
+              <a:t>Driver returns EPROBE_DEFER forever — missing clock.</a:t>
             </a:r>
           </a:p>
         </p:txBody>
@@ -8354,6 +9872,7 @@
           <a:lstStyle/>
           <a:p>
             <a:pPr algn="ctr"/>
+            <a:endParaRPr/>
           </a:p>
         </p:txBody>
       </p:sp>
@@ -8398,6 +9917,7 @@
           <a:lstStyle/>
           <a:p>
             <a:pPr algn="ctr"/>
+            <a:endParaRPr/>
           </a:p>
         </p:txBody>
       </p:sp>
@@ -8410,7 +9930,7 @@
         <p:spPr>
           <a:xfrm>
             <a:off x="1005840" y="1874519"/>
-            <a:ext cx="10241280" cy="4389120"/>
+            <a:ext cx="10241280" cy="3754874"/>
           </a:xfrm>
           <a:prstGeom prst="rect">
             <a:avLst/>
@@ -8429,71 +9949,135 @@
               </a:spcAft>
             </a:pPr>
             <a:r>
-              <a:rPr sz="1100" i="1">
+              <a:rPr sz="1400" i="1">
                 <a:solidFill>
                   <a:srgbClr val="808080"/>
                 </a:solidFill>
                 <a:latin typeface="Consolas"/>
               </a:rPr>
-              <a:t># WHAT BOUND, WHAT DIDN'T</a:t>
-            </a:r>
-          </a:p>
-          <a:p>
-            <a:pPr>
-              <a:spcAft>
-                <a:spcPts val="0"/>
-              </a:spcAft>
-            </a:pPr>
-            <a:r>
-              <a:rPr sz="1100">
+              <a:t># Check what's deferred</a:t>
+            </a:r>
+          </a:p>
+          <a:p>
+            <a:pPr>
+              <a:spcAft>
+                <a:spcPts val="0"/>
+              </a:spcAft>
+            </a:pPr>
+            <a:r>
+              <a:rPr sz="1400">
                 <a:solidFill>
                   <a:srgbClr val="2D2D2D"/>
                 </a:solidFill>
                 <a:latin typeface="Consolas"/>
               </a:rPr>
-              <a:t>ls /sys/bus/platform/devices/      # all platform devices</a:t>
-            </a:r>
-          </a:p>
-          <a:p>
-            <a:pPr>
-              <a:spcAft>
-                <a:spcPts val="0"/>
-              </a:spcAft>
-            </a:pPr>
-            <a:r>
-              <a:rPr sz="1100">
+              <a:t>cat /sys/kernel/debug/devices_deferred</a:t>
+            </a:r>
+          </a:p>
+          <a:p>
+            <a:pPr>
+              <a:spcAft>
+                <a:spcPts val="0"/>
+              </a:spcAft>
+            </a:pPr>
+            <a:r>
+              <a:rPr sz="1400" i="1">
+                <a:solidFill>
+                  <a:srgbClr val="808080"/>
+                </a:solidFill>
+                <a:latin typeface="Consolas"/>
+              </a:rPr>
+              <a:t># Output:</a:t>
+            </a:r>
+          </a:p>
+          <a:p>
+            <a:pPr>
+              <a:spcAft>
+                <a:spcPts val="0"/>
+              </a:spcAft>
+            </a:pPr>
+            <a:r>
+              <a:rPr sz="1400" i="1">
+                <a:solidFill>
+                  <a:srgbClr val="808080"/>
+                </a:solidFill>
+                <a:latin typeface="Consolas"/>
+              </a:rPr>
+              <a:t># 11000000.serial    serial8250-of</a:t>
+            </a:r>
+          </a:p>
+          <a:p>
+            <a:pPr>
+              <a:spcAft>
+                <a:spcPts val="0"/>
+              </a:spcAft>
+            </a:pPr>
+            <a:r>
+              <a:rPr sz="1400">
                 <a:solidFill>
                   <a:srgbClr val="2D2D2D"/>
                 </a:solidFill>
                 <a:latin typeface="Consolas"/>
               </a:rPr>
-              <a:t>ls /sys/class/                      # bound by class (leds, gpio, etc.)</a:t>
-            </a:r>
-          </a:p>
-          <a:p>
-            <a:pPr>
-              <a:spcAft>
-                <a:spcPts val="0"/>
-              </a:spcAft>
-            </a:pPr>
-            <a:r>
-              <a:rPr sz="1100">
+              <a:t> </a:t>
+            </a:r>
+          </a:p>
+          <a:p>
+            <a:pPr>
+              <a:spcAft>
+                <a:spcPts val="0"/>
+              </a:spcAft>
+            </a:pPr>
+            <a:r>
+              <a:rPr sz="1400" i="1">
+                <a:solidFill>
+                  <a:srgbClr val="808080"/>
+                </a:solidFill>
+                <a:latin typeface="Consolas"/>
+              </a:rPr>
+              <a:t># This serial port driver is stuck waiting for something</a:t>
+            </a:r>
+          </a:p>
+          <a:p>
+            <a:pPr>
+              <a:spcAft>
+                <a:spcPts val="0"/>
+              </a:spcAft>
+            </a:pPr>
+            <a:r>
+              <a:rPr sz="1400">
                 <a:solidFill>
                   <a:srgbClr val="2D2D2D"/>
                 </a:solidFill>
                 <a:latin typeface="Consolas"/>
               </a:rPr>
-              <a:t>cat /sys/kernel/debug/devices_deferred</a:t>
-            </a:r>
-          </a:p>
-          <a:p>
-            <a:pPr>
-              <a:spcAft>
-                <a:spcPts val="0"/>
-              </a:spcAft>
-            </a:pPr>
-            <a:r>
-              <a:rPr sz="1100">
+              <a:t>dmesg | grep 11000000.serial</a:t>
+            </a:r>
+          </a:p>
+          <a:p>
+            <a:pPr>
+              <a:spcAft>
+                <a:spcPts val="0"/>
+              </a:spcAft>
+            </a:pPr>
+            <a:r>
+              <a:rPr sz="1400" i="1">
+                <a:solidFill>
+                  <a:srgbClr val="808080"/>
+                </a:solidFill>
+                <a:latin typeface="Consolas"/>
+              </a:rPr>
+              <a:t># → 'failed to get clock'</a:t>
+            </a:r>
+          </a:p>
+          <a:p>
+            <a:pPr>
+              <a:spcAft>
+                <a:spcPts val="0"/>
+              </a:spcAft>
+            </a:pPr>
+            <a:r>
+              <a:rPr sz="1400">
                 <a:solidFill>
                   <a:srgbClr val="2D2D2D"/>
                 </a:solidFill>
@@ -8509,39 +10093,55 @@
               </a:spcAft>
             </a:pPr>
             <a:r>
-              <a:rPr sz="1100" i="1">
+              <a:rPr sz="1400" i="1">
                 <a:solidFill>
                   <a:srgbClr val="808080"/>
                 </a:solidFill>
                 <a:latin typeface="Consolas"/>
               </a:rPr>
-              <a:t># WHAT THE KERNEL SAID DURING BOOT</a:t>
-            </a:r>
-          </a:p>
-          <a:p>
-            <a:pPr>
-              <a:spcAft>
-                <a:spcPts val="0"/>
-              </a:spcAft>
-            </a:pPr>
-            <a:r>
-              <a:rPr sz="1100">
+              <a:t># Look at the DT node for that device</a:t>
+            </a:r>
+          </a:p>
+          <a:p>
+            <a:pPr>
+              <a:spcAft>
+                <a:spcPts val="0"/>
+              </a:spcAft>
+            </a:pPr>
+            <a:r>
+              <a:rPr sz="1400">
                 <a:solidFill>
                   <a:srgbClr val="2D2D2D"/>
                 </a:solidFill>
                 <a:latin typeface="Consolas"/>
               </a:rPr>
-              <a:t>dmesg | grep -i -E 'probe|defer|device tree|of_'</a:t>
-            </a:r>
-          </a:p>
-          <a:p>
-            <a:pPr>
-              <a:spcAft>
-                <a:spcPts val="0"/>
-              </a:spcAft>
-            </a:pPr>
-            <a:r>
-              <a:rPr sz="1100">
+              <a:t>cat /sys/firmware/devicetree/base/soc/serial@11000000/clocks</a:t>
+            </a:r>
+          </a:p>
+          <a:p>
+            <a:pPr>
+              <a:spcAft>
+                <a:spcPts val="0"/>
+              </a:spcAft>
+            </a:pPr>
+            <a:r>
+              <a:rPr sz="1400" i="1">
+                <a:solidFill>
+                  <a:srgbClr val="808080"/>
+                </a:solidFill>
+                <a:latin typeface="Consolas"/>
+              </a:rPr>
+              <a:t># Should reference a phandle to a clock provider</a:t>
+            </a:r>
+          </a:p>
+          <a:p>
+            <a:pPr>
+              <a:spcAft>
+                <a:spcPts val="0"/>
+              </a:spcAft>
+            </a:pPr>
+            <a:r>
+              <a:rPr sz="1400">
                 <a:solidFill>
                   <a:srgbClr val="2D2D2D"/>
                 </a:solidFill>
@@ -8557,1504 +10157,61 @@
               </a:spcAft>
             </a:pPr>
             <a:r>
-              <a:rPr sz="1100" i="1">
+              <a:rPr sz="1400" i="1">
                 <a:solidFill>
                   <a:srgbClr val="808080"/>
                 </a:solidFill>
                 <a:latin typeface="Consolas"/>
               </a:rPr>
-              <a:t># THE LIVE TREE</a:t>
-            </a:r>
-          </a:p>
-          <a:p>
-            <a:pPr>
-              <a:spcAft>
-                <a:spcPts val="0"/>
-              </a:spcAft>
-            </a:pPr>
-            <a:r>
-              <a:rPr sz="1100">
+              <a:t># Diagnosis: the clock provider node has status='disabled'</a:t>
+            </a:r>
+          </a:p>
+          <a:p>
+            <a:pPr>
+              <a:spcAft>
+                <a:spcPts val="0"/>
+              </a:spcAft>
+            </a:pPr>
+            <a:r>
+              <a:rPr sz="1400" i="1">
+                <a:solidFill>
+                  <a:srgbClr val="808080"/>
+                </a:solidFill>
+                <a:latin typeface="Consolas"/>
+              </a:rPr>
+              <a:t># or the phandle in 'clocks' points to a non-existent node</a:t>
+            </a:r>
+          </a:p>
+          <a:p>
+            <a:pPr>
+              <a:spcAft>
+                <a:spcPts val="0"/>
+              </a:spcAft>
+            </a:pPr>
+            <a:r>
+              <a:rPr sz="1400">
                 <a:solidFill>
                   <a:srgbClr val="2D2D2D"/>
                 </a:solidFill>
                 <a:latin typeface="Consolas"/>
               </a:rPr>
-              <a:t>dtc -I fs -O dts /sys/firmware/devicetree/base | less</a:t>
-            </a:r>
-          </a:p>
-          <a:p>
-            <a:pPr>
-              <a:spcAft>
-                <a:spcPts val="0"/>
-              </a:spcAft>
-            </a:pPr>
-            <a:r>
-              <a:rPr sz="1100">
-                <a:solidFill>
-                  <a:srgbClr val="2D2D2D"/>
+              <a:t> </a:t>
+            </a:r>
+          </a:p>
+          <a:p>
+            <a:pPr>
+              <a:spcAft>
+                <a:spcPts val="0"/>
+              </a:spcAft>
+            </a:pPr>
+            <a:r>
+              <a:rPr sz="1400" i="1">
+                <a:solidFill>
+                  <a:srgbClr val="808080"/>
                 </a:solidFill>
                 <a:latin typeface="Consolas"/>
               </a:rPr>
-              <a:t> </a:t>
-            </a:r>
-          </a:p>
-          <a:p>
-            <a:pPr>
-              <a:spcAft>
-                <a:spcPts val="0"/>
-              </a:spcAft>
-            </a:pPr>
-            <a:r>
-              <a:rPr sz="1100" i="1">
-                <a:solidFill>
-                  <a:srgbClr val="808080"/>
-                </a:solidFill>
-                <a:latin typeface="Consolas"/>
-              </a:rPr>
-              <a:t># A SPECIFIC NODE</a:t>
-            </a:r>
-          </a:p>
-          <a:p>
-            <a:pPr>
-              <a:spcAft>
-                <a:spcPts val="0"/>
-              </a:spcAft>
-            </a:pPr>
-            <a:r>
-              <a:rPr sz="1100">
-                <a:solidFill>
-                  <a:srgbClr val="2D2D2D"/>
-                </a:solidFill>
-                <a:latin typeface="Consolas"/>
-              </a:rPr>
-              <a:t>find /sys/firmware/devicetree/base/ -name 'serial*' -type d</a:t>
-            </a:r>
-          </a:p>
-          <a:p>
-            <a:pPr>
-              <a:spcAft>
-                <a:spcPts val="0"/>
-              </a:spcAft>
-            </a:pPr>
-            <a:r>
-              <a:rPr sz="1100">
-                <a:solidFill>
-                  <a:srgbClr val="2D2D2D"/>
-                </a:solidFill>
-                <a:latin typeface="Consolas"/>
-              </a:rPr>
-              <a:t>ls /sys/firmware/devicetree/base/soc/serial@11000000/</a:t>
-            </a:r>
-          </a:p>
-          <a:p>
-            <a:pPr>
-              <a:spcAft>
-                <a:spcPts val="0"/>
-              </a:spcAft>
-            </a:pPr>
-            <a:r>
-              <a:rPr sz="1100">
-                <a:solidFill>
-                  <a:srgbClr val="2D2D2D"/>
-                </a:solidFill>
-                <a:latin typeface="Consolas"/>
-              </a:rPr>
-              <a:t>cat /sys/firmware/devicetree/base/soc/serial@11000000/compatible</a:t>
-            </a:r>
-          </a:p>
-          <a:p>
-            <a:pPr>
-              <a:spcAft>
-                <a:spcPts val="0"/>
-              </a:spcAft>
-            </a:pPr>
-            <a:r>
-              <a:rPr sz="1100">
-                <a:solidFill>
-                  <a:srgbClr val="2D2D2D"/>
-                </a:solidFill>
-                <a:latin typeface="Consolas"/>
-              </a:rPr>
-              <a:t> </a:t>
-            </a:r>
-          </a:p>
-          <a:p>
-            <a:pPr>
-              <a:spcAft>
-                <a:spcPts val="0"/>
-              </a:spcAft>
-            </a:pPr>
-            <a:r>
-              <a:rPr sz="1100" i="1">
-                <a:solidFill>
-                  <a:srgbClr val="808080"/>
-                </a:solidFill>
-                <a:latin typeface="Consolas"/>
-              </a:rPr>
-              <a:t># GPIO USAGE</a:t>
-            </a:r>
-          </a:p>
-          <a:p>
-            <a:pPr>
-              <a:spcAft>
-                <a:spcPts val="0"/>
-              </a:spcAft>
-            </a:pPr>
-            <a:r>
-              <a:rPr sz="1100">
-                <a:solidFill>
-                  <a:srgbClr val="2D2D2D"/>
-                </a:solidFill>
-                <a:latin typeface="Consolas"/>
-              </a:rPr>
-              <a:t>cat /sys/kernel/debug/gpio</a:t>
-            </a:r>
-          </a:p>
-          <a:p>
-            <a:pPr>
-              <a:spcAft>
-                <a:spcPts val="0"/>
-              </a:spcAft>
-            </a:pPr>
-            <a:r>
-              <a:rPr sz="1100">
-                <a:solidFill>
-                  <a:srgbClr val="2D2D2D"/>
-                </a:solidFill>
-                <a:latin typeface="Consolas"/>
-              </a:rPr>
-              <a:t> </a:t>
-            </a:r>
-          </a:p>
-          <a:p>
-            <a:pPr>
-              <a:spcAft>
-                <a:spcPts val="0"/>
-              </a:spcAft>
-            </a:pPr>
-            <a:r>
-              <a:rPr sz="1100" i="1">
-                <a:solidFill>
-                  <a:srgbClr val="808080"/>
-                </a:solidFill>
-                <a:latin typeface="Consolas"/>
-              </a:rPr>
-              <a:t># I2C USAGE</a:t>
-            </a:r>
-          </a:p>
-          <a:p>
-            <a:pPr>
-              <a:spcAft>
-                <a:spcPts val="0"/>
-              </a:spcAft>
-            </a:pPr>
-            <a:r>
-              <a:rPr sz="1100">
-                <a:solidFill>
-                  <a:srgbClr val="2D2D2D"/>
-                </a:solidFill>
-                <a:latin typeface="Consolas"/>
-              </a:rPr>
-              <a:t>ls /sys/bus/i2c/devices/</a:t>
-            </a:r>
-          </a:p>
-          <a:p>
-            <a:pPr>
-              <a:spcAft>
-                <a:spcPts val="0"/>
-              </a:spcAft>
-            </a:pPr>
-            <a:r>
-              <a:rPr sz="1100">
-                <a:solidFill>
-                  <a:srgbClr val="2D2D2D"/>
-                </a:solidFill>
-                <a:latin typeface="Consolas"/>
-              </a:rPr>
-              <a:t>i2cdetect -y 1                      # scan i2c-1 for addresses</a:t>
-            </a:r>
-          </a:p>
-        </p:txBody>
-      </p:sp>
-    </p:spTree>
-  </p:cSld>
-  <p:clrMapOvr>
-    <a:masterClrMapping/>
-  </p:clrMapOvr>
-</p:sld>
-</file>
-
-<file path=ppt/slides/slide17.xml><?xml version="1.0" encoding="utf-8"?>
-<p:sld xmlns:a="http://schemas.openxmlformats.org/drawingml/2006/main" xmlns:p="http://schemas.openxmlformats.org/presentationml/2006/main" xmlns:r="http://schemas.openxmlformats.org/officeDocument/2006/relationships">
-  <p:cSld>
-    <p:spTree>
-      <p:nvGrpSpPr>
-        <p:cNvPr id="1" name=""/>
-        <p:cNvGrpSpPr/>
-        <p:nvPr/>
-      </p:nvGrpSpPr>
-      <p:grpSpPr/>
-      <p:sp>
-        <p:nvSpPr>
-          <p:cNvPr id="2" name="Title 1"/>
-          <p:cNvSpPr>
-            <a:spLocks noGrp="1"/>
-          </p:cNvSpPr>
-          <p:nvPr>
-            <p:ph type="title"/>
-          </p:nvPr>
-        </p:nvSpPr>
-        <p:spPr/>
-        <p:txBody>
-          <a:bodyPr/>
-          <a:lstStyle/>
-          <a:p>
-            <a:r>
-              <a:rPr sz="3200" b="1">
-                <a:solidFill>
-                  <a:srgbClr val="663399"/>
-                </a:solidFill>
-                <a:latin typeface="Calibri"/>
-              </a:rPr>
-              <a:t>Session Summary</a:t>
-            </a:r>
-          </a:p>
-        </p:txBody>
-      </p:sp>
-      <p:sp>
-        <p:nvSpPr>
-          <p:cNvPr id="3" name="TextBox 2"/>
-          <p:cNvSpPr txBox="1"/>
-          <p:nvPr/>
-        </p:nvSpPr>
-        <p:spPr>
-          <a:xfrm>
-            <a:off x="822960" y="1417320"/>
-            <a:ext cx="10515600" cy="365760"/>
-          </a:xfrm>
-          <a:prstGeom prst="rect">
-            <a:avLst/>
-          </a:prstGeom>
-          <a:noFill/>
-        </p:spPr>
-        <p:txBody>
-          <a:bodyPr wrap="square" anchor="t" lIns="45720" rIns="45720">
-            <a:spAutoFit/>
-          </a:bodyPr>
-          <a:lstStyle/>
-          <a:p>
-            <a:pPr algn="l"/>
-            <a:r>
-              <a:rPr sz="1500" b="0" i="1">
-                <a:solidFill>
-                  <a:srgbClr val="666666"/>
-                </a:solidFill>
-                <a:latin typeface="Calibri"/>
-              </a:rPr>
-              <a:t>5 things to remember from this session.</a:t>
-            </a:r>
-          </a:p>
-        </p:txBody>
-      </p:sp>
-      <p:sp>
-        <p:nvSpPr>
-          <p:cNvPr id="4" name="Rounded Rectangle 3"/>
-          <p:cNvSpPr/>
-          <p:nvPr/>
-        </p:nvSpPr>
-        <p:spPr>
-          <a:xfrm>
-            <a:off x="822960" y="1874519"/>
-            <a:ext cx="457200" cy="548640"/>
-          </a:xfrm>
-          <a:prstGeom prst="roundRect">
-            <a:avLst/>
-          </a:prstGeom>
-          <a:solidFill>
-            <a:srgbClr val="CC0066"/>
-          </a:solidFill>
-          <a:ln>
-            <a:noFill/>
-          </a:ln>
-          <a:effectLst/>
-        </p:spPr>
-        <p:style>
-          <a:lnRef idx="1">
-            <a:schemeClr val="accent1"/>
-          </a:lnRef>
-          <a:fillRef idx="3">
-            <a:schemeClr val="accent1"/>
-          </a:fillRef>
-          <a:effectRef idx="2">
-            <a:schemeClr val="accent1"/>
-          </a:effectRef>
-          <a:fontRef idx="minor">
-            <a:schemeClr val="lt1"/>
-          </a:fontRef>
-        </p:style>
-        <p:txBody>
-          <a:bodyPr rtlCol="0" anchor="ctr" lIns="0" rIns="0"/>
-          <a:lstStyle/>
-          <a:p>
-            <a:pPr algn="ctr"/>
-            <a:r>
-              <a:rPr sz="2200" b="1">
-                <a:solidFill>
-                  <a:srgbClr val="FFFFFF"/>
-                </a:solidFill>
-                <a:latin typeface="Calibri"/>
-              </a:rPr>
-              <a:t>1</a:t>
-            </a:r>
-          </a:p>
-        </p:txBody>
-      </p:sp>
-      <p:sp>
-        <p:nvSpPr>
-          <p:cNvPr id="5" name="TextBox 4"/>
-          <p:cNvSpPr txBox="1"/>
-          <p:nvPr/>
-        </p:nvSpPr>
-        <p:spPr>
-          <a:xfrm>
-            <a:off x="1417320" y="1874519"/>
-            <a:ext cx="10058400" cy="320040"/>
-          </a:xfrm>
-          <a:prstGeom prst="rect">
-            <a:avLst/>
-          </a:prstGeom>
-          <a:noFill/>
-        </p:spPr>
-        <p:txBody>
-          <a:bodyPr wrap="square" anchor="t" lIns="45720" rIns="45720">
-            <a:spAutoFit/>
-          </a:bodyPr>
-          <a:lstStyle/>
-          <a:p>
-            <a:pPr algn="l"/>
-            <a:r>
-              <a:rPr sz="1600" b="1" i="0">
-                <a:solidFill>
-                  <a:srgbClr val="663399"/>
-                </a:solidFill>
-                <a:latin typeface="Calibri"/>
-              </a:rPr>
-              <a:t>Read the live tree first</a:t>
-            </a:r>
-          </a:p>
-        </p:txBody>
-      </p:sp>
-      <p:sp>
-        <p:nvSpPr>
-          <p:cNvPr id="6" name="TextBox 5"/>
-          <p:cNvSpPr txBox="1"/>
-          <p:nvPr/>
-        </p:nvSpPr>
-        <p:spPr>
-          <a:xfrm>
-            <a:off x="1417320" y="2185415"/>
-            <a:ext cx="10058400" cy="320040"/>
-          </a:xfrm>
-          <a:prstGeom prst="rect">
-            <a:avLst/>
-          </a:prstGeom>
-          <a:noFill/>
-        </p:spPr>
-        <p:txBody>
-          <a:bodyPr wrap="square" anchor="t" lIns="45720" rIns="45720">
-            <a:spAutoFit/>
-          </a:bodyPr>
-          <a:lstStyle/>
-          <a:p>
-            <a:pPr algn="l"/>
-            <a:r>
-              <a:rPr sz="1300" b="0" i="0">
-                <a:solidFill>
-                  <a:srgbClr val="333333"/>
-                </a:solidFill>
-                <a:latin typeface="Calibri"/>
-              </a:rPr>
-              <a:t>/sys/firmware/devicetree/base is the truth; dtc decompiles it back to DTS</a:t>
-            </a:r>
-          </a:p>
-        </p:txBody>
-      </p:sp>
-      <p:sp>
-        <p:nvSpPr>
-          <p:cNvPr id="7" name="Rounded Rectangle 6"/>
-          <p:cNvSpPr/>
-          <p:nvPr/>
-        </p:nvSpPr>
-        <p:spPr>
-          <a:xfrm>
-            <a:off x="822960" y="2587752"/>
-            <a:ext cx="457200" cy="548640"/>
-          </a:xfrm>
-          <a:prstGeom prst="roundRect">
-            <a:avLst/>
-          </a:prstGeom>
-          <a:solidFill>
-            <a:srgbClr val="CC0066"/>
-          </a:solidFill>
-          <a:ln>
-            <a:noFill/>
-          </a:ln>
-          <a:effectLst/>
-        </p:spPr>
-        <p:style>
-          <a:lnRef idx="1">
-            <a:schemeClr val="accent1"/>
-          </a:lnRef>
-          <a:fillRef idx="3">
-            <a:schemeClr val="accent1"/>
-          </a:fillRef>
-          <a:effectRef idx="2">
-            <a:schemeClr val="accent1"/>
-          </a:effectRef>
-          <a:fontRef idx="minor">
-            <a:schemeClr val="lt1"/>
-          </a:fontRef>
-        </p:style>
-        <p:txBody>
-          <a:bodyPr rtlCol="0" anchor="ctr" lIns="0" rIns="0"/>
-          <a:lstStyle/>
-          <a:p>
-            <a:pPr algn="ctr"/>
-            <a:r>
-              <a:rPr sz="2200" b="1">
-                <a:solidFill>
-                  <a:srgbClr val="FFFFFF"/>
-                </a:solidFill>
-                <a:latin typeface="Calibri"/>
-              </a:rPr>
-              <a:t>2</a:t>
-            </a:r>
-          </a:p>
-        </p:txBody>
-      </p:sp>
-      <p:sp>
-        <p:nvSpPr>
-          <p:cNvPr id="8" name="TextBox 7"/>
-          <p:cNvSpPr txBox="1"/>
-          <p:nvPr/>
-        </p:nvSpPr>
-        <p:spPr>
-          <a:xfrm>
-            <a:off x="1417320" y="2587752"/>
-            <a:ext cx="10058400" cy="320040"/>
-          </a:xfrm>
-          <a:prstGeom prst="rect">
-            <a:avLst/>
-          </a:prstGeom>
-          <a:noFill/>
-        </p:spPr>
-        <p:txBody>
-          <a:bodyPr wrap="square" anchor="t" lIns="45720" rIns="45720">
-            <a:spAutoFit/>
-          </a:bodyPr>
-          <a:lstStyle/>
-          <a:p>
-            <a:pPr algn="l"/>
-            <a:r>
-              <a:rPr sz="1600" b="1" i="0">
-                <a:solidFill>
-                  <a:srgbClr val="663399"/>
-                </a:solidFill>
-                <a:latin typeface="Calibri"/>
-              </a:rPr>
-              <a:t>EPROBE_DEFER is not an error</a:t>
-            </a:r>
-          </a:p>
-        </p:txBody>
-      </p:sp>
-      <p:sp>
-        <p:nvSpPr>
-          <p:cNvPr id="9" name="TextBox 8"/>
-          <p:cNvSpPr txBox="1"/>
-          <p:nvPr/>
-        </p:nvSpPr>
-        <p:spPr>
-          <a:xfrm>
-            <a:off x="1417320" y="2898648"/>
-            <a:ext cx="10058400" cy="320040"/>
-          </a:xfrm>
-          <a:prstGeom prst="rect">
-            <a:avLst/>
-          </a:prstGeom>
-          <a:noFill/>
-        </p:spPr>
-        <p:txBody>
-          <a:bodyPr wrap="square" anchor="t" lIns="45720" rIns="45720">
-            <a:spAutoFit/>
-          </a:bodyPr>
-          <a:lstStyle/>
-          <a:p>
-            <a:pPr algn="l"/>
-            <a:r>
-              <a:rPr sz="1300" b="0" i="0">
-                <a:solidFill>
-                  <a:srgbClr val="333333"/>
-                </a:solidFill>
-                <a:latin typeface="Calibri"/>
-              </a:rPr>
-              <a:t>It's the kernel saying 'not ready yet'; look at devices_deferred</a:t>
-            </a:r>
-          </a:p>
-        </p:txBody>
-      </p:sp>
-      <p:sp>
-        <p:nvSpPr>
-          <p:cNvPr id="10" name="Rounded Rectangle 9"/>
-          <p:cNvSpPr/>
-          <p:nvPr/>
-        </p:nvSpPr>
-        <p:spPr>
-          <a:xfrm>
-            <a:off x="822960" y="3300984"/>
-            <a:ext cx="457200" cy="548640"/>
-          </a:xfrm>
-          <a:prstGeom prst="roundRect">
-            <a:avLst/>
-          </a:prstGeom>
-          <a:solidFill>
-            <a:srgbClr val="CC0066"/>
-          </a:solidFill>
-          <a:ln>
-            <a:noFill/>
-          </a:ln>
-          <a:effectLst/>
-        </p:spPr>
-        <p:style>
-          <a:lnRef idx="1">
-            <a:schemeClr val="accent1"/>
-          </a:lnRef>
-          <a:fillRef idx="3">
-            <a:schemeClr val="accent1"/>
-          </a:fillRef>
-          <a:effectRef idx="2">
-            <a:schemeClr val="accent1"/>
-          </a:effectRef>
-          <a:fontRef idx="minor">
-            <a:schemeClr val="lt1"/>
-          </a:fontRef>
-        </p:style>
-        <p:txBody>
-          <a:bodyPr rtlCol="0" anchor="ctr" lIns="0" rIns="0"/>
-          <a:lstStyle/>
-          <a:p>
-            <a:pPr algn="ctr"/>
-            <a:r>
-              <a:rPr sz="2200" b="1">
-                <a:solidFill>
-                  <a:srgbClr val="FFFFFF"/>
-                </a:solidFill>
-                <a:latin typeface="Calibri"/>
-              </a:rPr>
-              <a:t>3</a:t>
-            </a:r>
-          </a:p>
-        </p:txBody>
-      </p:sp>
-      <p:sp>
-        <p:nvSpPr>
-          <p:cNvPr id="11" name="TextBox 10"/>
-          <p:cNvSpPr txBox="1"/>
-          <p:nvPr/>
-        </p:nvSpPr>
-        <p:spPr>
-          <a:xfrm>
-            <a:off x="1417320" y="3300984"/>
-            <a:ext cx="10058400" cy="320040"/>
-          </a:xfrm>
-          <a:prstGeom prst="rect">
-            <a:avLst/>
-          </a:prstGeom>
-          <a:noFill/>
-        </p:spPr>
-        <p:txBody>
-          <a:bodyPr wrap="square" anchor="t" lIns="45720" rIns="45720">
-            <a:spAutoFit/>
-          </a:bodyPr>
-          <a:lstStyle/>
-          <a:p>
-            <a:pPr algn="l"/>
-            <a:r>
-              <a:rPr sz="1600" b="1" i="0">
-                <a:solidFill>
-                  <a:srgbClr val="663399"/>
-                </a:solidFill>
-                <a:latin typeface="Calibri"/>
-              </a:rPr>
-              <a:t>Five common failures cover most cases</a:t>
-            </a:r>
-          </a:p>
-        </p:txBody>
-      </p:sp>
-      <p:sp>
-        <p:nvSpPr>
-          <p:cNvPr id="12" name="TextBox 11"/>
-          <p:cNvSpPr txBox="1"/>
-          <p:nvPr/>
-        </p:nvSpPr>
-        <p:spPr>
-          <a:xfrm>
-            <a:off x="1417320" y="3611879"/>
-            <a:ext cx="10058400" cy="320040"/>
-          </a:xfrm>
-          <a:prstGeom prst="rect">
-            <a:avLst/>
-          </a:prstGeom>
-          <a:noFill/>
-        </p:spPr>
-        <p:txBody>
-          <a:bodyPr wrap="square" anchor="t" lIns="45720" rIns="45720">
-            <a:spAutoFit/>
-          </a:bodyPr>
-          <a:lstStyle/>
-          <a:p>
-            <a:pPr algn="l"/>
-            <a:r>
-              <a:rPr sz="1300" b="0" i="0">
-                <a:solidFill>
-                  <a:srgbClr val="333333"/>
-                </a:solidFill>
-                <a:latin typeface="Calibri"/>
-              </a:rPr>
-              <a:t>compatible, reg, clocks/resets, GPIO conflicts, status=disabled</a:t>
-            </a:r>
-          </a:p>
-        </p:txBody>
-      </p:sp>
-      <p:sp>
-        <p:nvSpPr>
-          <p:cNvPr id="13" name="Rounded Rectangle 12"/>
-          <p:cNvSpPr/>
-          <p:nvPr/>
-        </p:nvSpPr>
-        <p:spPr>
-          <a:xfrm>
-            <a:off x="822960" y="4014215"/>
-            <a:ext cx="457200" cy="548640"/>
-          </a:xfrm>
-          <a:prstGeom prst="roundRect">
-            <a:avLst/>
-          </a:prstGeom>
-          <a:solidFill>
-            <a:srgbClr val="CC0066"/>
-          </a:solidFill>
-          <a:ln>
-            <a:noFill/>
-          </a:ln>
-          <a:effectLst/>
-        </p:spPr>
-        <p:style>
-          <a:lnRef idx="1">
-            <a:schemeClr val="accent1"/>
-          </a:lnRef>
-          <a:fillRef idx="3">
-            <a:schemeClr val="accent1"/>
-          </a:fillRef>
-          <a:effectRef idx="2">
-            <a:schemeClr val="accent1"/>
-          </a:effectRef>
-          <a:fontRef idx="minor">
-            <a:schemeClr val="lt1"/>
-          </a:fontRef>
-        </p:style>
-        <p:txBody>
-          <a:bodyPr rtlCol="0" anchor="ctr" lIns="0" rIns="0"/>
-          <a:lstStyle/>
-          <a:p>
-            <a:pPr algn="ctr"/>
-            <a:r>
-              <a:rPr sz="2200" b="1">
-                <a:solidFill>
-                  <a:srgbClr val="FFFFFF"/>
-                </a:solidFill>
-                <a:latin typeface="Calibri"/>
-              </a:rPr>
-              <a:t>4</a:t>
-            </a:r>
-          </a:p>
-        </p:txBody>
-      </p:sp>
-      <p:sp>
-        <p:nvSpPr>
-          <p:cNvPr id="14" name="TextBox 13"/>
-          <p:cNvSpPr txBox="1"/>
-          <p:nvPr/>
-        </p:nvSpPr>
-        <p:spPr>
-          <a:xfrm>
-            <a:off x="1417320" y="4014215"/>
-            <a:ext cx="10058400" cy="320040"/>
-          </a:xfrm>
-          <a:prstGeom prst="rect">
-            <a:avLst/>
-          </a:prstGeom>
-          <a:noFill/>
-        </p:spPr>
-        <p:txBody>
-          <a:bodyPr wrap="square" anchor="t" lIns="45720" rIns="45720">
-            <a:spAutoFit/>
-          </a:bodyPr>
-          <a:lstStyle/>
-          <a:p>
-            <a:pPr algn="l"/>
-            <a:r>
-              <a:rPr sz="1600" b="1" i="0">
-                <a:solidFill>
-                  <a:srgbClr val="663399"/>
-                </a:solidFill>
-                <a:latin typeface="Calibri"/>
-              </a:rPr>
-              <a:t>dmesg + /sys + /sys/kernel/debug = your toolkit</a:t>
-            </a:r>
-          </a:p>
-        </p:txBody>
-      </p:sp>
-      <p:sp>
-        <p:nvSpPr>
-          <p:cNvPr id="15" name="TextBox 14"/>
-          <p:cNvSpPr txBox="1"/>
-          <p:nvPr/>
-        </p:nvSpPr>
-        <p:spPr>
-          <a:xfrm>
-            <a:off x="1417320" y="4325112"/>
-            <a:ext cx="10058400" cy="320040"/>
-          </a:xfrm>
-          <a:prstGeom prst="rect">
-            <a:avLst/>
-          </a:prstGeom>
-          <a:noFill/>
-        </p:spPr>
-        <p:txBody>
-          <a:bodyPr wrap="square" anchor="t" lIns="45720" rIns="45720">
-            <a:spAutoFit/>
-          </a:bodyPr>
-          <a:lstStyle/>
-          <a:p>
-            <a:pPr algn="l"/>
-            <a:r>
-              <a:rPr sz="1300" b="0" i="0">
-                <a:solidFill>
-                  <a:srgbClr val="333333"/>
-                </a:solidFill>
-                <a:latin typeface="Calibri"/>
-              </a:rPr>
-              <a:t>Three places give 95% of the information you need</a:t>
-            </a:r>
-          </a:p>
-        </p:txBody>
-      </p:sp>
-      <p:sp>
-        <p:nvSpPr>
-          <p:cNvPr id="16" name="Rounded Rectangle 15"/>
-          <p:cNvSpPr/>
-          <p:nvPr/>
-        </p:nvSpPr>
-        <p:spPr>
-          <a:xfrm>
-            <a:off x="822960" y="4727448"/>
-            <a:ext cx="457200" cy="548640"/>
-          </a:xfrm>
-          <a:prstGeom prst="roundRect">
-            <a:avLst/>
-          </a:prstGeom>
-          <a:solidFill>
-            <a:srgbClr val="CC0066"/>
-          </a:solidFill>
-          <a:ln>
-            <a:noFill/>
-          </a:ln>
-          <a:effectLst/>
-        </p:spPr>
-        <p:style>
-          <a:lnRef idx="1">
-            <a:schemeClr val="accent1"/>
-          </a:lnRef>
-          <a:fillRef idx="3">
-            <a:schemeClr val="accent1"/>
-          </a:fillRef>
-          <a:effectRef idx="2">
-            <a:schemeClr val="accent1"/>
-          </a:effectRef>
-          <a:fontRef idx="minor">
-            <a:schemeClr val="lt1"/>
-          </a:fontRef>
-        </p:style>
-        <p:txBody>
-          <a:bodyPr rtlCol="0" anchor="ctr" lIns="0" rIns="0"/>
-          <a:lstStyle/>
-          <a:p>
-            <a:pPr algn="ctr"/>
-            <a:r>
-              <a:rPr sz="2200" b="1">
-                <a:solidFill>
-                  <a:srgbClr val="FFFFFF"/>
-                </a:solidFill>
-                <a:latin typeface="Calibri"/>
-              </a:rPr>
-              <a:t>5</a:t>
-            </a:r>
-          </a:p>
-        </p:txBody>
-      </p:sp>
-      <p:sp>
-        <p:nvSpPr>
-          <p:cNvPr id="17" name="TextBox 16"/>
-          <p:cNvSpPr txBox="1"/>
-          <p:nvPr/>
-        </p:nvSpPr>
-        <p:spPr>
-          <a:xfrm>
-            <a:off x="1417320" y="4727448"/>
-            <a:ext cx="10058400" cy="320040"/>
-          </a:xfrm>
-          <a:prstGeom prst="rect">
-            <a:avLst/>
-          </a:prstGeom>
-          <a:noFill/>
-        </p:spPr>
-        <p:txBody>
-          <a:bodyPr wrap="square" anchor="t" lIns="45720" rIns="45720">
-            <a:spAutoFit/>
-          </a:bodyPr>
-          <a:lstStyle/>
-          <a:p>
-            <a:pPr algn="l"/>
-            <a:r>
-              <a:rPr sz="1600" b="1" i="0">
-                <a:solidFill>
-                  <a:srgbClr val="663399"/>
-                </a:solidFill>
-                <a:latin typeface="Calibri"/>
-              </a:rPr>
-              <a:t>DT bugs are hardware-specific</a:t>
-            </a:r>
-          </a:p>
-        </p:txBody>
-      </p:sp>
-      <p:sp>
-        <p:nvSpPr>
-          <p:cNvPr id="18" name="TextBox 17"/>
-          <p:cNvSpPr txBox="1"/>
-          <p:nvPr/>
-        </p:nvSpPr>
-        <p:spPr>
-          <a:xfrm>
-            <a:off x="1417320" y="5038344"/>
-            <a:ext cx="10058400" cy="320040"/>
-          </a:xfrm>
-          <a:prstGeom prst="rect">
-            <a:avLst/>
-          </a:prstGeom>
-          <a:noFill/>
-        </p:spPr>
-        <p:txBody>
-          <a:bodyPr wrap="square" anchor="t" lIns="45720" rIns="45720">
-            <a:spAutoFit/>
-          </a:bodyPr>
-          <a:lstStyle/>
-          <a:p>
-            <a:pPr algn="l"/>
-            <a:r>
-              <a:rPr sz="1300" b="0" i="0">
-                <a:solidFill>
-                  <a:srgbClr val="333333"/>
-                </a:solidFill>
-                <a:latin typeface="Calibri"/>
-              </a:rPr>
-              <a:t>Don't fix in software what's wrong in the DT — fix the DT</a:t>
-            </a:r>
-          </a:p>
-        </p:txBody>
-      </p:sp>
-      <p:sp>
-        <p:nvSpPr>
-          <p:cNvPr id="19" name="Rounded Rectangle 18"/>
-          <p:cNvSpPr/>
-          <p:nvPr/>
-        </p:nvSpPr>
-        <p:spPr>
-          <a:xfrm>
-            <a:off x="822960" y="5669280"/>
-            <a:ext cx="10561320" cy="640080"/>
-          </a:xfrm>
-          <a:prstGeom prst="roundRect">
-            <a:avLst/>
-          </a:prstGeom>
-          <a:solidFill>
-            <a:srgbClr val="FBE6F0"/>
-          </a:solidFill>
-          <a:ln>
-            <a:noFill/>
-          </a:ln>
-          <a:effectLst/>
-        </p:spPr>
-        <p:style>
-          <a:lnRef idx="1">
-            <a:schemeClr val="accent1"/>
-          </a:lnRef>
-          <a:fillRef idx="3">
-            <a:schemeClr val="accent1"/>
-          </a:fillRef>
-          <a:effectRef idx="2">
-            <a:schemeClr val="accent1"/>
-          </a:effectRef>
-          <a:fontRef idx="minor">
-            <a:schemeClr val="lt1"/>
-          </a:fontRef>
-        </p:style>
-        <p:txBody>
-          <a:bodyPr rtlCol="0" anchor="ctr" lIns="228600"/>
-          <a:lstStyle/>
-          <a:p>
-            <a:pPr algn="ctr"/>
-            <a:r>
-              <a:rPr sz="1400" b="1">
-                <a:solidFill>
-                  <a:srgbClr val="663399"/>
-                </a:solidFill>
-                <a:latin typeface="Calibri"/>
-              </a:rPr>
-              <a:t>Next session  →  </a:t>
-            </a:r>
-            <a:r>
-              <a:rPr sz="1400">
-                <a:solidFill>
-                  <a:srgbClr val="333333"/>
-                </a:solidFill>
-                <a:latin typeface="Calibri"/>
-              </a:rPr>
-              <a:t>Bootloader Overview (30 min)</a:t>
-            </a:r>
-          </a:p>
-        </p:txBody>
-      </p:sp>
-    </p:spTree>
-  </p:cSld>
-  <p:clrMapOvr>
-    <a:masterClrMapping/>
-  </p:clrMapOvr>
-</p:sld>
-</file>
-
-<file path=ppt/slides/slide7.xml><?xml version="1.0" encoding="utf-8"?>
-<p:sld xmlns:a="http://schemas.openxmlformats.org/drawingml/2006/main" xmlns:p="http://schemas.openxmlformats.org/presentationml/2006/main" xmlns:r="http://schemas.openxmlformats.org/officeDocument/2006/relationships">
-  <p:cSld>
-    <p:spTree>
-      <p:nvGrpSpPr>
-        <p:cNvPr id="1" name=""/>
-        <p:cNvGrpSpPr/>
-        <p:nvPr/>
-      </p:nvGrpSpPr>
-      <p:grpSpPr/>
-      <p:sp>
-        <p:nvSpPr>
-          <p:cNvPr id="2" name="Title 1"/>
-          <p:cNvSpPr>
-            <a:spLocks noGrp="1"/>
-          </p:cNvSpPr>
-          <p:nvPr>
-            <p:ph type="ctrTitle"/>
-          </p:nvPr>
-        </p:nvSpPr>
-        <p:spPr/>
-        <p:txBody>
-          <a:bodyPr/>
-          <a:lstStyle/>
-          <a:p>
-            <a:r>
-              <a:rPr sz="4400" b="1">
-                <a:solidFill>
-                  <a:srgbClr val="FFFFFF"/>
-                </a:solidFill>
-                <a:latin typeface="Calibri"/>
-              </a:rPr>
-              <a:t>Device Tree Debugging</a:t>
-            </a:r>
-          </a:p>
-        </p:txBody>
-      </p:sp>
-      <p:sp>
-        <p:nvSpPr>
-          <p:cNvPr id="3" name="Subtitle 2"/>
-          <p:cNvSpPr>
-            <a:spLocks noGrp="1"/>
-          </p:cNvSpPr>
-          <p:nvPr>
-            <p:ph type="subTitle" idx="1"/>
-          </p:nvPr>
-        </p:nvSpPr>
-        <p:spPr/>
-        <p:txBody>
-          <a:bodyPr/>
-          <a:lstStyle/>
-          <a:p>
-            <a:r>
-              <a:rPr sz="2200" i="1">
-                <a:solidFill>
-                  <a:srgbClr val="FFFFFF"/>
-                </a:solidFill>
-                <a:latin typeface="Calibri"/>
-              </a:rPr>
-              <a:t>Day 3 • Session 3 • 60 minutes</a:t>
-            </a:r>
-          </a:p>
-          <a:p>
-            <a:r>
-              <a:rPr sz="1800">
-                <a:solidFill>
-                  <a:srgbClr val="FFFFFF"/>
-                </a:solidFill>
-                <a:latin typeface="Calibri"/>
-              </a:rPr>
-              <a:t>Diagnose bring-up issues fast</a:t>
-            </a:r>
-          </a:p>
-        </p:txBody>
-      </p:sp>
-    </p:spTree>
-  </p:cSld>
-  <p:clrMapOvr>
-    <a:masterClrMapping/>
-  </p:clrMapOvr>
-</p:sld>
-</file>
-
-<file path=ppt/slides/slide8.xml><?xml version="1.0" encoding="utf-8"?>
-<p:sld xmlns:a="http://schemas.openxmlformats.org/drawingml/2006/main" xmlns:p="http://schemas.openxmlformats.org/presentationml/2006/main" xmlns:r="http://schemas.openxmlformats.org/officeDocument/2006/relationships">
-  <p:cSld>
-    <p:spTree>
-      <p:nvGrpSpPr>
-        <p:cNvPr id="1" name=""/>
-        <p:cNvGrpSpPr/>
-        <p:nvPr/>
-      </p:nvGrpSpPr>
-      <p:grpSpPr/>
-      <p:sp>
-        <p:nvSpPr>
-          <p:cNvPr id="2" name="Title 1"/>
-          <p:cNvSpPr>
-            <a:spLocks noGrp="1"/>
-          </p:cNvSpPr>
-          <p:nvPr>
-            <p:ph type="title"/>
-          </p:nvPr>
-        </p:nvSpPr>
-        <p:spPr/>
-        <p:txBody>
-          <a:bodyPr/>
-          <a:lstStyle/>
-          <a:p>
-            <a:r>
-              <a:rPr sz="3200" b="1">
-                <a:solidFill>
-                  <a:srgbClr val="CC0066"/>
-                </a:solidFill>
-                <a:latin typeface="Calibri"/>
-              </a:rPr>
-              <a:t>Session Agenda</a:t>
-            </a:r>
-          </a:p>
-        </p:txBody>
-      </p:sp>
-      <p:sp>
-        <p:nvSpPr>
-          <p:cNvPr id="3" name="TextBox 2"/>
-          <p:cNvSpPr txBox="1"/>
-          <p:nvPr/>
-        </p:nvSpPr>
-        <p:spPr>
-          <a:xfrm>
-            <a:off x="822960" y="1463040"/>
-            <a:ext cx="10515600" cy="5029200"/>
-          </a:xfrm>
-          <a:prstGeom prst="rect">
-            <a:avLst/>
-          </a:prstGeom>
-          <a:noFill/>
-        </p:spPr>
-        <p:txBody>
-          <a:bodyPr wrap="square" lIns="45720" rIns="45720">
-            <a:spAutoFit/>
-          </a:bodyPr>
-          <a:lstStyle/>
-          <a:p>
-            <a:pPr>
-              <a:spcAft>
-                <a:spcPts val="600"/>
-              </a:spcAft>
-            </a:pPr>
-            <a:r>
-              <a:rPr sz="2000" b="0" i="0">
-                <a:solidFill>
-                  <a:srgbClr val="333333"/>
-                </a:solidFill>
-                <a:latin typeface="Calibri"/>
-              </a:rPr>
-              <a:t>1.  DT recap — what it is, what it does</a:t>
-            </a:r>
-          </a:p>
-          <a:p>
-            <a:pPr>
-              <a:spcAft>
-                <a:spcPts val="600"/>
-              </a:spcAft>
-            </a:pPr>
-            <a:r>
-              <a:rPr sz="2000" b="0" i="0">
-                <a:solidFill>
-                  <a:srgbClr val="333333"/>
-                </a:solidFill>
-                <a:latin typeface="Calibri"/>
-              </a:rPr>
-              <a:t>2.  Where to look on a running system</a:t>
-            </a:r>
-          </a:p>
-          <a:p>
-            <a:pPr>
-              <a:spcAft>
-                <a:spcPts val="600"/>
-              </a:spcAft>
-            </a:pPr>
-            <a:r>
-              <a:rPr sz="2000" b="0" i="0">
-                <a:solidFill>
-                  <a:srgbClr val="333333"/>
-                </a:solidFill>
-                <a:latin typeface="Calibri"/>
-              </a:rPr>
-              <a:t>3.  EPROBE_DEFER — Linux's retry mechanism</a:t>
-            </a:r>
-          </a:p>
-          <a:p>
-            <a:pPr>
-              <a:spcAft>
-                <a:spcPts val="600"/>
-              </a:spcAft>
-            </a:pPr>
-            <a:r>
-              <a:rPr sz="2000" b="0" i="0">
-                <a:solidFill>
-                  <a:srgbClr val="333333"/>
-                </a:solidFill>
-                <a:latin typeface="Calibri"/>
-              </a:rPr>
-              <a:t>4.  Five common failure modes</a:t>
-            </a:r>
-          </a:p>
-          <a:p>
-            <a:pPr>
-              <a:spcAft>
-                <a:spcPts val="600"/>
-              </a:spcAft>
-            </a:pPr>
-            <a:r>
-              <a:rPr sz="2000" b="0" i="0">
-                <a:solidFill>
-                  <a:srgbClr val="333333"/>
-                </a:solidFill>
-                <a:latin typeface="Calibri"/>
-              </a:rPr>
-              <a:t>5.  Pre-recorded failure scenarios — walkthrough</a:t>
-            </a:r>
-          </a:p>
-          <a:p>
-            <a:pPr>
-              <a:spcAft>
-                <a:spcPts val="600"/>
-              </a:spcAft>
-            </a:pPr>
-            <a:r>
-              <a:rPr sz="2000" b="0" i="0">
-                <a:solidFill>
-                  <a:srgbClr val="333333"/>
-                </a:solidFill>
-                <a:latin typeface="Calibri"/>
-              </a:rPr>
-              <a:t>6.  Debug cheat sheet</a:t>
-            </a:r>
-          </a:p>
-        </p:txBody>
-      </p:sp>
-    </p:spTree>
-  </p:cSld>
-  <p:clrMapOvr>
-    <a:masterClrMapping/>
-  </p:clrMapOvr>
-</p:sld>
-</file>
-
-<file path=ppt/slides/slide9.xml><?xml version="1.0" encoding="utf-8"?>
-<p:sld xmlns:a="http://schemas.openxmlformats.org/drawingml/2006/main" xmlns:p="http://schemas.openxmlformats.org/presentationml/2006/main" xmlns:r="http://schemas.openxmlformats.org/officeDocument/2006/relationships">
-  <p:cSld>
-    <p:spTree>
-      <p:nvGrpSpPr>
-        <p:cNvPr id="1" name=""/>
-        <p:cNvGrpSpPr/>
-        <p:nvPr/>
-      </p:nvGrpSpPr>
-      <p:grpSpPr/>
-      <p:sp>
-        <p:nvSpPr>
-          <p:cNvPr id="2" name="Title 1"/>
-          <p:cNvSpPr>
-            <a:spLocks noGrp="1"/>
-          </p:cNvSpPr>
-          <p:nvPr>
-            <p:ph type="title"/>
-          </p:nvPr>
-        </p:nvSpPr>
-        <p:spPr/>
-        <p:txBody>
-          <a:bodyPr/>
-          <a:lstStyle/>
-          <a:p>
-            <a:r>
-              <a:rPr sz="3200" b="1">
-                <a:solidFill>
-                  <a:srgbClr val="CC0066"/>
-                </a:solidFill>
-                <a:latin typeface="Calibri"/>
-              </a:rPr>
-              <a:t>DT Recap</a:t>
-            </a:r>
-          </a:p>
-        </p:txBody>
-      </p:sp>
-      <p:sp>
-        <p:nvSpPr>
-          <p:cNvPr id="3" name="TextBox 2"/>
-          <p:cNvSpPr txBox="1"/>
-          <p:nvPr/>
-        </p:nvSpPr>
-        <p:spPr>
-          <a:xfrm>
-            <a:off x="822960" y="1417320"/>
-            <a:ext cx="10515600" cy="365760"/>
-          </a:xfrm>
-          <a:prstGeom prst="rect">
-            <a:avLst/>
-          </a:prstGeom>
-          <a:noFill/>
-        </p:spPr>
-        <p:txBody>
-          <a:bodyPr wrap="square" anchor="t" lIns="45720" rIns="45720">
-            <a:spAutoFit/>
-          </a:bodyPr>
-          <a:lstStyle/>
-          <a:p>
-            <a:pPr algn="l"/>
-            <a:r>
-              <a:rPr sz="1500" b="0" i="1">
-                <a:solidFill>
-                  <a:srgbClr val="666666"/>
-                </a:solidFill>
-                <a:latin typeface="Calibri"/>
-              </a:rPr>
-              <a:t>Quick refresher before we go debugging.</a:t>
-            </a:r>
-          </a:p>
-        </p:txBody>
-      </p:sp>
-      <p:sp>
-        <p:nvSpPr>
-          <p:cNvPr id="4" name="TextBox 3"/>
-          <p:cNvSpPr txBox="1"/>
-          <p:nvPr/>
-        </p:nvSpPr>
-        <p:spPr>
-          <a:xfrm>
-            <a:off x="822960" y="1783080"/>
-            <a:ext cx="10515600" cy="4572000"/>
-          </a:xfrm>
-          <a:prstGeom prst="rect">
-            <a:avLst/>
-          </a:prstGeom>
-          <a:noFill/>
-        </p:spPr>
-        <p:txBody>
-          <a:bodyPr wrap="square" lIns="45720" rIns="45720">
-            <a:spAutoFit/>
-          </a:bodyPr>
-          <a:lstStyle/>
-          <a:p>
-            <a:pPr>
-              <a:spcAft>
-                <a:spcPts val="400"/>
-              </a:spcAft>
-            </a:pPr>
-            <a:r>
-              <a:rPr sz="1500" b="1" i="0">
-                <a:solidFill>
-                  <a:srgbClr val="CC0066"/>
-                </a:solidFill>
-                <a:latin typeface="Calibri"/>
-              </a:rPr>
-              <a:t>Device tree describes hardware to the kernel</a:t>
-            </a:r>
-          </a:p>
-          <a:p>
-            <a:pPr>
-              <a:spcAft>
-                <a:spcPts val="1000"/>
-              </a:spcAft>
-            </a:pPr>
-            <a:r>
-              <a:rPr sz="1300" b="0" i="0">
-                <a:solidFill>
-                  <a:srgbClr val="333333"/>
-                </a:solidFill>
-                <a:latin typeface="Calibri"/>
-              </a:rPr>
-              <a:t>Without it, the kernel would need code for every board. With it, the same kernel boots many boards.</a:t>
-            </a:r>
-          </a:p>
-          <a:p>
-            <a:pPr>
-              <a:spcAft>
-                <a:spcPts val="400"/>
-              </a:spcAft>
-            </a:pPr>
-            <a:r>
-              <a:rPr sz="1500" b="1" i="0">
-                <a:solidFill>
-                  <a:srgbClr val="CC0066"/>
-                </a:solidFill>
-                <a:latin typeface="Calibri"/>
-              </a:rPr>
-              <a:t>Anatomy</a:t>
-            </a:r>
-          </a:p>
-          <a:p>
-            <a:pPr>
-              <a:spcAft>
-                <a:spcPts val="400"/>
-              </a:spcAft>
-            </a:pPr>
-            <a:r>
-              <a:rPr sz="1300" b="0" i="0">
-                <a:solidFill>
-                  <a:srgbClr val="333333"/>
-                </a:solidFill>
-                <a:latin typeface="Calibri"/>
-              </a:rPr>
-              <a:t>• Nodes — components (cpu, i2c, gpio, ...)</a:t>
-            </a:r>
-          </a:p>
-          <a:p>
-            <a:pPr>
-              <a:spcAft>
-                <a:spcPts val="400"/>
-              </a:spcAft>
-            </a:pPr>
-            <a:r>
-              <a:rPr sz="1300" b="0" i="0">
-                <a:solidFill>
-                  <a:srgbClr val="333333"/>
-                </a:solidFill>
-                <a:latin typeface="Calibri"/>
-              </a:rPr>
-              <a:t>• Properties — key/value attributes of a node</a:t>
-            </a:r>
-          </a:p>
-          <a:p>
-            <a:pPr>
-              <a:spcAft>
-                <a:spcPts val="400"/>
-              </a:spcAft>
-            </a:pPr>
-            <a:r>
-              <a:rPr sz="1300" b="0" i="0">
-                <a:solidFill>
-                  <a:srgbClr val="333333"/>
-                </a:solidFill>
-                <a:latin typeface="Calibri"/>
-              </a:rPr>
-              <a:t>• compatible — string matching a driver</a:t>
-            </a:r>
-          </a:p>
-          <a:p>
-            <a:pPr>
-              <a:spcAft>
-                <a:spcPts val="400"/>
-              </a:spcAft>
-            </a:pPr>
-            <a:r>
-              <a:rPr sz="1300" b="0" i="0">
-                <a:solidFill>
-                  <a:srgbClr val="333333"/>
-                </a:solidFill>
-                <a:latin typeface="Calibri"/>
-              </a:rPr>
-              <a:t>• reg — memory-mapped address</a:t>
-            </a:r>
-          </a:p>
-          <a:p>
-            <a:pPr>
-              <a:spcAft>
-                <a:spcPts val="400"/>
-              </a:spcAft>
-            </a:pPr>
-            <a:r>
-              <a:rPr sz="1300" b="0" i="0">
-                <a:solidFill>
-                  <a:srgbClr val="333333"/>
-                </a:solidFill>
-                <a:latin typeface="Calibri"/>
-              </a:rPr>
-              <a:t>• status — disabled vs okay</a:t>
-            </a:r>
-          </a:p>
-          <a:p>
-            <a:pPr>
-              <a:spcAft>
-                <a:spcPts val="1000"/>
-              </a:spcAft>
-            </a:pPr>
-            <a:r>
-              <a:rPr sz="1300" b="0" i="0">
-                <a:solidFill>
-                  <a:srgbClr val="333333"/>
-                </a:solidFill>
-                <a:latin typeface="Calibri"/>
-              </a:rPr>
-              <a:t>• phandle/references — link nodes (e.g., to a clock)</a:t>
-            </a:r>
-          </a:p>
-          <a:p>
-            <a:pPr>
-              <a:spcAft>
-                <a:spcPts val="400"/>
-              </a:spcAft>
-            </a:pPr>
-            <a:r>
-              <a:rPr sz="1500" b="1" i="0">
-                <a:solidFill>
-                  <a:srgbClr val="663399"/>
-                </a:solidFill>
-                <a:latin typeface="Calibri"/>
-              </a:rPr>
-              <a:t>The driver binding model</a:t>
-            </a:r>
-          </a:p>
-          <a:p>
-            <a:pPr>
-              <a:spcAft>
-                <a:spcPts val="400"/>
-              </a:spcAft>
-            </a:pPr>
-            <a:r>
-              <a:rPr sz="1300" b="0" i="0">
-                <a:solidFill>
-                  <a:srgbClr val="333333"/>
-                </a:solidFill>
-                <a:latin typeface="Calibri"/>
-              </a:rPr>
-              <a:t>Driver advertises a compatible string. Kernel finds a node with matching compatible. Driver's probe() is called.</a:t>
+              <a:t># Fix: enable the clock controller in DT, or fix the phandle reference</a:t>
             </a:r>
           </a:p>
         </p:txBody>
